--- a/docs/submission/ResponseCompass-deck.pptx
+++ b/docs/submission/ResponseCompass-deck.pptx
@@ -1001,7 +1001,7 @@
           <a:lstStyle/>
           <a:p>
             <a:r>
-              <a:t>A disagreement marker in the event feed means Compass chose differently from either baseline. Open the recommendation record to see which baseline and to read the rationale.</a:t>
+              <a:t>This record was captured live on AMD Token Factory with MiMo-V2.6-Flash on 2026-10-17 (simulated time 6 October). Both baselines picked someone else: nearest chose Optr375, the naive score chose Tech363. One good outcome is not proof of better performance; the disagreement is recorded so it can be reviewed. In that capture, 7 of 11 live rankings returned valid output; the rest fell back deterministically.</a:t>
             </a:r>
           </a:p>
         </p:txBody>
@@ -7920,7 +7920,7 @@
                 </a:solidFill>
                 <a:latin typeface="Inter"/>
               </a:rPr>
-              <a:t>Live demo highlights</a:t>
+              <a:t>A real MiMo ranking, end to end</a:t>
             </a:r>
           </a:p>
         </p:txBody>
@@ -7933,8 +7933,8 @@
         </p:nvSpPr>
         <p:spPr>
           <a:xfrm>
-            <a:off x="548640" y="1463040"/>
-            <a:ext cx="5120640" cy="4754880"/>
+            <a:off x="548640" y="1051560"/>
+            <a:ext cx="11064240" cy="457200"/>
           </a:xfrm>
           <a:prstGeom prst="rect">
             <a:avLst/>
@@ -7942,6 +7942,41 @@
           <a:noFill/>
         </p:spPr>
         <p:txBody>
+          <a:bodyPr wrap="square" lIns="0" rIns="0" tIns="0" bIns="0">
+            <a:spAutoFit/>
+          </a:bodyPr>
+          <a:lstStyle/>
+          <a:p>
+            <a:pPr algn="l"/>
+            <a:r>
+              <a:rPr sz="1600" b="0">
+                <a:solidFill>
+                  <a:srgbClr val="5B6474"/>
+                </a:solidFill>
+                <a:latin typeface="Inter"/>
+              </a:rPr>
+              <a:t>ISS-3642, captured live on AMD Token Factory (MiMo-V2.6-Flash)</a:t>
+            </a:r>
+          </a:p>
+        </p:txBody>
+      </p:sp>
+      <p:sp>
+        <p:nvSpPr>
+          <p:cNvPr id="4" name="TextBox 3"/>
+          <p:cNvSpPr txBox="1"/>
+          <p:nvPr/>
+        </p:nvSpPr>
+        <p:spPr>
+          <a:xfrm>
+            <a:off x="548640" y="1737360"/>
+            <a:ext cx="4206240" cy="4572000"/>
+          </a:xfrm>
+          <a:prstGeom prst="rect">
+            <a:avLst/>
+          </a:prstGeom>
+          <a:noFill/>
+        </p:spPr>
+        <p:txBody>
           <a:bodyPr wrap="square">
             <a:spAutoFit/>
           </a:bodyPr>
@@ -7949,11 +7984,11 @@
           <a:p>
             <a:pPr>
               <a:spcAft>
-                <a:spcPts val="1440"/>
+                <a:spcPts val="1360"/>
               </a:spcAft>
             </a:pPr>
             <a:r>
-              <a:rPr sz="1800" b="1">
+              <a:rPr sz="1700" b="1">
                 <a:solidFill>
                   <a:srgbClr val="0F8B8D"/>
                 </a:solidFill>
@@ -7962,23 +7997,41 @@
               <a:t>▸  </a:t>
             </a:r>
             <a:r>
-              <a:rPr sz="1800" b="0">
+              <a:rPr sz="1700" b="0">
                 <a:solidFill>
                   <a:srgbClr val="1F2937"/>
                 </a:solidFill>
                 <a:latin typeface="Inter"/>
               </a:rPr>
-              <a:t>Live Floor: three floors, 2D map and 2.5D overview, issues and responders in real time.</a:t>
+              <a:t>Nearest responder: </a:t>
+            </a:r>
+            <a:r>
+              <a:rPr sz="1700" b="1">
+                <a:solidFill>
+                  <a:srgbClr val="16213E"/>
+                </a:solidFill>
+                <a:latin typeface="Inter"/>
+              </a:rPr>
+              <a:t>Optr375</a:t>
+            </a:r>
+            <a:r>
+              <a:rPr sz="1700" b="0">
+                <a:solidFill>
+                  <a:srgbClr val="1F2937"/>
+                </a:solidFill>
+                <a:latin typeface="Inter"/>
+              </a:rPr>
+              <a:t>, 0.8 min away, thin history on this fault.</a:t>
             </a:r>
           </a:p>
           <a:p>
             <a:pPr>
               <a:spcAft>
-                <a:spcPts val="1440"/>
+                <a:spcPts val="1360"/>
               </a:spcAft>
             </a:pPr>
             <a:r>
-              <a:rPr sz="1800" b="1">
+              <a:rPr sz="1700" b="1">
                 <a:solidFill>
                   <a:srgbClr val="0F8B8D"/>
                 </a:solidFill>
@@ -7987,23 +8040,41 @@
               <a:t>▸  </a:t>
             </a:r>
             <a:r>
-              <a:rPr sz="1800" b="0">
+              <a:rPr sz="1700" b="0">
                 <a:solidFill>
                   <a:srgbClr val="1F2937"/>
                 </a:solidFill>
                 <a:latin typeface="Inter"/>
               </a:rPr>
-              <a:t>Compass ranking with rationale; offer, accept, reject; help for complex work.</a:t>
+              <a:t>Compass ranked </a:t>
+            </a:r>
+            <a:r>
+              <a:rPr sz="1700" b="1">
+                <a:solidFill>
+                  <a:srgbClr val="16213E"/>
+                </a:solidFill>
+                <a:latin typeface="Inter"/>
+              </a:rPr>
+              <a:t>Engr370</a:t>
+            </a:r>
+            <a:r>
+              <a:rPr sz="1700" b="0">
+                <a:solidFill>
+                  <a:srgbClr val="1F2937"/>
+                </a:solidFill>
+                <a:latin typeface="Inter"/>
+              </a:rPr>
+              <a:t> first: deepest evidence, 92% success, 2 min away.</a:t>
             </a:r>
           </a:p>
           <a:p>
             <a:pPr>
               <a:spcAft>
-                <a:spcPts val="1440"/>
+                <a:spcPts val="1360"/>
               </a:spcAft>
             </a:pPr>
             <a:r>
-              <a:rPr sz="1800" b="1">
+              <a:rPr sz="1700" b="1">
                 <a:solidFill>
                   <a:srgbClr val="0F8B8D"/>
                 </a:solidFill>
@@ -8012,23 +8083,41 @@
               <a:t>▸  </a:t>
             </a:r>
             <a:r>
-              <a:rPr sz="1800" b="0">
+              <a:rPr sz="1700" b="0">
                 <a:solidFill>
                   <a:srgbClr val="1F2937"/>
                 </a:solidFill>
                 <a:latin typeface="Inter"/>
               </a:rPr>
-              <a:t>Override and force-resolve; one-click audit trail per issue.</a:t>
+              <a:t>Offer accepted; resolved first time in </a:t>
+            </a:r>
+            <a:r>
+              <a:rPr sz="1700" b="1">
+                <a:solidFill>
+                  <a:srgbClr val="16213E"/>
+                </a:solidFill>
+                <a:latin typeface="Inter"/>
+              </a:rPr>
+              <a:t>11.2 min</a:t>
+            </a:r>
+            <a:r>
+              <a:rPr sz="1700" b="0">
+                <a:solidFill>
+                  <a:srgbClr val="1F2937"/>
+                </a:solidFill>
+                <a:latin typeface="Inter"/>
+              </a:rPr>
+              <a:t>.</a:t>
             </a:r>
           </a:p>
           <a:p>
             <a:pPr>
               <a:spcAft>
-                <a:spcPts val="1440"/>
+                <a:spcPts val="1360"/>
               </a:spcAft>
             </a:pPr>
             <a:r>
-              <a:rPr sz="1800" b="1">
+              <a:rPr sz="1700" b="1">
                 <a:solidFill>
                   <a:srgbClr val="0F8B8D"/>
                 </a:solidFill>
@@ -8037,20 +8126,20 @@
               <a:t>▸  </a:t>
             </a:r>
             <a:r>
-              <a:rPr sz="1800" b="0">
+              <a:rPr sz="1700" b="0">
                 <a:solidFill>
                   <a:srgbClr val="1F2937"/>
                 </a:solidFill>
                 <a:latin typeface="Inter"/>
               </a:rPr>
-              <a:t>Two independent control rooms (e8-aura-p1, e8-aura-p2).</a:t>
+              <a:t>Every step, and the action taken, is in the issue's audit trail.</a:t>
             </a:r>
           </a:p>
         </p:txBody>
       </p:sp>
       <p:pic>
         <p:nvPicPr>
-          <p:cNvPr id="4" name="Picture 3" descr="live-floor.png"/>
+          <p:cNvPr id="5" name="Picture 4" descr="compass-record.png"/>
           <p:cNvPicPr>
             <a:picLocks noChangeAspect="1"/>
           </p:cNvPicPr>
@@ -8064,8 +8153,8 @@
         </p:blipFill>
         <p:spPr>
           <a:xfrm>
-            <a:off x="5943600" y="1463040"/>
-            <a:ext cx="5806440" cy="3266122"/>
+            <a:off x="4983480" y="1691640"/>
+            <a:ext cx="6812280" cy="3214853"/>
           </a:xfrm>
           <a:prstGeom prst="rect">
             <a:avLst/>
@@ -8079,7 +8168,7 @@
       </p:pic>
       <p:sp>
         <p:nvSpPr>
-          <p:cNvPr id="5" name="TextBox 4"/>
+          <p:cNvPr id="6" name="TextBox 5"/>
           <p:cNvSpPr txBox="1"/>
           <p:nvPr/>
         </p:nvSpPr>

--- a/docs/submission/ResponseCompass-deck.pptx
+++ b/docs/submission/ResponseCompass-deck.pptx
@@ -15,6 +15,10 @@
     <p:sldId id="263" r:id="rId15"/>
     <p:sldId id="264" r:id="rId16"/>
     <p:sldId id="265" r:id="rId17"/>
+    <p:sldId id="266" r:id="rId18"/>
+    <p:sldId id="267" r:id="rId19"/>
+    <p:sldId id="268" r:id="rId20"/>
+    <p:sldId id="269" r:id="rId21"/>
   </p:sldIdLst>
   <p:sldSz cx="12191695" cy="6858000" type="screen4x3"/>
   <p:notesSz cx="6858000" cy="9144000"/>
@@ -511,7 +515,7 @@
           <a:lstStyle/>
           <a:p>
             <a:r>
-              <a:t>ResponseCompass is a dispatch agent for operations control rooms, built on AMD Token Factory. The tagline is the product vision: responder ranking is built today; recommending the fix from past repairs is the next step (last slide). Say so when presenting this slide.</a:t>
+              <a:t>ResponseCompass is a dispatch agent for operations control rooms, built on AMD Token Factory. It runs dispatch on its own and the control room supervises it: Compass ranks who to send and which fix to try first, from the plant's own repair history, and people approve or override the decisions that matter.</a:t>
             </a:r>
           </a:p>
         </p:txBody>
@@ -581,7 +585,287 @@
           <a:lstStyle/>
           <a:p>
             <a:r>
-              <a:t>The dispatch half is built and measured. The next step uses the same boundary for actions: code retrieves comparable past resolutions, and the model ranks and explains the fix.</a:t>
+              <a:t>The Pareto answers the supervisor's first question: which few problems cost us most of the time. In September two of three issue classes accounted for 80% of issues; drilling into a symptom shows which procedures failed most often. It describes recorded work; it does not rank people or claim causation.</a:t>
+            </a:r>
+          </a:p>
+        </p:txBody>
+      </p:sp>
+      <p:sp>
+        <p:nvSpPr>
+          <p:cNvPr id="4" name="Slide Number Placeholder 3"/>
+          <p:cNvSpPr>
+            <a:spLocks noGrp="1"/>
+          </p:cNvSpPr>
+          <p:nvPr>
+            <p:ph type="sldNum" idx="5" sz="quarter"/>
+          </p:nvPr>
+        </p:nvSpPr>
+        <p:spPr/>
+      </p:sp>
+    </p:spTree>
+  </p:cSld>
+  <p:clrMapOvr>
+    <a:masterClrMapping/>
+  </p:clrMapOvr>
+</p:notes>
+</file>
+
+<file path=ppt/notesSlides/notesSlide11.xml><?xml version="1.0" encoding="utf-8"?>
+<p:notes xmlns:a="http://schemas.openxmlformats.org/drawingml/2006/main" xmlns:p="http://schemas.openxmlformats.org/presentationml/2006/main" xmlns:r="http://schemas.openxmlformats.org/officeDocument/2006/relationships">
+  <p:cSld>
+    <p:spTree>
+      <p:nvGrpSpPr>
+        <p:cNvPr id="1" name=""/>
+        <p:cNvGrpSpPr/>
+        <p:nvPr/>
+      </p:nvGrpSpPr>
+      <p:grpSpPr>
+        <a:xfrm>
+          <a:off x="0" y="0"/>
+          <a:ext cx="0" cy="0"/>
+          <a:chOff x="0" y="0"/>
+          <a:chExt cx="0" cy="0"/>
+        </a:xfrm>
+      </p:grpSpPr>
+      <p:sp>
+        <p:nvSpPr>
+          <p:cNvPr id="2" name="Slide Image Placeholder 1"/>
+          <p:cNvSpPr>
+            <a:spLocks noGrp="1"/>
+          </p:cNvSpPr>
+          <p:nvPr>
+            <p:ph type="sldImg" idx="2"/>
+          </p:nvPr>
+        </p:nvSpPr>
+        <p:spPr/>
+      </p:sp>
+      <p:sp>
+        <p:nvSpPr>
+          <p:cNvPr id="3" name="Notes Placeholder 2"/>
+          <p:cNvSpPr>
+            <a:spLocks noGrp="1"/>
+          </p:cNvSpPr>
+          <p:nvPr>
+            <p:ph type="body" idx="3" sz="quarter"/>
+          </p:nvPr>
+        </p:nvSpPr>
+        <p:spPr/>
+        <p:txBody>
+          <a:bodyPr/>
+          <a:lstStyle/>
+          <a:p>
+            <a:r>
+              <a:t>This history was generated with the app's own engine, offline and deterministically, so every record is one the app itself would produce. The month extension used deterministic fallbacks, so it is not an AMD-only benchmark or a controlled comparison of model and baseline outcomes. Weekly rates use Monday 08:00 UTC boundaries; they rose then dipped, and we report them as measured.</a:t>
+            </a:r>
+          </a:p>
+        </p:txBody>
+      </p:sp>
+      <p:sp>
+        <p:nvSpPr>
+          <p:cNvPr id="4" name="Slide Number Placeholder 3"/>
+          <p:cNvSpPr>
+            <a:spLocks noGrp="1"/>
+          </p:cNvSpPr>
+          <p:nvPr>
+            <p:ph type="sldNum" idx="5" sz="quarter"/>
+          </p:nvPr>
+        </p:nvSpPr>
+        <p:spPr/>
+      </p:sp>
+    </p:spTree>
+  </p:cSld>
+  <p:clrMapOvr>
+    <a:masterClrMapping/>
+  </p:clrMapOvr>
+</p:notes>
+</file>
+
+<file path=ppt/notesSlides/notesSlide12.xml><?xml version="1.0" encoding="utf-8"?>
+<p:notes xmlns:a="http://schemas.openxmlformats.org/drawingml/2006/main" xmlns:p="http://schemas.openxmlformats.org/presentationml/2006/main" xmlns:r="http://schemas.openxmlformats.org/officeDocument/2006/relationships">
+  <p:cSld>
+    <p:spTree>
+      <p:nvGrpSpPr>
+        <p:cNvPr id="1" name=""/>
+        <p:cNvGrpSpPr/>
+        <p:nvPr/>
+      </p:nvGrpSpPr>
+      <p:grpSpPr>
+        <a:xfrm>
+          <a:off x="0" y="0"/>
+          <a:ext cx="0" cy="0"/>
+          <a:chOff x="0" y="0"/>
+          <a:chExt cx="0" cy="0"/>
+        </a:xfrm>
+      </p:grpSpPr>
+      <p:sp>
+        <p:nvSpPr>
+          <p:cNvPr id="2" name="Slide Image Placeholder 1"/>
+          <p:cNvSpPr>
+            <a:spLocks noGrp="1"/>
+          </p:cNvSpPr>
+          <p:nvPr>
+            <p:ph type="sldImg" idx="2"/>
+          </p:nvPr>
+        </p:nvSpPr>
+        <p:spPr/>
+      </p:sp>
+      <p:sp>
+        <p:nvSpPr>
+          <p:cNvPr id="3" name="Notes Placeholder 2"/>
+          <p:cNvSpPr>
+            <a:spLocks noGrp="1"/>
+          </p:cNvSpPr>
+          <p:nvPr>
+            <p:ph type="body" idx="3" sz="quarter"/>
+          </p:nvPr>
+        </p:nvSpPr>
+        <p:spPr/>
+        <p:txBody>
+          <a:bodyPr/>
+          <a:lstStyle/>
+          <a:p>
+            <a:r>
+              <a:t>We measured several Token Factory models on the same scenario and chose the default per role from the data. These are small-sample validity results, not outcome accuracy or uptime guarantees. Retries: at most two, only on HTTP 429. Five consecutive service failures open the breaker; one probe after 60 s.</a:t>
+            </a:r>
+          </a:p>
+        </p:txBody>
+      </p:sp>
+      <p:sp>
+        <p:nvSpPr>
+          <p:cNvPr id="4" name="Slide Number Placeholder 3"/>
+          <p:cNvSpPr>
+            <a:spLocks noGrp="1"/>
+          </p:cNvSpPr>
+          <p:nvPr>
+            <p:ph type="sldNum" idx="5" sz="quarter"/>
+          </p:nvPr>
+        </p:nvSpPr>
+        <p:spPr/>
+      </p:sp>
+    </p:spTree>
+  </p:cSld>
+  <p:clrMapOvr>
+    <a:masterClrMapping/>
+  </p:clrMapOvr>
+</p:notes>
+</file>
+
+<file path=ppt/notesSlides/notesSlide13.xml><?xml version="1.0" encoding="utf-8"?>
+<p:notes xmlns:a="http://schemas.openxmlformats.org/drawingml/2006/main" xmlns:p="http://schemas.openxmlformats.org/presentationml/2006/main" xmlns:r="http://schemas.openxmlformats.org/officeDocument/2006/relationships">
+  <p:cSld>
+    <p:spTree>
+      <p:nvGrpSpPr>
+        <p:cNvPr id="1" name=""/>
+        <p:cNvGrpSpPr/>
+        <p:nvPr/>
+      </p:nvGrpSpPr>
+      <p:grpSpPr>
+        <a:xfrm>
+          <a:off x="0" y="0"/>
+          <a:ext cx="0" cy="0"/>
+          <a:chOff x="0" y="0"/>
+          <a:chExt cx="0" cy="0"/>
+        </a:xfrm>
+      </p:grpSpPr>
+      <p:sp>
+        <p:nvSpPr>
+          <p:cNvPr id="2" name="Slide Image Placeholder 1"/>
+          <p:cNvSpPr>
+            <a:spLocks noGrp="1"/>
+          </p:cNvSpPr>
+          <p:nvPr>
+            <p:ph type="sldImg" idx="2"/>
+          </p:nvPr>
+        </p:nvSpPr>
+        <p:spPr/>
+      </p:sp>
+      <p:sp>
+        <p:nvSpPr>
+          <p:cNvPr id="3" name="Notes Placeholder 2"/>
+          <p:cNvSpPr>
+            <a:spLocks noGrp="1"/>
+          </p:cNvSpPr>
+          <p:nvPr>
+            <p:ph type="body" idx="3" sz="quarter"/>
+          </p:nvPr>
+        </p:nvSpPr>
+        <p:spPr/>
+        <p:txBody>
+          <a:bodyPr/>
+          <a:lstStyle/>
+          <a:p>
+            <a:r>
+              <a:t>Everything that matters is tested without spending API credits; the browser tests force provider failures to prove the fallbacks. A live check on AMD found and fixed one defect the hermetic tests could not: the fix ranking never reached the provider.</a:t>
+            </a:r>
+          </a:p>
+        </p:txBody>
+      </p:sp>
+      <p:sp>
+        <p:nvSpPr>
+          <p:cNvPr id="4" name="Slide Number Placeholder 3"/>
+          <p:cNvSpPr>
+            <a:spLocks noGrp="1"/>
+          </p:cNvSpPr>
+          <p:nvPr>
+            <p:ph type="sldNum" idx="5" sz="quarter"/>
+          </p:nvPr>
+        </p:nvSpPr>
+        <p:spPr/>
+      </p:sp>
+    </p:spTree>
+  </p:cSld>
+  <p:clrMapOvr>
+    <a:masterClrMapping/>
+  </p:clrMapOvr>
+</p:notes>
+</file>
+
+<file path=ppt/notesSlides/notesSlide14.xml><?xml version="1.0" encoding="utf-8"?>
+<p:notes xmlns:a="http://schemas.openxmlformats.org/drawingml/2006/main" xmlns:p="http://schemas.openxmlformats.org/presentationml/2006/main" xmlns:r="http://schemas.openxmlformats.org/officeDocument/2006/relationships">
+  <p:cSld>
+    <p:spTree>
+      <p:nvGrpSpPr>
+        <p:cNvPr id="1" name=""/>
+        <p:cNvGrpSpPr/>
+        <p:nvPr/>
+      </p:nvGrpSpPr>
+      <p:grpSpPr>
+        <a:xfrm>
+          <a:off x="0" y="0"/>
+          <a:ext cx="0" cy="0"/>
+          <a:chOff x="0" y="0"/>
+          <a:chExt cx="0" cy="0"/>
+        </a:xfrm>
+      </p:grpSpPr>
+      <p:sp>
+        <p:nvSpPr>
+          <p:cNvPr id="2" name="Slide Image Placeholder 1"/>
+          <p:cNvSpPr>
+            <a:spLocks noGrp="1"/>
+          </p:cNvSpPr>
+          <p:nvPr>
+            <p:ph type="sldImg" idx="2"/>
+          </p:nvPr>
+        </p:nvSpPr>
+        <p:spPr/>
+      </p:sp>
+      <p:sp>
+        <p:nvSpPr>
+          <p:cNvPr id="3" name="Notes Placeholder 2"/>
+          <p:cNvSpPr>
+            <a:spLocks noGrp="1"/>
+          </p:cNvSpPr>
+          <p:nvPr>
+            <p:ph type="body" idx="3" sz="quarter"/>
+          </p:nvPr>
+        </p:nvSpPr>
+        <p:spPr/>
+        <p:txBody>
+          <a:bodyPr/>
+          <a:lstStyle/>
+          <a:p>
+            <a:r>
+              <a:t>Responder ranking, fix ranking, overtime recommendations and the control-room screens are built. Next is real integration and a longer live measurement.</a:t>
             </a:r>
           </a:p>
         </p:txBody>
@@ -651,7 +935,7 @@
           <a:lstStyle/>
           <a:p>
             <a:r>
-              <a:t>Proximity is easy to compute and easy to defend, but it ignores fit. What matters is who is likely to resolve this class of issue on the first attempt, given where everyone is and what they are already doing.</a:t>
+              <a:t>Proximity is easy to compute and easy to defend, but it ignores fit. What matters is who is likely to resolve this class of issue on the first attempt, with which procedure, and whether the shift can cover the backlog.</a:t>
             </a:r>
           </a:p>
         </p:txBody>
@@ -721,7 +1005,7 @@
           <a:lstStyle/>
           <a:p>
             <a:r>
-              <a:t>Compass does not replace the operator. It proposes a ranked shortlist with reasons, and the system dispatches automatically with a human able to step in.</a:t>
+              <a:t>A control room puts the floor map, the issue queue, the dispatch context, the event feed, the Issue Pareto and analytics on separate monitors (/rooms/&lt;room&gt;/display/&lt;screen&gt;). The screens update live from the same state. The operator console, with override and approval controls, is the seventh screen.</a:t>
             </a:r>
           </a:p>
         </p:txBody>
@@ -791,7 +1075,7 @@
           <a:lstStyle/>
           <a:p>
             <a:r>
-              <a:t>The ranker receives application-owned evidence and ranks only the eligible candidates it is given. The planner proposes synthetic incidents; code validates every proposal and owns all mutations. If a model is slow, rate-limited or returns invalid output, the deterministic fallback takes over, so dispatch continues.</a:t>
+              <a:t>Issues are dispatched without anyone touching the console: Compass ranks the eligible responders, an offer goes out, the responder accepts, Compass ranks the troubleshooting procedures, and the repair outcome feeds the history that every later ranking uses. Central command can override, transfer or add support at any time. Before each shift handover a backlog review asks Compass to rank lawful overtime options; central command approves or rejects them, and nothing changes without that decision.</a:t>
             </a:r>
           </a:p>
         </p:txBody>
@@ -861,7 +1145,7 @@
           <a:lstStyle/>
           <a:p>
             <a:r>
-              <a:t>We wanted the demo to be able to show Compass being wrong as well as right. Hidden truth plus baselines make its choices inspectable. Disagreement alone does not prove better outcomes.</a:t>
+              <a:t>The ranker receives application-owned evidence and ranks only the eligible candidates, fixes or overtime options it is given. The planner proposes synthetic incidents; code validates every proposal and owns all mutations. If a model is slow, rate-limited or returns invalid output, the deterministic fallback takes over, so dispatch continues.</a:t>
             </a:r>
           </a:p>
         </p:txBody>
@@ -931,7 +1215,7 @@
           <a:lstStyle/>
           <a:p>
             <a:r>
-              <a:t>We measured several Token Factory models on the same scenario and chose the default per role from the data. These are small-sample validity results (10 samples, 60 s ranking / 30 s planner timeouts), not outcome accuracy or uptime guarantees; the ranking deadline was later raised to 90 s including one repair. Retries: at most two, only on HTTP 429. Five consecutive service failures open the breaker; one probe after 60 s. Rankings run in a background lane, so the clock keeps moving.</a:t>
+              <a:t>We wanted the system to be able to show Compass being wrong as well as right. Hidden truth plus baselines make its choices inspectable. Disagreement alone does not prove better outcomes.</a:t>
             </a:r>
           </a:p>
         </p:txBody>
@@ -1001,7 +1285,7 @@
           <a:lstStyle/>
           <a:p>
             <a:r>
-              <a:t>This record was captured live on AMD Token Factory with MiMo-V2.6-Flash on 2026-10-17 (simulated time 6 October). Both baselines picked someone else: nearest chose Optr375, the naive score chose Tech363. One good outcome is not proof of better performance; the disagreement is recorded so it can be reviewed. In that capture, 7 of 11 live rankings returned valid output; the rest fell back deterministically.</a:t>
+              <a:t>Captured live on 2026-10-18 (simulated 6 October). The nearest-responder baseline chose Engr361; Compass ranked Engr370 first. One good outcome is not proof of better performance; disagreements with the baselines are recorded for review. In this capture 15 of 18 live responder rankings returned valid output; the rest fell back deterministically.</a:t>
             </a:r>
           </a:p>
         </p:txBody>
@@ -1071,7 +1355,7 @@
           <a:lstStyle/>
           <a:p>
             <a:r>
-              <a:t>This history was generated with the app's own engine, offline and deterministically, so every record is one the app itself would produce. Retention archives older detail without changing any analytics number. The month extension used deterministic fallbacks; it is not an AMD-only benchmark or a controlled comparison of model and baseline outcomes. Latency is one local measurement, not a guarantee.</a:t>
+              <a:t>The true fault cause is hidden simulation truth, like responder skill: the model sees only the public symptom and observed outcomes. In this capture 12 of 15 live fix rankings were valid AMD results. A live check also found and fixed a defect: the fix ranking never reached the provider until that check.</a:t>
             </a:r>
           </a:p>
         </p:txBody>
@@ -1141,7 +1425,7 @@
           <a:lstStyle/>
           <a:p>
             <a:r>
-              <a:t>Everything that matters is tested without spending API credits; the browser tests force provider failures to prove the fallbacks.</a:t>
+              <a:t>Live capture: staffing-7 was ranked by MiMo on AMD Token Factory and approved by central command in the recording. A live check found that approving went stale whenever the top option had picked up a job in the meantime; extensions now depend only on duty and rest limits. Rooms can opt into an audited auto-approve policy; the default is operator approval.</a:t>
             </a:r>
           </a:p>
         </p:txBody>
@@ -4207,8 +4491,8 @@
         </p:nvSpPr>
         <p:spPr>
           <a:xfrm>
-            <a:off x="548640" y="1828800"/>
-            <a:ext cx="109728" cy="2377440"/>
+            <a:off x="548640" y="1600200"/>
+            <a:ext cx="109728" cy="2926080"/>
           </a:xfrm>
           <a:prstGeom prst="rect">
             <a:avLst/>
@@ -4251,7 +4535,7 @@
         </p:nvSpPr>
         <p:spPr>
           <a:xfrm>
-            <a:off x="914400" y="1783080"/>
+            <a:off x="914400" y="1554480"/>
             <a:ext cx="6766560" cy="1005840"/>
           </a:xfrm>
           <a:prstGeom prst="rect">
@@ -4286,7 +4570,7 @@
         </p:nvSpPr>
         <p:spPr>
           <a:xfrm>
-            <a:off x="914400" y="2926080"/>
+            <a:off x="914400" y="2697480"/>
             <a:ext cx="6766560" cy="457200"/>
           </a:xfrm>
           <a:prstGeom prst="rect">
@@ -4321,7 +4605,7 @@
         </p:nvSpPr>
         <p:spPr>
           <a:xfrm>
-            <a:off x="914400" y="3429000"/>
+            <a:off x="914400" y="3200400"/>
             <a:ext cx="6766560" cy="457200"/>
           </a:xfrm>
           <a:prstGeom prst="rect">
@@ -4356,8 +4640,8 @@
         </p:nvSpPr>
         <p:spPr>
           <a:xfrm>
-            <a:off x="914400" y="4846320"/>
-            <a:ext cx="6766560" cy="731520"/>
+            <a:off x="914400" y="3931920"/>
+            <a:ext cx="6766560" cy="457200"/>
           </a:xfrm>
           <a:prstGeom prst="rect">
             <a:avLst/>
@@ -4372,6 +4656,41 @@
           <a:p>
             <a:pPr algn="l"/>
             <a:r>
+              <a:rPr sz="1600" b="1">
+                <a:solidFill>
+                  <a:srgbClr val="16213E"/>
+                </a:solidFill>
+                <a:latin typeface="Inter"/>
+              </a:rPr>
+              <a:t>Runs autonomously. Supervised by your control room.</a:t>
+            </a:r>
+          </a:p>
+        </p:txBody>
+      </p:sp>
+      <p:sp>
+        <p:nvSpPr>
+          <p:cNvPr id="8" name="TextBox 7"/>
+          <p:cNvSpPr txBox="1"/>
+          <p:nvPr/>
+        </p:nvSpPr>
+        <p:spPr>
+          <a:xfrm>
+            <a:off x="914400" y="4937760"/>
+            <a:ext cx="6766560" cy="731520"/>
+          </a:xfrm>
+          <a:prstGeom prst="rect">
+            <a:avLst/>
+          </a:prstGeom>
+          <a:noFill/>
+        </p:spPr>
+        <p:txBody>
+          <a:bodyPr wrap="square" lIns="0" rIns="0" tIns="0" bIns="0">
+            <a:spAutoFit/>
+          </a:bodyPr>
+          <a:lstStyle/>
+          <a:p>
+            <a:pPr algn="l"/>
+            <a:r>
               <a:rPr sz="1600" b="0">
                 <a:solidFill>
                   <a:srgbClr val="1F2937"/>
@@ -4385,7 +4704,7 @@
       </p:sp>
       <p:pic>
         <p:nvPicPr>
-          <p:cNvPr id="8" name="Picture 7" descr="live-floor.png"/>
+          <p:cNvPr id="9" name="Picture 8" descr="screen-map.png"/>
           <p:cNvPicPr>
             <a:picLocks noChangeAspect="1"/>
           </p:cNvPicPr>
@@ -4414,7 +4733,7 @@
       </p:pic>
       <p:sp>
         <p:nvSpPr>
-          <p:cNvPr id="9" name="TextBox 8"/>
+          <p:cNvPr id="10" name="TextBox 9"/>
           <p:cNvSpPr txBox="1"/>
           <p:nvPr/>
         </p:nvSpPr>
@@ -4442,7 +4761,7 @@
                 </a:solidFill>
                 <a:latin typeface="Inter"/>
               </a:rPr>
-              <a:t>Live Floor, simulated plant e8-aura-p1</a:t>
+              <a:t>Floor-map wall screen, simulated plant e8-aura-p1</a:t>
             </a:r>
           </a:p>
         </p:txBody>
@@ -4503,7 +4822,7 @@
                 </a:solidFill>
                 <a:latin typeface="Inter"/>
               </a:rPr>
-              <a:t>What's next</a:t>
+              <a:t>Where the downtime comes from</a:t>
             </a:r>
           </a:p>
         </p:txBody>
@@ -4516,8 +4835,938 @@
         </p:nvSpPr>
         <p:spPr>
           <a:xfrm>
+            <a:off x="548640" y="1051560"/>
+            <a:ext cx="11064240" cy="457200"/>
+          </a:xfrm>
+          <a:prstGeom prst="rect">
+            <a:avLst/>
+          </a:prstGeom>
+          <a:noFill/>
+        </p:spPr>
+        <p:txBody>
+          <a:bodyPr wrap="square" lIns="0" rIns="0" tIns="0" bIns="0">
+            <a:spAutoFit/>
+          </a:bodyPr>
+          <a:lstStyle/>
+          <a:p>
+            <a:pPr algn="l"/>
+            <a:r>
+              <a:rPr sz="1600" b="0">
+                <a:solidFill>
+                  <a:srgbClr val="5B6474"/>
+                </a:solidFill>
+                <a:latin typeface="Inter"/>
+              </a:rPr>
+              <a:t>Issue Pareto: issue class → observed symptom → applied fix, or floor → station</a:t>
+            </a:r>
+          </a:p>
+        </p:txBody>
+      </p:sp>
+      <p:pic>
+        <p:nvPicPr>
+          <p:cNvPr id="4" name="Picture 3" descr="screen-pareto.png"/>
+          <p:cNvPicPr>
+            <a:picLocks noChangeAspect="1"/>
+          </p:cNvPicPr>
+          <p:nvPr/>
+        </p:nvPicPr>
+        <p:blipFill>
+          <a:blip r:embed="rId2"/>
+          <a:stretch>
+            <a:fillRect/>
+          </a:stretch>
+        </p:blipFill>
+        <p:spPr>
+          <a:xfrm>
+            <a:off x="548640" y="1600200"/>
+            <a:ext cx="7589520" cy="4269105"/>
+          </a:xfrm>
+          <a:prstGeom prst="rect">
+            <a:avLst/>
+          </a:prstGeom>
+          <a:ln w="9525">
+            <a:solidFill>
+              <a:srgbClr val="C9CED8"/>
+            </a:solidFill>
+          </a:ln>
+        </p:spPr>
+      </p:pic>
+      <p:sp>
+        <p:nvSpPr>
+          <p:cNvPr id="5" name="TextBox 4"/>
+          <p:cNvSpPr txBox="1"/>
+          <p:nvPr/>
+        </p:nvSpPr>
+        <p:spPr>
+          <a:xfrm>
+            <a:off x="8412480" y="1645920"/>
+            <a:ext cx="3291840" cy="4572000"/>
+          </a:xfrm>
+          <a:prstGeom prst="rect">
+            <a:avLst/>
+          </a:prstGeom>
+          <a:noFill/>
+        </p:spPr>
+        <p:txBody>
+          <a:bodyPr wrap="square">
+            <a:spAutoFit/>
+          </a:bodyPr>
+          <a:lstStyle/>
+          <a:p>
+            <a:pPr>
+              <a:spcAft>
+                <a:spcPts val="1200"/>
+              </a:spcAft>
+            </a:pPr>
+            <a:r>
+              <a:rPr sz="1500" b="1">
+                <a:solidFill>
+                  <a:srgbClr val="0F8B8D"/>
+                </a:solidFill>
+                <a:latin typeface="Inter"/>
+              </a:rPr>
+              <a:t>▸  </a:t>
+            </a:r>
+            <a:r>
+              <a:rPr sz="1500" b="0">
+                <a:solidFill>
+                  <a:srgbClr val="1F2937"/>
+                </a:solidFill>
+                <a:latin typeface="Inter"/>
+              </a:rPr>
+              <a:t>Issues, downtime or failed attempts per day, week or month.</a:t>
+            </a:r>
+          </a:p>
+          <a:p>
+            <a:pPr>
+              <a:spcAft>
+                <a:spcPts val="1200"/>
+              </a:spcAft>
+            </a:pPr>
+            <a:r>
+              <a:rPr sz="1500" b="1">
+                <a:solidFill>
+                  <a:srgbClr val="0F8B8D"/>
+                </a:solidFill>
+                <a:latin typeface="Inter"/>
+              </a:rPr>
+              <a:t>▸  </a:t>
+            </a:r>
+            <a:r>
+              <a:rPr sz="1500" b="0">
+                <a:solidFill>
+                  <a:srgbClr val="1F2937"/>
+                </a:solidFill>
+                <a:latin typeface="Inter"/>
+              </a:rPr>
+              <a:t>Sorted bars, cumulative line and an </a:t>
+            </a:r>
+            <a:r>
+              <a:rPr sz="1500" b="1">
+                <a:solidFill>
+                  <a:srgbClr val="16213E"/>
+                </a:solidFill>
+                <a:latin typeface="Inter"/>
+              </a:rPr>
+              <a:t>80%</a:t>
+            </a:r>
+            <a:r>
+              <a:rPr sz="1500" b="0">
+                <a:solidFill>
+                  <a:srgbClr val="1F2937"/>
+                </a:solidFill>
+                <a:latin typeface="Inter"/>
+              </a:rPr>
+              <a:t> marker, plus a donut.</a:t>
+            </a:r>
+          </a:p>
+          <a:p>
+            <a:pPr>
+              <a:spcAft>
+                <a:spcPts val="1200"/>
+              </a:spcAft>
+            </a:pPr>
+            <a:r>
+              <a:rPr sz="1500" b="1">
+                <a:solidFill>
+                  <a:srgbClr val="0F8B8D"/>
+                </a:solidFill>
+                <a:latin typeface="Inter"/>
+              </a:rPr>
+              <a:t>▸  </a:t>
+            </a:r>
+            <a:r>
+              <a:rPr sz="1500" b="0">
+                <a:solidFill>
+                  <a:srgbClr val="1F2937"/>
+                </a:solidFill>
+                <a:latin typeface="Inter"/>
+              </a:rPr>
+              <a:t>Click to drill from class to symptom to the fix that was applied.</a:t>
+            </a:r>
+          </a:p>
+          <a:p>
+            <a:pPr>
+              <a:spcAft>
+                <a:spcPts val="1200"/>
+              </a:spcAft>
+            </a:pPr>
+            <a:r>
+              <a:rPr sz="1500" b="1">
+                <a:solidFill>
+                  <a:srgbClr val="0F8B8D"/>
+                </a:solidFill>
+                <a:latin typeface="Inter"/>
+              </a:rPr>
+              <a:t>▸  </a:t>
+            </a:r>
+            <a:r>
+              <a:rPr sz="1500" b="0">
+                <a:solidFill>
+                  <a:srgbClr val="1F2937"/>
+                </a:solidFill>
+                <a:latin typeface="Inter"/>
+              </a:rPr>
+              <a:t>Built from public records only; hidden causes are never used.</a:t>
+            </a:r>
+          </a:p>
+        </p:txBody>
+      </p:sp>
+      <p:sp>
+        <p:nvSpPr>
+          <p:cNvPr id="6" name="TextBox 5"/>
+          <p:cNvSpPr txBox="1"/>
+          <p:nvPr/>
+        </p:nvSpPr>
+        <p:spPr>
+          <a:xfrm>
+            <a:off x="10607040" y="6400800"/>
+            <a:ext cx="1097280" cy="274320"/>
+          </a:xfrm>
+          <a:prstGeom prst="rect">
+            <a:avLst/>
+          </a:prstGeom>
+          <a:noFill/>
+        </p:spPr>
+        <p:txBody>
+          <a:bodyPr wrap="square" lIns="0" rIns="0" tIns="0" bIns="0">
+            <a:spAutoFit/>
+          </a:bodyPr>
+          <a:lstStyle/>
+          <a:p>
+            <a:pPr algn="ctr"/>
+            <a:r>
+              <a:rPr sz="1100" b="0">
+                <a:solidFill>
+                  <a:srgbClr val="5B6474"/>
+                </a:solidFill>
+                <a:latin typeface="Inter"/>
+              </a:rPr>
+              <a:t>10</a:t>
+            </a:r>
+          </a:p>
+        </p:txBody>
+      </p:sp>
+    </p:spTree>
+  </p:cSld>
+  <p:clrMapOvr>
+    <a:masterClrMapping/>
+  </p:clrMapOvr>
+</p:sld>
+</file>
+
+<file path=ppt/slides/slide11.xml><?xml version="1.0" encoding="utf-8"?>
+<p:sld xmlns:a="http://schemas.openxmlformats.org/drawingml/2006/main" xmlns:p="http://schemas.openxmlformats.org/presentationml/2006/main" xmlns:r="http://schemas.openxmlformats.org/officeDocument/2006/relationships">
+  <p:cSld>
+    <p:bg>
+      <p:bgPr>
+        <a:solidFill>
+          <a:srgbClr val="FFFFFF"/>
+        </a:solidFill>
+        <a:effectLst/>
+      </p:bgPr>
+    </p:bg>
+    <p:spTree>
+      <p:nvGrpSpPr>
+        <p:cNvPr id="1" name=""/>
+        <p:cNvGrpSpPr/>
+        <p:nvPr/>
+      </p:nvGrpSpPr>
+      <p:grpSpPr/>
+      <p:sp>
+        <p:nvSpPr>
+          <p:cNvPr id="2" name="TextBox 1"/>
+          <p:cNvSpPr txBox="1"/>
+          <p:nvPr/>
+        </p:nvSpPr>
+        <p:spPr>
+          <a:xfrm>
+            <a:off x="548640" y="411480"/>
+            <a:ext cx="11064240" cy="731520"/>
+          </a:xfrm>
+          <a:prstGeom prst="rect">
+            <a:avLst/>
+          </a:prstGeom>
+          <a:noFill/>
+        </p:spPr>
+        <p:txBody>
+          <a:bodyPr wrap="square" lIns="0" rIns="0" tIns="0" bIns="0">
+            <a:spAutoFit/>
+          </a:bodyPr>
+          <a:lstStyle/>
+          <a:p>
+            <a:pPr algn="l"/>
+            <a:r>
+              <a:rPr sz="3200" b="1">
+                <a:solidFill>
+                  <a:srgbClr val="16213E"/>
+                </a:solidFill>
+                <a:latin typeface="Inter"/>
+              </a:rPr>
+              <a:t>A month of operations</a:t>
+            </a:r>
+          </a:p>
+        </p:txBody>
+      </p:sp>
+      <p:sp>
+        <p:nvSpPr>
+          <p:cNvPr id="3" name="TextBox 2"/>
+          <p:cNvSpPr txBox="1"/>
+          <p:nvPr/>
+        </p:nvSpPr>
+        <p:spPr>
+          <a:xfrm>
             <a:off x="548640" y="1463040"/>
-            <a:ext cx="11064240" cy="3291840"/>
+            <a:ext cx="4846320" cy="4754880"/>
+          </a:xfrm>
+          <a:prstGeom prst="rect">
+            <a:avLst/>
+          </a:prstGeom>
+          <a:noFill/>
+        </p:spPr>
+        <p:txBody>
+          <a:bodyPr wrap="square">
+            <a:spAutoFit/>
+          </a:bodyPr>
+          <a:lstStyle/>
+          <a:p>
+            <a:pPr>
+              <a:spcAft>
+                <a:spcPts val="1360"/>
+              </a:spcAft>
+            </a:pPr>
+            <a:r>
+              <a:rPr sz="1700" b="1">
+                <a:solidFill>
+                  <a:srgbClr val="0F8B8D"/>
+                </a:solidFill>
+                <a:latin typeface="Inter"/>
+              </a:rPr>
+              <a:t>▸  </a:t>
+            </a:r>
+            <a:r>
+              <a:rPr sz="1700" b="0">
+                <a:solidFill>
+                  <a:srgbClr val="1F2937"/>
+                </a:solidFill>
+                <a:latin typeface="Inter"/>
+              </a:rPr>
+              <a:t>e8-aura-p1: </a:t>
+            </a:r>
+            <a:r>
+              <a:rPr sz="1700" b="1">
+                <a:solidFill>
+                  <a:srgbClr val="16213E"/>
+                </a:solidFill>
+                <a:latin typeface="Inter"/>
+              </a:rPr>
+              <a:t>3,512 issues</a:t>
+            </a:r>
+            <a:r>
+              <a:rPr sz="1700" b="0">
+                <a:solidFill>
+                  <a:srgbClr val="1F2937"/>
+                </a:solidFill>
+                <a:latin typeface="Inter"/>
+              </a:rPr>
+              <a:t>, 1 September to 6 October (simulated).</a:t>
+            </a:r>
+          </a:p>
+          <a:p>
+            <a:pPr>
+              <a:spcAft>
+                <a:spcPts val="1360"/>
+              </a:spcAft>
+            </a:pPr>
+            <a:r>
+              <a:rPr sz="1700" b="1">
+                <a:solidFill>
+                  <a:srgbClr val="0F8B8D"/>
+                </a:solidFill>
+                <a:latin typeface="Inter"/>
+              </a:rPr>
+              <a:t>▸  </a:t>
+            </a:r>
+            <a:r>
+              <a:rPr sz="1700" b="0">
+                <a:solidFill>
+                  <a:srgbClr val="1F2937"/>
+                </a:solidFill>
+                <a:latin typeface="Inter"/>
+              </a:rPr>
+              <a:t>September: </a:t>
+            </a:r>
+            <a:r>
+              <a:rPr sz="1700" b="1">
+                <a:solidFill>
+                  <a:srgbClr val="16213E"/>
+                </a:solidFill>
+                <a:latin typeface="Inter"/>
+              </a:rPr>
+              <a:t>2,966 raised / 2,985 resolved</a:t>
+            </a:r>
+            <a:r>
+              <a:rPr sz="1700" b="0">
+                <a:solidFill>
+                  <a:srgbClr val="1F2937"/>
+                </a:solidFill>
+                <a:latin typeface="Inter"/>
+              </a:rPr>
+              <a:t> events.</a:t>
+            </a:r>
+          </a:p>
+          <a:p>
+            <a:pPr>
+              <a:spcAft>
+                <a:spcPts val="1360"/>
+              </a:spcAft>
+            </a:pPr>
+            <a:r>
+              <a:rPr sz="1700" b="1">
+                <a:solidFill>
+                  <a:srgbClr val="0F8B8D"/>
+                </a:solidFill>
+                <a:latin typeface="Inter"/>
+              </a:rPr>
+              <a:t>▸  </a:t>
+            </a:r>
+            <a:r>
+              <a:rPr sz="1700" b="0">
+                <a:solidFill>
+                  <a:srgbClr val="1F2937"/>
+                </a:solidFill>
+                <a:latin typeface="Inter"/>
+              </a:rPr>
+              <a:t>First-time fix rate in September: </a:t>
+            </a:r>
+            <a:r>
+              <a:rPr sz="1700" b="1">
+                <a:solidFill>
+                  <a:srgbClr val="16213E"/>
+                </a:solidFill>
+                <a:latin typeface="Inter"/>
+              </a:rPr>
+              <a:t>73.5%</a:t>
+            </a:r>
+            <a:r>
+              <a:rPr sz="1700" b="0">
+                <a:solidFill>
+                  <a:srgbClr val="1F2937"/>
+                </a:solidFill>
+                <a:latin typeface="Inter"/>
+              </a:rPr>
+              <a:t> (1,858 of 2,527 first attempts).</a:t>
+            </a:r>
+          </a:p>
+          <a:p>
+            <a:pPr>
+              <a:spcAft>
+                <a:spcPts val="1360"/>
+              </a:spcAft>
+            </a:pPr>
+            <a:r>
+              <a:rPr sz="1700" b="1">
+                <a:solidFill>
+                  <a:srgbClr val="0F8B8D"/>
+                </a:solidFill>
+                <a:latin typeface="Inter"/>
+              </a:rPr>
+              <a:t>▸  </a:t>
+            </a:r>
+            <a:r>
+              <a:rPr sz="1700" b="0">
+                <a:solidFill>
+                  <a:srgbClr val="1F2937"/>
+                </a:solidFill>
+                <a:latin typeface="Inter"/>
+              </a:rPr>
+              <a:t>Weekly first-time fix: 67.1%, 74.9%, 76.5%, 75.6%: not a steady climb.</a:t>
+            </a:r>
+          </a:p>
+        </p:txBody>
+      </p:sp>
+      <p:pic>
+        <p:nvPicPr>
+          <p:cNvPr id="4" name="Picture 3" descr="analytics-month.png"/>
+          <p:cNvPicPr>
+            <a:picLocks noChangeAspect="1"/>
+          </p:cNvPicPr>
+          <p:nvPr/>
+        </p:nvPicPr>
+        <p:blipFill>
+          <a:blip r:embed="rId2"/>
+          <a:stretch>
+            <a:fillRect/>
+          </a:stretch>
+        </p:blipFill>
+        <p:spPr>
+          <a:xfrm>
+            <a:off x="5669280" y="1463040"/>
+            <a:ext cx="6080760" cy="3527001"/>
+          </a:xfrm>
+          <a:prstGeom prst="rect">
+            <a:avLst/>
+          </a:prstGeom>
+          <a:ln w="9525">
+            <a:solidFill>
+              <a:srgbClr val="C9CED8"/>
+            </a:solidFill>
+          </a:ln>
+        </p:spPr>
+      </p:pic>
+      <p:sp>
+        <p:nvSpPr>
+          <p:cNvPr id="5" name="TextBox 4"/>
+          <p:cNvSpPr txBox="1"/>
+          <p:nvPr/>
+        </p:nvSpPr>
+        <p:spPr>
+          <a:xfrm>
+            <a:off x="10607040" y="6400800"/>
+            <a:ext cx="1097280" cy="274320"/>
+          </a:xfrm>
+          <a:prstGeom prst="rect">
+            <a:avLst/>
+          </a:prstGeom>
+          <a:noFill/>
+        </p:spPr>
+        <p:txBody>
+          <a:bodyPr wrap="square" lIns="0" rIns="0" tIns="0" bIns="0">
+            <a:spAutoFit/>
+          </a:bodyPr>
+          <a:lstStyle/>
+          <a:p>
+            <a:pPr algn="ctr"/>
+            <a:r>
+              <a:rPr sz="1100" b="0">
+                <a:solidFill>
+                  <a:srgbClr val="5B6474"/>
+                </a:solidFill>
+                <a:latin typeface="Inter"/>
+              </a:rPr>
+              <a:t>11</a:t>
+            </a:r>
+          </a:p>
+        </p:txBody>
+      </p:sp>
+    </p:spTree>
+  </p:cSld>
+  <p:clrMapOvr>
+    <a:masterClrMapping/>
+  </p:clrMapOvr>
+</p:sld>
+</file>
+
+<file path=ppt/slides/slide12.xml><?xml version="1.0" encoding="utf-8"?>
+<p:sld xmlns:a="http://schemas.openxmlformats.org/drawingml/2006/main" xmlns:p="http://schemas.openxmlformats.org/presentationml/2006/main" xmlns:r="http://schemas.openxmlformats.org/officeDocument/2006/relationships">
+  <p:cSld>
+    <p:bg>
+      <p:bgPr>
+        <a:solidFill>
+          <a:srgbClr val="FFFFFF"/>
+        </a:solidFill>
+        <a:effectLst/>
+      </p:bgPr>
+    </p:bg>
+    <p:spTree>
+      <p:nvGrpSpPr>
+        <p:cNvPr id="1" name=""/>
+        <p:cNvGrpSpPr/>
+        <p:nvPr/>
+      </p:nvGrpSpPr>
+      <p:grpSpPr/>
+      <p:sp>
+        <p:nvSpPr>
+          <p:cNvPr id="2" name="TextBox 1"/>
+          <p:cNvSpPr txBox="1"/>
+          <p:nvPr/>
+        </p:nvSpPr>
+        <p:spPr>
+          <a:xfrm>
+            <a:off x="548640" y="411480"/>
+            <a:ext cx="11064240" cy="731520"/>
+          </a:xfrm>
+          <a:prstGeom prst="rect">
+            <a:avLst/>
+          </a:prstGeom>
+          <a:noFill/>
+        </p:spPr>
+        <p:txBody>
+          <a:bodyPr wrap="square" lIns="0" rIns="0" tIns="0" bIns="0">
+            <a:spAutoFit/>
+          </a:bodyPr>
+          <a:lstStyle/>
+          <a:p>
+            <a:pPr algn="l"/>
+            <a:r>
+              <a:rPr sz="3200" b="1">
+                <a:solidFill>
+                  <a:srgbClr val="16213E"/>
+                </a:solidFill>
+                <a:latin typeface="Inter"/>
+              </a:rPr>
+              <a:t>Built on AMD Token Factory</a:t>
+            </a:r>
+          </a:p>
+        </p:txBody>
+      </p:sp>
+      <p:sp>
+        <p:nvSpPr>
+          <p:cNvPr id="3" name="TextBox 2"/>
+          <p:cNvSpPr txBox="1"/>
+          <p:nvPr/>
+        </p:nvSpPr>
+        <p:spPr>
+          <a:xfrm>
+            <a:off x="548640" y="1463040"/>
+            <a:ext cx="6766560" cy="4754880"/>
+          </a:xfrm>
+          <a:prstGeom prst="rect">
+            <a:avLst/>
+          </a:prstGeom>
+          <a:noFill/>
+        </p:spPr>
+        <p:txBody>
+          <a:bodyPr wrap="square">
+            <a:spAutoFit/>
+          </a:bodyPr>
+          <a:lstStyle/>
+          <a:p>
+            <a:pPr>
+              <a:spcAft>
+                <a:spcPts val="1360"/>
+              </a:spcAft>
+            </a:pPr>
+            <a:r>
+              <a:rPr sz="1700" b="1">
+                <a:solidFill>
+                  <a:srgbClr val="0F8B8D"/>
+                </a:solidFill>
+                <a:latin typeface="Inter"/>
+              </a:rPr>
+              <a:t>▸  </a:t>
+            </a:r>
+            <a:r>
+              <a:rPr sz="1700" b="0">
+                <a:solidFill>
+                  <a:srgbClr val="1F2937"/>
+                </a:solidFill>
+                <a:latin typeface="Inter"/>
+              </a:rPr>
+              <a:t>OpenAI-compatible API, JSON output; our validators are the contract.</a:t>
+            </a:r>
+          </a:p>
+          <a:p>
+            <a:pPr>
+              <a:spcAft>
+                <a:spcPts val="1360"/>
+              </a:spcAft>
+            </a:pPr>
+            <a:r>
+              <a:rPr sz="1700" b="1">
+                <a:solidFill>
+                  <a:srgbClr val="0F8B8D"/>
+                </a:solidFill>
+                <a:latin typeface="Inter"/>
+              </a:rPr>
+              <a:t>▸  </a:t>
+            </a:r>
+            <a:r>
+              <a:rPr sz="1700" b="0">
+                <a:solidFill>
+                  <a:srgbClr val="1F2937"/>
+                </a:solidFill>
+                <a:latin typeface="Inter"/>
+              </a:rPr>
+              <a:t>Default model </a:t>
+            </a:r>
+            <a:r>
+              <a:rPr sz="1700" b="1">
+                <a:solidFill>
+                  <a:srgbClr val="16213E"/>
+                </a:solidFill>
+                <a:latin typeface="Inter"/>
+              </a:rPr>
+              <a:t>MiMo-V2.6-Flash</a:t>
+            </a:r>
+            <a:r>
+              <a:rPr sz="1700" b="0">
+                <a:solidFill>
+                  <a:srgbClr val="1F2937"/>
+                </a:solidFill>
+                <a:latin typeface="Inter"/>
+              </a:rPr>
+              <a:t> ranks responders, fixes and overtime; the event planner can use another model.</a:t>
+            </a:r>
+          </a:p>
+          <a:p>
+            <a:pPr>
+              <a:spcAft>
+                <a:spcPts val="1360"/>
+              </a:spcAft>
+            </a:pPr>
+            <a:r>
+              <a:rPr sz="1700" b="1">
+                <a:solidFill>
+                  <a:srgbClr val="0F8B8D"/>
+                </a:solidFill>
+                <a:latin typeface="Inter"/>
+              </a:rPr>
+              <a:t>▸  </a:t>
+            </a:r>
+            <a:r>
+              <a:rPr sz="1700" b="0">
+                <a:solidFill>
+                  <a:srgbClr val="1F2937"/>
+                </a:solidFill>
+                <a:latin typeface="Inter"/>
+              </a:rPr>
+              <a:t>Local budget: 10 requests/min, 2 concurrent; bounded 429 retries; circuit breaker.</a:t>
+            </a:r>
+          </a:p>
+          <a:p>
+            <a:pPr>
+              <a:spcAft>
+                <a:spcPts val="1360"/>
+              </a:spcAft>
+            </a:pPr>
+            <a:r>
+              <a:rPr sz="1700" b="1">
+                <a:solidFill>
+                  <a:srgbClr val="0F8B8D"/>
+                </a:solidFill>
+                <a:latin typeface="Inter"/>
+              </a:rPr>
+              <a:t>▸  </a:t>
+            </a:r>
+            <a:r>
+              <a:rPr sz="1700" b="0">
+                <a:solidFill>
+                  <a:srgbClr val="1F2937"/>
+                </a:solidFill>
+                <a:latin typeface="Inter"/>
+              </a:rPr>
+              <a:t>Recorded MiMo check: </a:t>
+            </a:r>
+            <a:r>
+              <a:rPr sz="1700" b="1">
+                <a:solidFill>
+                  <a:srgbClr val="16213E"/>
+                </a:solidFill>
+                <a:latin typeface="Inter"/>
+              </a:rPr>
+              <a:t>9/10</a:t>
+            </a:r>
+            <a:r>
+              <a:rPr sz="1700" b="0">
+                <a:solidFill>
+                  <a:srgbClr val="1F2937"/>
+                </a:solidFill>
+                <a:latin typeface="Inter"/>
+              </a:rPr>
+              <a:t> valid responder rankings, </a:t>
+            </a:r>
+            <a:r>
+              <a:rPr sz="1700" b="1">
+                <a:solidFill>
+                  <a:srgbClr val="16213E"/>
+                </a:solidFill>
+                <a:latin typeface="Inter"/>
+              </a:rPr>
+              <a:t>10/10</a:t>
+            </a:r>
+            <a:r>
+              <a:rPr sz="1700" b="0">
+                <a:solidFill>
+                  <a:srgbClr val="1F2937"/>
+                </a:solidFill>
+                <a:latin typeface="Inter"/>
+              </a:rPr>
+              <a:t> valid event plans.</a:t>
+            </a:r>
+          </a:p>
+          <a:p>
+            <a:pPr>
+              <a:spcAft>
+                <a:spcPts val="1360"/>
+              </a:spcAft>
+            </a:pPr>
+            <a:r>
+              <a:rPr sz="1700" b="1">
+                <a:solidFill>
+                  <a:srgbClr val="0F8B8D"/>
+                </a:solidFill>
+                <a:latin typeface="Inter"/>
+              </a:rPr>
+              <a:t>▸  </a:t>
+            </a:r>
+            <a:r>
+              <a:rPr sz="1700" b="0">
+                <a:solidFill>
+                  <a:srgbClr val="1F2937"/>
+                </a:solidFill>
+                <a:latin typeface="Inter"/>
+              </a:rPr>
+              <a:t>Model calls run in a background lane and never hold the simulation clock.</a:t>
+            </a:r>
+          </a:p>
+        </p:txBody>
+      </p:sp>
+      <p:pic>
+        <p:nvPicPr>
+          <p:cNvPr id="4" name="Picture 3" descr="settings-models.png"/>
+          <p:cNvPicPr>
+            <a:picLocks noChangeAspect="1"/>
+          </p:cNvPicPr>
+          <p:nvPr/>
+        </p:nvPicPr>
+        <p:blipFill>
+          <a:blip r:embed="rId2"/>
+          <a:stretch>
+            <a:fillRect/>
+          </a:stretch>
+        </p:blipFill>
+        <p:spPr>
+          <a:xfrm>
+            <a:off x="7818120" y="1371600"/>
+            <a:ext cx="4248336" cy="4937760"/>
+          </a:xfrm>
+          <a:prstGeom prst="rect">
+            <a:avLst/>
+          </a:prstGeom>
+          <a:ln w="9525">
+            <a:solidFill>
+              <a:srgbClr val="C9CED8"/>
+            </a:solidFill>
+          </a:ln>
+        </p:spPr>
+      </p:pic>
+      <p:sp>
+        <p:nvSpPr>
+          <p:cNvPr id="5" name="TextBox 4"/>
+          <p:cNvSpPr txBox="1"/>
+          <p:nvPr/>
+        </p:nvSpPr>
+        <p:spPr>
+          <a:xfrm>
+            <a:off x="10607040" y="6400800"/>
+            <a:ext cx="1097280" cy="274320"/>
+          </a:xfrm>
+          <a:prstGeom prst="rect">
+            <a:avLst/>
+          </a:prstGeom>
+          <a:noFill/>
+        </p:spPr>
+        <p:txBody>
+          <a:bodyPr wrap="square" lIns="0" rIns="0" tIns="0" bIns="0">
+            <a:spAutoFit/>
+          </a:bodyPr>
+          <a:lstStyle/>
+          <a:p>
+            <a:pPr algn="ctr"/>
+            <a:r>
+              <a:rPr sz="1100" b="0">
+                <a:solidFill>
+                  <a:srgbClr val="5B6474"/>
+                </a:solidFill>
+                <a:latin typeface="Inter"/>
+              </a:rPr>
+              <a:t>12</a:t>
+            </a:r>
+          </a:p>
+        </p:txBody>
+      </p:sp>
+    </p:spTree>
+  </p:cSld>
+  <p:clrMapOvr>
+    <a:masterClrMapping/>
+  </p:clrMapOvr>
+</p:sld>
+</file>
+
+<file path=ppt/slides/slide13.xml><?xml version="1.0" encoding="utf-8"?>
+<p:sld xmlns:a="http://schemas.openxmlformats.org/drawingml/2006/main" xmlns:p="http://schemas.openxmlformats.org/presentationml/2006/main" xmlns:r="http://schemas.openxmlformats.org/officeDocument/2006/relationships">
+  <p:cSld>
+    <p:bg>
+      <p:bgPr>
+        <a:solidFill>
+          <a:srgbClr val="FFFFFF"/>
+        </a:solidFill>
+        <a:effectLst/>
+      </p:bgPr>
+    </p:bg>
+    <p:spTree>
+      <p:nvGrpSpPr>
+        <p:cNvPr id="1" name=""/>
+        <p:cNvGrpSpPr/>
+        <p:nvPr/>
+      </p:nvGrpSpPr>
+      <p:grpSpPr/>
+      <p:sp>
+        <p:nvSpPr>
+          <p:cNvPr id="2" name="TextBox 1"/>
+          <p:cNvSpPr txBox="1"/>
+          <p:nvPr/>
+        </p:nvSpPr>
+        <p:spPr>
+          <a:xfrm>
+            <a:off x="548640" y="411480"/>
+            <a:ext cx="11064240" cy="731520"/>
+          </a:xfrm>
+          <a:prstGeom prst="rect">
+            <a:avLst/>
+          </a:prstGeom>
+          <a:noFill/>
+        </p:spPr>
+        <p:txBody>
+          <a:bodyPr wrap="square" lIns="0" rIns="0" tIns="0" bIns="0">
+            <a:spAutoFit/>
+          </a:bodyPr>
+          <a:lstStyle/>
+          <a:p>
+            <a:pPr algn="l"/>
+            <a:r>
+              <a:rPr sz="3200" b="1">
+                <a:solidFill>
+                  <a:srgbClr val="16213E"/>
+                </a:solidFill>
+                <a:latin typeface="Inter"/>
+              </a:rPr>
+              <a:t>Engineering quality</a:t>
+            </a:r>
+          </a:p>
+        </p:txBody>
+      </p:sp>
+      <p:sp>
+        <p:nvSpPr>
+          <p:cNvPr id="3" name="TextBox 2"/>
+          <p:cNvSpPr txBox="1"/>
+          <p:nvPr/>
+        </p:nvSpPr>
+        <p:spPr>
+          <a:xfrm>
+            <a:off x="548640" y="1463040"/>
+            <a:ext cx="11064240" cy="4754880"/>
           </a:xfrm>
           <a:prstGeom prst="rect">
             <a:avLst/>
@@ -4545,22 +5794,13 @@
               <a:t>▸  </a:t>
             </a:r>
             <a:r>
-              <a:rPr sz="2100" b="1">
-                <a:solidFill>
-                  <a:srgbClr val="16213E"/>
-                </a:solidFill>
-                <a:latin typeface="Inter"/>
-              </a:rPr>
-              <a:t>Recommended fixes:</a:t>
-            </a:r>
-            <a:r>
               <a:rPr sz="2100" b="0">
                 <a:solidFill>
                   <a:srgbClr val="1F2937"/>
                 </a:solidFill>
                 <a:latin typeface="Inter"/>
               </a:rPr>
-              <a:t> rank response actions retrieved from comparable past resolutions.</a:t>
+              <a:t>Live and Offline are one app; Offline makes no API calls and is fully reproducible.</a:t>
             </a:r>
           </a:p>
           <a:p>
@@ -4579,13 +5819,40 @@
               <a:t>▸  </a:t>
             </a:r>
             <a:r>
+              <a:rPr sz="2100" b="1">
+                <a:solidFill>
+                  <a:srgbClr val="16213E"/>
+                </a:solidFill>
+                <a:latin typeface="Inter"/>
+              </a:rPr>
+              <a:t>317</a:t>
+            </a:r>
+            <a:r>
               <a:rPr sz="2100" b="0">
                 <a:solidFill>
                   <a:srgbClr val="1F2937"/>
                 </a:solidFill>
                 <a:latin typeface="Inter"/>
               </a:rPr>
-              <a:t>Learn from outcomes: feed accepted and successful fixes back into the evidence.</a:t>
+              <a:t> hermetic unit and integration tests and </a:t>
+            </a:r>
+            <a:r>
+              <a:rPr sz="2100" b="1">
+                <a:solidFill>
+                  <a:srgbClr val="16213E"/>
+                </a:solidFill>
+                <a:latin typeface="Inter"/>
+              </a:rPr>
+              <a:t>67</a:t>
+            </a:r>
+            <a:r>
+              <a:rPr sz="2100" b="0">
+                <a:solidFill>
+                  <a:srgbClr val="1F2937"/>
+                </a:solidFill>
+                <a:latin typeface="Inter"/>
+              </a:rPr>
+              <a:t> Chromium end-to-end tests.</a:t>
             </a:r>
           </a:p>
           <a:p>
@@ -4610,7 +5877,226 @@
                 </a:solidFill>
                 <a:latin typeface="Inter"/>
               </a:rPr>
-              <a:t>Connect to real maintenance and ticketing systems in place of the simulated floor.</a:t>
+              <a:t>Deterministic seeded simulation; restart-safe scheduler; atomic, crash-safe persistence.</a:t>
+            </a:r>
+          </a:p>
+          <a:p>
+            <a:pPr>
+              <a:spcAft>
+                <a:spcPts val="1680"/>
+              </a:spcAft>
+            </a:pPr>
+            <a:r>
+              <a:rPr sz="2100" b="1">
+                <a:solidFill>
+                  <a:srgbClr val="0F8B8D"/>
+                </a:solidFill>
+                <a:latin typeface="Inter"/>
+              </a:rPr>
+              <a:t>▸  </a:t>
+            </a:r>
+            <a:r>
+              <a:rPr sz="2100" b="0">
+                <a:solidFill>
+                  <a:srgbClr val="1F2937"/>
+                </a:solidFill>
+                <a:latin typeface="Inter"/>
+              </a:rPr>
+              <a:t>Runs on Node.js 22 or Docker; no external services besides the model API.</a:t>
+            </a:r>
+          </a:p>
+        </p:txBody>
+      </p:sp>
+      <p:sp>
+        <p:nvSpPr>
+          <p:cNvPr id="4" name="TextBox 3"/>
+          <p:cNvSpPr txBox="1"/>
+          <p:nvPr/>
+        </p:nvSpPr>
+        <p:spPr>
+          <a:xfrm>
+            <a:off x="10607040" y="6400800"/>
+            <a:ext cx="1097280" cy="274320"/>
+          </a:xfrm>
+          <a:prstGeom prst="rect">
+            <a:avLst/>
+          </a:prstGeom>
+          <a:noFill/>
+        </p:spPr>
+        <p:txBody>
+          <a:bodyPr wrap="square" lIns="0" rIns="0" tIns="0" bIns="0">
+            <a:spAutoFit/>
+          </a:bodyPr>
+          <a:lstStyle/>
+          <a:p>
+            <a:pPr algn="ctr"/>
+            <a:r>
+              <a:rPr sz="1100" b="0">
+                <a:solidFill>
+                  <a:srgbClr val="5B6474"/>
+                </a:solidFill>
+                <a:latin typeface="Inter"/>
+              </a:rPr>
+              <a:t>13</a:t>
+            </a:r>
+          </a:p>
+        </p:txBody>
+      </p:sp>
+    </p:spTree>
+  </p:cSld>
+  <p:clrMapOvr>
+    <a:masterClrMapping/>
+  </p:clrMapOvr>
+</p:sld>
+</file>
+
+<file path=ppt/slides/slide14.xml><?xml version="1.0" encoding="utf-8"?>
+<p:sld xmlns:a="http://schemas.openxmlformats.org/drawingml/2006/main" xmlns:p="http://schemas.openxmlformats.org/presentationml/2006/main" xmlns:r="http://schemas.openxmlformats.org/officeDocument/2006/relationships">
+  <p:cSld>
+    <p:bg>
+      <p:bgPr>
+        <a:solidFill>
+          <a:srgbClr val="FFFFFF"/>
+        </a:solidFill>
+        <a:effectLst/>
+      </p:bgPr>
+    </p:bg>
+    <p:spTree>
+      <p:nvGrpSpPr>
+        <p:cNvPr id="1" name=""/>
+        <p:cNvGrpSpPr/>
+        <p:nvPr/>
+      </p:nvGrpSpPr>
+      <p:grpSpPr/>
+      <p:sp>
+        <p:nvSpPr>
+          <p:cNvPr id="2" name="TextBox 1"/>
+          <p:cNvSpPr txBox="1"/>
+          <p:nvPr/>
+        </p:nvSpPr>
+        <p:spPr>
+          <a:xfrm>
+            <a:off x="548640" y="411480"/>
+            <a:ext cx="11064240" cy="731520"/>
+          </a:xfrm>
+          <a:prstGeom prst="rect">
+            <a:avLst/>
+          </a:prstGeom>
+          <a:noFill/>
+        </p:spPr>
+        <p:txBody>
+          <a:bodyPr wrap="square" lIns="0" rIns="0" tIns="0" bIns="0">
+            <a:spAutoFit/>
+          </a:bodyPr>
+          <a:lstStyle/>
+          <a:p>
+            <a:pPr algn="l"/>
+            <a:r>
+              <a:rPr sz="3200" b="1">
+                <a:solidFill>
+                  <a:srgbClr val="16213E"/>
+                </a:solidFill>
+                <a:latin typeface="Inter"/>
+              </a:rPr>
+              <a:t>What's next</a:t>
+            </a:r>
+          </a:p>
+        </p:txBody>
+      </p:sp>
+      <p:sp>
+        <p:nvSpPr>
+          <p:cNvPr id="3" name="TextBox 2"/>
+          <p:cNvSpPr txBox="1"/>
+          <p:nvPr/>
+        </p:nvSpPr>
+        <p:spPr>
+          <a:xfrm>
+            <a:off x="548640" y="1463040"/>
+            <a:ext cx="11064240" cy="3291840"/>
+          </a:xfrm>
+          <a:prstGeom prst="rect">
+            <a:avLst/>
+          </a:prstGeom>
+          <a:noFill/>
+        </p:spPr>
+        <p:txBody>
+          <a:bodyPr wrap="square">
+            <a:spAutoFit/>
+          </a:bodyPr>
+          <a:lstStyle/>
+          <a:p>
+            <a:pPr>
+              <a:spcAft>
+                <a:spcPts val="1680"/>
+              </a:spcAft>
+            </a:pPr>
+            <a:r>
+              <a:rPr sz="2100" b="1">
+                <a:solidFill>
+                  <a:srgbClr val="0F8B8D"/>
+                </a:solidFill>
+                <a:latin typeface="Inter"/>
+              </a:rPr>
+              <a:t>▸  </a:t>
+            </a:r>
+            <a:r>
+              <a:rPr sz="2100" b="0">
+                <a:solidFill>
+                  <a:srgbClr val="1F2937"/>
+                </a:solidFill>
+                <a:latin typeface="Inter"/>
+              </a:rPr>
+              <a:t>Connect to real maintenance, ticketing and rostering systems in place of the simulated floor.</a:t>
+            </a:r>
+          </a:p>
+          <a:p>
+            <a:pPr>
+              <a:spcAft>
+                <a:spcPts val="1680"/>
+              </a:spcAft>
+            </a:pPr>
+            <a:r>
+              <a:rPr sz="2100" b="1">
+                <a:solidFill>
+                  <a:srgbClr val="0F8B8D"/>
+                </a:solidFill>
+                <a:latin typeface="Inter"/>
+              </a:rPr>
+              <a:t>▸  </a:t>
+            </a:r>
+            <a:r>
+              <a:rPr sz="2100" b="0">
+                <a:solidFill>
+                  <a:srgbClr val="1F2937"/>
+                </a:solidFill>
+                <a:latin typeface="Inter"/>
+              </a:rPr>
+              <a:t>Learn from approvals: feed operator decisions and repair outcomes back into the evidence.</a:t>
+            </a:r>
+          </a:p>
+          <a:p>
+            <a:pPr>
+              <a:spcAft>
+                <a:spcPts val="1680"/>
+              </a:spcAft>
+            </a:pPr>
+            <a:r>
+              <a:rPr sz="2100" b="1">
+                <a:solidFill>
+                  <a:srgbClr val="0F8B8D"/>
+                </a:solidFill>
+                <a:latin typeface="Inter"/>
+              </a:rPr>
+              <a:t>▸  </a:t>
+            </a:r>
+            <a:r>
+              <a:rPr sz="2100" b="0">
+                <a:solidFill>
+                  <a:srgbClr val="1F2937"/>
+                </a:solidFill>
+                <a:latin typeface="Inter"/>
+              </a:rPr>
+              <a:t>Measure Compass against its baselines on live AMD rankings over a longer run.</a:t>
             </a:r>
           </a:p>
           <a:p>
@@ -4749,7 +6235,7 @@
                 </a:solidFill>
                 <a:latin typeface="Inter"/>
               </a:rPr>
-              <a:t>10</a:t>
+              <a:t>14</a:t>
             </a:r>
           </a:p>
         </p:txBody>
@@ -4839,11 +6325,11 @@
           <a:p>
             <a:pPr>
               <a:spcAft>
-                <a:spcPts val="1920"/>
+                <a:spcPts val="1840"/>
               </a:spcAft>
             </a:pPr>
             <a:r>
-              <a:rPr sz="2400" b="1">
+              <a:rPr sz="2300" b="1">
                 <a:solidFill>
                   <a:srgbClr val="0F8B8D"/>
                 </a:solidFill>
@@ -4852,7 +6338,7 @@
               <a:t>▸  </a:t>
             </a:r>
             <a:r>
-              <a:rPr sz="2400" b="0">
+              <a:rPr sz="2300" b="0">
                 <a:solidFill>
                   <a:srgbClr val="1F2937"/>
                 </a:solidFill>
@@ -4861,7 +6347,7 @@
               <a:t>When equipment fails, </a:t>
             </a:r>
             <a:r>
-              <a:rPr sz="2400" b="1">
+              <a:rPr sz="2300" b="1">
                 <a:solidFill>
                   <a:srgbClr val="16213E"/>
                 </a:solidFill>
@@ -4870,7 +6356,7 @@
               <a:t>closest</a:t>
             </a:r>
             <a:r>
-              <a:rPr sz="2400" b="0">
+              <a:rPr sz="2300" b="0">
                 <a:solidFill>
                   <a:srgbClr val="1F2937"/>
                 </a:solidFill>
@@ -4879,7 +6365,7 @@
               <a:t> or </a:t>
             </a:r>
             <a:r>
-              <a:rPr sz="2400" b="1">
+              <a:rPr sz="2300" b="1">
                 <a:solidFill>
                   <a:srgbClr val="16213E"/>
                 </a:solidFill>
@@ -4888,7 +6374,7 @@
               <a:t>free</a:t>
             </a:r>
             <a:r>
-              <a:rPr sz="2400" b="0">
+              <a:rPr sz="2300" b="0">
                 <a:solidFill>
                   <a:srgbClr val="1F2937"/>
                 </a:solidFill>
@@ -4900,11 +6386,11 @@
           <a:p>
             <a:pPr>
               <a:spcAft>
-                <a:spcPts val="1920"/>
+                <a:spcPts val="1840"/>
               </a:spcAft>
             </a:pPr>
             <a:r>
-              <a:rPr sz="2400" b="1">
+              <a:rPr sz="2300" b="1">
                 <a:solidFill>
                   <a:srgbClr val="0F8B8D"/>
                 </a:solidFill>
@@ -4913,23 +6399,23 @@
               <a:t>▸  </a:t>
             </a:r>
             <a:r>
-              <a:rPr sz="2400" b="0">
+              <a:rPr sz="2300" b="0">
                 <a:solidFill>
                   <a:srgbClr val="1F2937"/>
                 </a:solidFill>
                 <a:latin typeface="Inter"/>
               </a:rPr>
-              <a:t>The nearest technician may never have fixed this kind of fault.</a:t>
+              <a:t>The nearest technician may never have fixed this kind of fault, and the first fix tried is often a guess.</a:t>
             </a:r>
           </a:p>
           <a:p>
             <a:pPr>
               <a:spcAft>
-                <a:spcPts val="1920"/>
+                <a:spcPts val="1840"/>
               </a:spcAft>
             </a:pPr>
             <a:r>
-              <a:rPr sz="2400" b="1">
+              <a:rPr sz="2300" b="1">
                 <a:solidFill>
                   <a:srgbClr val="0F8B8D"/>
                 </a:solidFill>
@@ -4938,23 +6424,23 @@
               <a:t>▸  </a:t>
             </a:r>
             <a:r>
-              <a:rPr sz="2400" b="0">
+              <a:rPr sz="2300" b="0">
                 <a:solidFill>
                   <a:srgbClr val="1F2937"/>
                 </a:solidFill>
                 <a:latin typeface="Inter"/>
               </a:rPr>
-              <a:t>A poor match can mean downtime, a reopened issue or another trip.</a:t>
+              <a:t>A poor match means downtime, a reopened issue or another trip; a backlog means overtime decisions under pressure.</a:t>
             </a:r>
           </a:p>
           <a:p>
             <a:pPr>
               <a:spcAft>
-                <a:spcPts val="1920"/>
+                <a:spcPts val="1840"/>
               </a:spcAft>
             </a:pPr>
             <a:r>
-              <a:rPr sz="2400" b="1">
+              <a:rPr sz="2300" b="1">
                 <a:solidFill>
                   <a:srgbClr val="0F8B8D"/>
                 </a:solidFill>
@@ -4963,7 +6449,7 @@
               <a:t>▸  </a:t>
             </a:r>
             <a:r>
-              <a:rPr sz="2400" b="0">
+              <a:rPr sz="2300" b="0">
                 <a:solidFill>
                   <a:srgbClr val="1F2937"/>
                 </a:solidFill>
@@ -5065,7 +6551,7 @@
                 </a:solidFill>
                 <a:latin typeface="Inter"/>
               </a:rPr>
-              <a:t>What ResponseCompass does</a:t>
+              <a:t>One agent, many screens</a:t>
             </a:r>
           </a:p>
         </p:txBody>
@@ -5078,8 +6564,8 @@
         </p:nvSpPr>
         <p:spPr>
           <a:xfrm>
-            <a:off x="548640" y="1417320"/>
-            <a:ext cx="5120640" cy="4937760"/>
+            <a:off x="548640" y="1051560"/>
+            <a:ext cx="11064240" cy="457200"/>
           </a:xfrm>
           <a:prstGeom prst="rect">
             <a:avLst/>
@@ -5087,169 +6573,71 @@
           <a:noFill/>
         </p:spPr>
         <p:txBody>
-          <a:bodyPr wrap="square">
+          <a:bodyPr wrap="square" lIns="0" rIns="0" tIns="0" bIns="0">
             <a:spAutoFit/>
           </a:bodyPr>
           <a:lstStyle/>
           <a:p>
-            <a:pPr>
-              <a:spcAft>
-                <a:spcPts val="1440"/>
-              </a:spcAft>
-            </a:pPr>
-            <a:r>
-              <a:rPr sz="1800" b="1">
-                <a:solidFill>
-                  <a:srgbClr val="0F8B8D"/>
-                </a:solidFill>
-                <a:latin typeface="Inter"/>
-              </a:rPr>
-              <a:t>▸  </a:t>
-            </a:r>
-            <a:r>
-              <a:rPr sz="1800" b="0">
-                <a:solidFill>
-                  <a:srgbClr val="1F2937"/>
-                </a:solidFill>
-                <a:latin typeface="Inter"/>
-              </a:rPr>
-              <a:t>For every new issue, Compass </a:t>
-            </a:r>
-            <a:r>
-              <a:rPr sz="1800" b="1">
-                <a:solidFill>
-                  <a:srgbClr val="16213E"/>
-                </a:solidFill>
-                <a:latin typeface="Inter"/>
-              </a:rPr>
-              <a:t>ranks the eligible responders</a:t>
-            </a:r>
-            <a:r>
-              <a:rPr sz="1800" b="0">
-                <a:solidFill>
-                  <a:srgbClr val="1F2937"/>
-                </a:solidFill>
-                <a:latin typeface="Inter"/>
-              </a:rPr>
-              <a:t> and explains the tradeoffs.</a:t>
-            </a:r>
-          </a:p>
-          <a:p>
-            <a:pPr>
-              <a:spcAft>
-                <a:spcPts val="1440"/>
-              </a:spcAft>
-            </a:pPr>
-            <a:r>
-              <a:rPr sz="1800" b="1">
-                <a:solidFill>
-                  <a:srgbClr val="0F8B8D"/>
-                </a:solidFill>
-                <a:latin typeface="Inter"/>
-              </a:rPr>
-              <a:t>▸  </a:t>
-            </a:r>
-            <a:r>
-              <a:rPr sz="1800" b="0">
-                <a:solidFill>
-                  <a:srgbClr val="1F2937"/>
-                </a:solidFill>
-                <a:latin typeface="Inter"/>
-              </a:rPr>
-              <a:t>Offers go out automatically; responders accept or reject; complex work can get a second responder.</a:t>
-            </a:r>
-          </a:p>
-          <a:p>
-            <a:pPr>
-              <a:spcAft>
-                <a:spcPts val="1440"/>
-              </a:spcAft>
-            </a:pPr>
-            <a:r>
-              <a:rPr sz="1800" b="1">
-                <a:solidFill>
-                  <a:srgbClr val="0F8B8D"/>
-                </a:solidFill>
-                <a:latin typeface="Inter"/>
-              </a:rPr>
-              <a:t>▸  </a:t>
-            </a:r>
-            <a:r>
-              <a:rPr sz="1800" b="0">
-                <a:solidFill>
-                  <a:srgbClr val="1F2937"/>
-                </a:solidFill>
-                <a:latin typeface="Inter"/>
-              </a:rPr>
-              <a:t>Central command can override a pending dispatch; every step is audited.</a:t>
-            </a:r>
-          </a:p>
-          <a:p>
-            <a:pPr>
-              <a:spcAft>
-                <a:spcPts val="1440"/>
-              </a:spcAft>
-            </a:pPr>
-            <a:r>
-              <a:rPr sz="1800" b="1">
-                <a:solidFill>
-                  <a:srgbClr val="0F8B8D"/>
-                </a:solidFill>
-                <a:latin typeface="Inter"/>
-              </a:rPr>
-              <a:t>▸  </a:t>
-            </a:r>
-            <a:r>
-              <a:rPr sz="1800" b="0">
-                <a:solidFill>
-                  <a:srgbClr val="1F2937"/>
-                </a:solidFill>
-                <a:latin typeface="Inter"/>
-              </a:rPr>
-              <a:t>Each issue carries a </a:t>
-            </a:r>
-            <a:r>
-              <a:rPr sz="1800" b="1">
-                <a:solidFill>
-                  <a:srgbClr val="16213E"/>
-                </a:solidFill>
-                <a:latin typeface="Inter"/>
-              </a:rPr>
-              <a:t>response action</a:t>
-            </a:r>
-            <a:r>
-              <a:rPr sz="1800" b="0">
-                <a:solidFill>
-                  <a:srgbClr val="1F2937"/>
-                </a:solidFill>
-                <a:latin typeface="Inter"/>
-              </a:rPr>
-              <a:t>; recommending fixes from past repairs is </a:t>
-            </a:r>
-            <a:r>
-              <a:rPr sz="1800" b="1">
-                <a:solidFill>
-                  <a:srgbClr val="16213E"/>
-                </a:solidFill>
-                <a:latin typeface="Inter"/>
-              </a:rPr>
-              <a:t>planned</a:t>
-            </a:r>
-            <a:r>
-              <a:rPr sz="1800" b="0">
-                <a:solidFill>
-                  <a:srgbClr val="1F2937"/>
-                </a:solidFill>
-                <a:latin typeface="Inter"/>
-              </a:rPr>
-              <a:t>.</a:t>
-            </a:r>
+            <a:pPr algn="l"/>
+            <a:r>
+              <a:rPr sz="1600" b="0">
+                <a:solidFill>
+                  <a:srgbClr val="5B6474"/>
+                </a:solidFill>
+                <a:latin typeface="Inter"/>
+              </a:rPr>
+              <a:t>Each panel can run full screen on its own monitor; the operator console keeps the controls.</a:t>
+            </a:r>
+          </a:p>
+        </p:txBody>
+      </p:sp>
+      <p:sp>
+        <p:nvSpPr>
+          <p:cNvPr id="4" name="Rectangle 3"/>
+          <p:cNvSpPr/>
+          <p:nvPr/>
+        </p:nvSpPr>
+        <p:spPr>
+          <a:xfrm>
+            <a:off x="484632" y="1536192"/>
+            <a:ext cx="3648456" cy="2108263"/>
+          </a:xfrm>
+          <a:prstGeom prst="rect">
+            <a:avLst/>
+          </a:prstGeom>
+          <a:solidFill>
+            <a:srgbClr val="16213E"/>
+          </a:solidFill>
+          <a:ln>
+            <a:noFill/>
+          </a:ln>
+          <a:effectLst/>
+        </p:spPr>
+        <p:style>
+          <a:lnRef idx="1">
+            <a:schemeClr val="accent1"/>
+          </a:lnRef>
+          <a:fillRef idx="3">
+            <a:schemeClr val="accent1"/>
+          </a:fillRef>
+          <a:effectRef idx="2">
+            <a:schemeClr val="accent1"/>
+          </a:effectRef>
+          <a:fontRef idx="minor">
+            <a:schemeClr val="lt1"/>
+          </a:fontRef>
+        </p:style>
+        <p:txBody>
+          <a:bodyPr rtlCol="0" anchor="ctr"/>
+          <a:lstStyle/>
+          <a:p>
+            <a:pPr algn="ctr"/>
           </a:p>
         </p:txBody>
       </p:sp>
       <p:pic>
         <p:nvPicPr>
-          <p:cNvPr id="4" name="Picture 3" descr="live-floor.png"/>
+          <p:cNvPr id="5" name="Picture 4" descr="screen-map.png"/>
           <p:cNvPicPr>
             <a:picLocks noChangeAspect="1"/>
           </p:cNvPicPr>
@@ -5263,8 +6651,8 @@
         </p:blipFill>
         <p:spPr>
           <a:xfrm>
-            <a:off x="5943600" y="1463040"/>
-            <a:ext cx="5806440" cy="3266122"/>
+            <a:off x="548640" y="1600200"/>
+            <a:ext cx="3520440" cy="1980247"/>
           </a:xfrm>
           <a:prstGeom prst="rect">
             <a:avLst/>
@@ -5278,7 +6666,582 @@
       </p:pic>
       <p:sp>
         <p:nvSpPr>
-          <p:cNvPr id="5" name="TextBox 4"/>
+          <p:cNvPr id="6" name="TextBox 5"/>
+          <p:cNvSpPr txBox="1"/>
+          <p:nvPr/>
+        </p:nvSpPr>
+        <p:spPr>
+          <a:xfrm>
+            <a:off x="548640" y="3690175"/>
+            <a:ext cx="3520440" cy="274320"/>
+          </a:xfrm>
+          <a:prstGeom prst="rect">
+            <a:avLst/>
+          </a:prstGeom>
+          <a:noFill/>
+        </p:spPr>
+        <p:txBody>
+          <a:bodyPr wrap="square" lIns="0" rIns="0" tIns="0" bIns="0">
+            <a:spAutoFit/>
+          </a:bodyPr>
+          <a:lstStyle/>
+          <a:p>
+            <a:pPr algn="ctr"/>
+            <a:r>
+              <a:rPr sz="1200" b="1">
+                <a:solidFill>
+                  <a:srgbClr val="16213E"/>
+                </a:solidFill>
+                <a:latin typeface="Inter"/>
+              </a:rPr>
+              <a:t>Floor map</a:t>
+            </a:r>
+          </a:p>
+        </p:txBody>
+      </p:sp>
+      <p:sp>
+        <p:nvSpPr>
+          <p:cNvPr id="7" name="Rectangle 6"/>
+          <p:cNvSpPr/>
+          <p:nvPr/>
+        </p:nvSpPr>
+        <p:spPr>
+          <a:xfrm>
+            <a:off x="4233671" y="1536192"/>
+            <a:ext cx="3648456" cy="2108263"/>
+          </a:xfrm>
+          <a:prstGeom prst="rect">
+            <a:avLst/>
+          </a:prstGeom>
+          <a:solidFill>
+            <a:srgbClr val="16213E"/>
+          </a:solidFill>
+          <a:ln>
+            <a:noFill/>
+          </a:ln>
+          <a:effectLst/>
+        </p:spPr>
+        <p:style>
+          <a:lnRef idx="1">
+            <a:schemeClr val="accent1"/>
+          </a:lnRef>
+          <a:fillRef idx="3">
+            <a:schemeClr val="accent1"/>
+          </a:fillRef>
+          <a:effectRef idx="2">
+            <a:schemeClr val="accent1"/>
+          </a:effectRef>
+          <a:fontRef idx="minor">
+            <a:schemeClr val="lt1"/>
+          </a:fontRef>
+        </p:style>
+        <p:txBody>
+          <a:bodyPr rtlCol="0" anchor="ctr"/>
+          <a:lstStyle/>
+          <a:p>
+            <a:pPr algn="ctr"/>
+          </a:p>
+        </p:txBody>
+      </p:sp>
+      <p:pic>
+        <p:nvPicPr>
+          <p:cNvPr id="8" name="Picture 7" descr="screen-issues.png"/>
+          <p:cNvPicPr>
+            <a:picLocks noChangeAspect="1"/>
+          </p:cNvPicPr>
+          <p:nvPr/>
+        </p:nvPicPr>
+        <p:blipFill>
+          <a:blip r:embed="rId3"/>
+          <a:stretch>
+            <a:fillRect/>
+          </a:stretch>
+        </p:blipFill>
+        <p:spPr>
+          <a:xfrm>
+            <a:off x="4297679" y="1600200"/>
+            <a:ext cx="3520440" cy="1980247"/>
+          </a:xfrm>
+          <a:prstGeom prst="rect">
+            <a:avLst/>
+          </a:prstGeom>
+          <a:ln w="9525">
+            <a:solidFill>
+              <a:srgbClr val="C9CED8"/>
+            </a:solidFill>
+          </a:ln>
+        </p:spPr>
+      </p:pic>
+      <p:sp>
+        <p:nvSpPr>
+          <p:cNvPr id="9" name="TextBox 8"/>
+          <p:cNvSpPr txBox="1"/>
+          <p:nvPr/>
+        </p:nvSpPr>
+        <p:spPr>
+          <a:xfrm>
+            <a:off x="4297679" y="3690175"/>
+            <a:ext cx="3520440" cy="274320"/>
+          </a:xfrm>
+          <a:prstGeom prst="rect">
+            <a:avLst/>
+          </a:prstGeom>
+          <a:noFill/>
+        </p:spPr>
+        <p:txBody>
+          <a:bodyPr wrap="square" lIns="0" rIns="0" tIns="0" bIns="0">
+            <a:spAutoFit/>
+          </a:bodyPr>
+          <a:lstStyle/>
+          <a:p>
+            <a:pPr algn="ctr"/>
+            <a:r>
+              <a:rPr sz="1200" b="1">
+                <a:solidFill>
+                  <a:srgbClr val="16213E"/>
+                </a:solidFill>
+                <a:latin typeface="Inter"/>
+              </a:rPr>
+              <a:t>Issues</a:t>
+            </a:r>
+          </a:p>
+        </p:txBody>
+      </p:sp>
+      <p:sp>
+        <p:nvSpPr>
+          <p:cNvPr id="10" name="Rectangle 9"/>
+          <p:cNvSpPr/>
+          <p:nvPr/>
+        </p:nvSpPr>
+        <p:spPr>
+          <a:xfrm>
+            <a:off x="7982711" y="1536192"/>
+            <a:ext cx="3648456" cy="2108263"/>
+          </a:xfrm>
+          <a:prstGeom prst="rect">
+            <a:avLst/>
+          </a:prstGeom>
+          <a:solidFill>
+            <a:srgbClr val="16213E"/>
+          </a:solidFill>
+          <a:ln>
+            <a:noFill/>
+          </a:ln>
+          <a:effectLst/>
+        </p:spPr>
+        <p:style>
+          <a:lnRef idx="1">
+            <a:schemeClr val="accent1"/>
+          </a:lnRef>
+          <a:fillRef idx="3">
+            <a:schemeClr val="accent1"/>
+          </a:fillRef>
+          <a:effectRef idx="2">
+            <a:schemeClr val="accent1"/>
+          </a:effectRef>
+          <a:fontRef idx="minor">
+            <a:schemeClr val="lt1"/>
+          </a:fontRef>
+        </p:style>
+        <p:txBody>
+          <a:bodyPr rtlCol="0" anchor="ctr"/>
+          <a:lstStyle/>
+          <a:p>
+            <a:pPr algn="ctr"/>
+          </a:p>
+        </p:txBody>
+      </p:sp>
+      <p:pic>
+        <p:nvPicPr>
+          <p:cNvPr id="11" name="Picture 10" descr="screen-dispatch.png"/>
+          <p:cNvPicPr>
+            <a:picLocks noChangeAspect="1"/>
+          </p:cNvPicPr>
+          <p:nvPr/>
+        </p:nvPicPr>
+        <p:blipFill>
+          <a:blip r:embed="rId4"/>
+          <a:stretch>
+            <a:fillRect/>
+          </a:stretch>
+        </p:blipFill>
+        <p:spPr>
+          <a:xfrm>
+            <a:off x="8046719" y="1600200"/>
+            <a:ext cx="3520440" cy="1980247"/>
+          </a:xfrm>
+          <a:prstGeom prst="rect">
+            <a:avLst/>
+          </a:prstGeom>
+          <a:ln w="9525">
+            <a:solidFill>
+              <a:srgbClr val="C9CED8"/>
+            </a:solidFill>
+          </a:ln>
+        </p:spPr>
+      </p:pic>
+      <p:sp>
+        <p:nvSpPr>
+          <p:cNvPr id="12" name="TextBox 11"/>
+          <p:cNvSpPr txBox="1"/>
+          <p:nvPr/>
+        </p:nvSpPr>
+        <p:spPr>
+          <a:xfrm>
+            <a:off x="8046719" y="3690175"/>
+            <a:ext cx="3520440" cy="274320"/>
+          </a:xfrm>
+          <a:prstGeom prst="rect">
+            <a:avLst/>
+          </a:prstGeom>
+          <a:noFill/>
+        </p:spPr>
+        <p:txBody>
+          <a:bodyPr wrap="square" lIns="0" rIns="0" tIns="0" bIns="0">
+            <a:spAutoFit/>
+          </a:bodyPr>
+          <a:lstStyle/>
+          <a:p>
+            <a:pPr algn="ctr"/>
+            <a:r>
+              <a:rPr sz="1200" b="1">
+                <a:solidFill>
+                  <a:srgbClr val="16213E"/>
+                </a:solidFill>
+                <a:latin typeface="Inter"/>
+              </a:rPr>
+              <a:t>Dispatch</a:t>
+            </a:r>
+          </a:p>
+        </p:txBody>
+      </p:sp>
+      <p:sp>
+        <p:nvSpPr>
+          <p:cNvPr id="13" name="Rectangle 12"/>
+          <p:cNvSpPr/>
+          <p:nvPr/>
+        </p:nvSpPr>
+        <p:spPr>
+          <a:xfrm>
+            <a:off x="484632" y="3931920"/>
+            <a:ext cx="3648456" cy="2108263"/>
+          </a:xfrm>
+          <a:prstGeom prst="rect">
+            <a:avLst/>
+          </a:prstGeom>
+          <a:solidFill>
+            <a:srgbClr val="16213E"/>
+          </a:solidFill>
+          <a:ln>
+            <a:noFill/>
+          </a:ln>
+          <a:effectLst/>
+        </p:spPr>
+        <p:style>
+          <a:lnRef idx="1">
+            <a:schemeClr val="accent1"/>
+          </a:lnRef>
+          <a:fillRef idx="3">
+            <a:schemeClr val="accent1"/>
+          </a:fillRef>
+          <a:effectRef idx="2">
+            <a:schemeClr val="accent1"/>
+          </a:effectRef>
+          <a:fontRef idx="minor">
+            <a:schemeClr val="lt1"/>
+          </a:fontRef>
+        </p:style>
+        <p:txBody>
+          <a:bodyPr rtlCol="0" anchor="ctr"/>
+          <a:lstStyle/>
+          <a:p>
+            <a:pPr algn="ctr"/>
+          </a:p>
+        </p:txBody>
+      </p:sp>
+      <p:pic>
+        <p:nvPicPr>
+          <p:cNvPr id="14" name="Picture 13" descr="screen-events.png"/>
+          <p:cNvPicPr>
+            <a:picLocks noChangeAspect="1"/>
+          </p:cNvPicPr>
+          <p:nvPr/>
+        </p:nvPicPr>
+        <p:blipFill>
+          <a:blip r:embed="rId5"/>
+          <a:stretch>
+            <a:fillRect/>
+          </a:stretch>
+        </p:blipFill>
+        <p:spPr>
+          <a:xfrm>
+            <a:off x="548640" y="3995928"/>
+            <a:ext cx="3520440" cy="1980247"/>
+          </a:xfrm>
+          <a:prstGeom prst="rect">
+            <a:avLst/>
+          </a:prstGeom>
+          <a:ln w="9525">
+            <a:solidFill>
+              <a:srgbClr val="C9CED8"/>
+            </a:solidFill>
+          </a:ln>
+        </p:spPr>
+      </p:pic>
+      <p:sp>
+        <p:nvSpPr>
+          <p:cNvPr id="15" name="TextBox 14"/>
+          <p:cNvSpPr txBox="1"/>
+          <p:nvPr/>
+        </p:nvSpPr>
+        <p:spPr>
+          <a:xfrm>
+            <a:off x="548640" y="6085903"/>
+            <a:ext cx="3520440" cy="274320"/>
+          </a:xfrm>
+          <a:prstGeom prst="rect">
+            <a:avLst/>
+          </a:prstGeom>
+          <a:noFill/>
+        </p:spPr>
+        <p:txBody>
+          <a:bodyPr wrap="square" lIns="0" rIns="0" tIns="0" bIns="0">
+            <a:spAutoFit/>
+          </a:bodyPr>
+          <a:lstStyle/>
+          <a:p>
+            <a:pPr algn="ctr"/>
+            <a:r>
+              <a:rPr sz="1200" b="1">
+                <a:solidFill>
+                  <a:srgbClr val="16213E"/>
+                </a:solidFill>
+                <a:latin typeface="Inter"/>
+              </a:rPr>
+              <a:t>Event feed</a:t>
+            </a:r>
+          </a:p>
+        </p:txBody>
+      </p:sp>
+      <p:sp>
+        <p:nvSpPr>
+          <p:cNvPr id="16" name="Rectangle 15"/>
+          <p:cNvSpPr/>
+          <p:nvPr/>
+        </p:nvSpPr>
+        <p:spPr>
+          <a:xfrm>
+            <a:off x="4233671" y="3931920"/>
+            <a:ext cx="3648456" cy="2108263"/>
+          </a:xfrm>
+          <a:prstGeom prst="rect">
+            <a:avLst/>
+          </a:prstGeom>
+          <a:solidFill>
+            <a:srgbClr val="16213E"/>
+          </a:solidFill>
+          <a:ln>
+            <a:noFill/>
+          </a:ln>
+          <a:effectLst/>
+        </p:spPr>
+        <p:style>
+          <a:lnRef idx="1">
+            <a:schemeClr val="accent1"/>
+          </a:lnRef>
+          <a:fillRef idx="3">
+            <a:schemeClr val="accent1"/>
+          </a:fillRef>
+          <a:effectRef idx="2">
+            <a:schemeClr val="accent1"/>
+          </a:effectRef>
+          <a:fontRef idx="minor">
+            <a:schemeClr val="lt1"/>
+          </a:fontRef>
+        </p:style>
+        <p:txBody>
+          <a:bodyPr rtlCol="0" anchor="ctr"/>
+          <a:lstStyle/>
+          <a:p>
+            <a:pPr algn="ctr"/>
+          </a:p>
+        </p:txBody>
+      </p:sp>
+      <p:pic>
+        <p:nvPicPr>
+          <p:cNvPr id="17" name="Picture 16" descr="screen-pareto.png"/>
+          <p:cNvPicPr>
+            <a:picLocks noChangeAspect="1"/>
+          </p:cNvPicPr>
+          <p:nvPr/>
+        </p:nvPicPr>
+        <p:blipFill>
+          <a:blip r:embed="rId6"/>
+          <a:stretch>
+            <a:fillRect/>
+          </a:stretch>
+        </p:blipFill>
+        <p:spPr>
+          <a:xfrm>
+            <a:off x="4297679" y="3995928"/>
+            <a:ext cx="3520440" cy="1980247"/>
+          </a:xfrm>
+          <a:prstGeom prst="rect">
+            <a:avLst/>
+          </a:prstGeom>
+          <a:ln w="9525">
+            <a:solidFill>
+              <a:srgbClr val="C9CED8"/>
+            </a:solidFill>
+          </a:ln>
+        </p:spPr>
+      </p:pic>
+      <p:sp>
+        <p:nvSpPr>
+          <p:cNvPr id="18" name="TextBox 17"/>
+          <p:cNvSpPr txBox="1"/>
+          <p:nvPr/>
+        </p:nvSpPr>
+        <p:spPr>
+          <a:xfrm>
+            <a:off x="4297679" y="6085903"/>
+            <a:ext cx="3520440" cy="274320"/>
+          </a:xfrm>
+          <a:prstGeom prst="rect">
+            <a:avLst/>
+          </a:prstGeom>
+          <a:noFill/>
+        </p:spPr>
+        <p:txBody>
+          <a:bodyPr wrap="square" lIns="0" rIns="0" tIns="0" bIns="0">
+            <a:spAutoFit/>
+          </a:bodyPr>
+          <a:lstStyle/>
+          <a:p>
+            <a:pPr algn="ctr"/>
+            <a:r>
+              <a:rPr sz="1200" b="1">
+                <a:solidFill>
+                  <a:srgbClr val="16213E"/>
+                </a:solidFill>
+                <a:latin typeface="Inter"/>
+              </a:rPr>
+              <a:t>Issue Pareto</a:t>
+            </a:r>
+          </a:p>
+        </p:txBody>
+      </p:sp>
+      <p:sp>
+        <p:nvSpPr>
+          <p:cNvPr id="19" name="Rectangle 18"/>
+          <p:cNvSpPr/>
+          <p:nvPr/>
+        </p:nvSpPr>
+        <p:spPr>
+          <a:xfrm>
+            <a:off x="7982711" y="3931920"/>
+            <a:ext cx="3648456" cy="2108263"/>
+          </a:xfrm>
+          <a:prstGeom prst="rect">
+            <a:avLst/>
+          </a:prstGeom>
+          <a:solidFill>
+            <a:srgbClr val="16213E"/>
+          </a:solidFill>
+          <a:ln>
+            <a:noFill/>
+          </a:ln>
+          <a:effectLst/>
+        </p:spPr>
+        <p:style>
+          <a:lnRef idx="1">
+            <a:schemeClr val="accent1"/>
+          </a:lnRef>
+          <a:fillRef idx="3">
+            <a:schemeClr val="accent1"/>
+          </a:fillRef>
+          <a:effectRef idx="2">
+            <a:schemeClr val="accent1"/>
+          </a:effectRef>
+          <a:fontRef idx="minor">
+            <a:schemeClr val="lt1"/>
+          </a:fontRef>
+        </p:style>
+        <p:txBody>
+          <a:bodyPr rtlCol="0" anchor="ctr"/>
+          <a:lstStyle/>
+          <a:p>
+            <a:pPr algn="ctr"/>
+          </a:p>
+        </p:txBody>
+      </p:sp>
+      <p:pic>
+        <p:nvPicPr>
+          <p:cNvPr id="20" name="Picture 19" descr="screen-analytics.png"/>
+          <p:cNvPicPr>
+            <a:picLocks noChangeAspect="1"/>
+          </p:cNvPicPr>
+          <p:nvPr/>
+        </p:nvPicPr>
+        <p:blipFill>
+          <a:blip r:embed="rId7"/>
+          <a:stretch>
+            <a:fillRect/>
+          </a:stretch>
+        </p:blipFill>
+        <p:spPr>
+          <a:xfrm>
+            <a:off x="8046719" y="3995928"/>
+            <a:ext cx="3520440" cy="1980247"/>
+          </a:xfrm>
+          <a:prstGeom prst="rect">
+            <a:avLst/>
+          </a:prstGeom>
+          <a:ln w="9525">
+            <a:solidFill>
+              <a:srgbClr val="C9CED8"/>
+            </a:solidFill>
+          </a:ln>
+        </p:spPr>
+      </p:pic>
+      <p:sp>
+        <p:nvSpPr>
+          <p:cNvPr id="21" name="TextBox 20"/>
+          <p:cNvSpPr txBox="1"/>
+          <p:nvPr/>
+        </p:nvSpPr>
+        <p:spPr>
+          <a:xfrm>
+            <a:off x="8046719" y="6085903"/>
+            <a:ext cx="3520440" cy="274320"/>
+          </a:xfrm>
+          <a:prstGeom prst="rect">
+            <a:avLst/>
+          </a:prstGeom>
+          <a:noFill/>
+        </p:spPr>
+        <p:txBody>
+          <a:bodyPr wrap="square" lIns="0" rIns="0" tIns="0" bIns="0">
+            <a:spAutoFit/>
+          </a:bodyPr>
+          <a:lstStyle/>
+          <a:p>
+            <a:pPr algn="ctr"/>
+            <a:r>
+              <a:rPr sz="1200" b="1">
+                <a:solidFill>
+                  <a:srgbClr val="16213E"/>
+                </a:solidFill>
+                <a:latin typeface="Inter"/>
+              </a:rPr>
+              <a:t>Analytics</a:t>
+            </a:r>
+          </a:p>
+        </p:txBody>
+      </p:sp>
+      <p:sp>
+        <p:nvSpPr>
+          <p:cNvPr id="22" name="TextBox 21"/>
           <p:cNvSpPr txBox="1"/>
           <p:nvPr/>
         </p:nvSpPr>
@@ -5367,7 +7330,7 @@
                 </a:solidFill>
                 <a:latin typeface="Inter"/>
               </a:rPr>
-              <a:t>Code owns the facts. Models only rank.</a:t>
+              <a:t>Autonomous by default, human in command</a:t>
             </a:r>
           </a:p>
         </p:txBody>
@@ -5402,21 +7365,21 @@
                 </a:solidFill>
                 <a:latin typeface="Inter"/>
               </a:rPr>
-              <a:t>Application code owns time, facts, eligibility, baselines and every mutation; models only propose.</a:t>
-            </a:r>
-          </a:p>
-        </p:txBody>
-      </p:sp>
-      <p:sp>
-        <p:nvSpPr>
-          <p:cNvPr id="4" name="Node: Simulation clock"/>
+              <a:t>Code runs the loop; AMD models rank; people decide at the amber steps.</a:t>
+            </a:r>
+          </a:p>
+        </p:txBody>
+      </p:sp>
+      <p:sp>
+        <p:nvSpPr>
+          <p:cNvPr id="4" name="Node: Issue raised"/>
           <p:cNvSpPr/>
           <p:nvPr/>
         </p:nvSpPr>
         <p:spPr>
           <a:xfrm>
-            <a:off x="411480" y="1600200"/>
-            <a:ext cx="1874519" cy="658368"/>
+            <a:off x="411480" y="1783080"/>
+            <a:ext cx="1920240" cy="658368"/>
           </a:xfrm>
           <a:prstGeom prst="roundRect">
             <a:avLst>
@@ -5459,7 +7422,7 @@
                 </a:solidFill>
                 <a:latin typeface="Inter"/>
               </a:rPr>
-              <a:t>Simulation clock</a:t>
+              <a:t>Issue raised</a:t>
             </a:r>
           </a:p>
           <a:p>
@@ -5471,21 +7434,90 @@
                 </a:solidFill>
                 <a:latin typeface="Inter"/>
               </a:rPr>
-              <a:t>persistent, pausable</a:t>
-            </a:r>
-          </a:p>
-        </p:txBody>
-      </p:sp>
-      <p:sp>
-        <p:nvSpPr>
-          <p:cNvPr id="5" name="Node: Scheduler"/>
+              <a:t>equipment fault, symptom</a:t>
+            </a:r>
+          </a:p>
+        </p:txBody>
+      </p:sp>
+      <p:sp>
+        <p:nvSpPr>
+          <p:cNvPr id="5" name="Node: Rank responders"/>
           <p:cNvSpPr/>
           <p:nvPr/>
         </p:nvSpPr>
         <p:spPr>
           <a:xfrm>
-            <a:off x="411480" y="2697480"/>
-            <a:ext cx="1874519" cy="658368"/>
+            <a:off x="2788920" y="1783080"/>
+            <a:ext cx="1920240" cy="658368"/>
+          </a:xfrm>
+          <a:prstGeom prst="roundRect">
+            <a:avLst>
+              <a:gd name="adj" fmla="val 18000"/>
+            </a:avLst>
+          </a:prstGeom>
+          <a:solidFill>
+            <a:srgbClr val="0F8B8D"/>
+          </a:solidFill>
+          <a:ln w="19050">
+            <a:solidFill>
+              <a:srgbClr val="0F8B8D"/>
+            </a:solidFill>
+          </a:ln>
+          <a:effectLst/>
+        </p:spPr>
+        <p:style>
+          <a:lnRef idx="1">
+            <a:schemeClr val="accent1"/>
+          </a:lnRef>
+          <a:fillRef idx="3">
+            <a:schemeClr val="accent1"/>
+          </a:fillRef>
+          <a:effectRef idx="2">
+            <a:schemeClr val="accent1"/>
+          </a:effectRef>
+          <a:fontRef idx="minor">
+            <a:schemeClr val="lt1"/>
+          </a:fontRef>
+        </p:style>
+        <p:txBody>
+          <a:bodyPr rtlCol="0" anchor="ctr" wrap="square" lIns="54864" rIns="54864" tIns="18288" bIns="18288"/>
+          <a:lstStyle/>
+          <a:p>
+            <a:pPr algn="ctr"/>
+            <a:r>
+              <a:rPr sz="1300" b="1">
+                <a:solidFill>
+                  <a:srgbClr val="FFFFFF"/>
+                </a:solidFill>
+                <a:latin typeface="Inter"/>
+              </a:rPr>
+              <a:t>Rank responders</a:t>
+            </a:r>
+          </a:p>
+          <a:p>
+            <a:pPr algn="ctr"/>
+            <a:r>
+              <a:rPr sz="950" b="0">
+                <a:solidFill>
+                  <a:srgbClr val="E6FFFF"/>
+                </a:solidFill>
+                <a:latin typeface="Inter"/>
+              </a:rPr>
+              <a:t>Compass on AMD</a:t>
+            </a:r>
+          </a:p>
+        </p:txBody>
+      </p:sp>
+      <p:sp>
+        <p:nvSpPr>
+          <p:cNvPr id="6" name="Node: Offer sent"/>
+          <p:cNvSpPr/>
+          <p:nvPr/>
+        </p:nvSpPr>
+        <p:spPr>
+          <a:xfrm>
+            <a:off x="5166360" y="1783080"/>
+            <a:ext cx="1920240" cy="658368"/>
           </a:xfrm>
           <a:prstGeom prst="roundRect">
             <a:avLst>
@@ -5528,7 +7560,7 @@
                 </a:solidFill>
                 <a:latin typeface="Inter"/>
               </a:rPr>
-              <a:t>Scheduler</a:t>
+              <a:t>Offer sent</a:t>
             </a:r>
           </a:p>
           <a:p>
@@ -5540,21 +7572,90 @@
                 </a:solidFill>
                 <a:latin typeface="Inter"/>
               </a:rPr>
-              <a:t>one-shot, restart-safe</a:t>
-            </a:r>
-          </a:p>
-        </p:txBody>
-      </p:sp>
-      <p:sp>
-        <p:nvSpPr>
-          <p:cNvPr id="6" name="Node: Event planner"/>
+              <a:t>automatic, ranked queue</a:t>
+            </a:r>
+          </a:p>
+        </p:txBody>
+      </p:sp>
+      <p:sp>
+        <p:nvSpPr>
+          <p:cNvPr id="7" name="Node: Responder"/>
           <p:cNvSpPr/>
           <p:nvPr/>
         </p:nvSpPr>
         <p:spPr>
           <a:xfrm>
-            <a:off x="2834640" y="1600200"/>
-            <a:ext cx="1874519" cy="658368"/>
+            <a:off x="7543800" y="1783080"/>
+            <a:ext cx="1920240" cy="658368"/>
+          </a:xfrm>
+          <a:prstGeom prst="roundRect">
+            <a:avLst>
+              <a:gd name="adj" fmla="val 18000"/>
+            </a:avLst>
+          </a:prstGeom>
+          <a:solidFill>
+            <a:srgbClr val="FFFFFF"/>
+          </a:solidFill>
+          <a:ln w="19050">
+            <a:solidFill>
+              <a:srgbClr val="D98A1C"/>
+            </a:solidFill>
+          </a:ln>
+          <a:effectLst/>
+        </p:spPr>
+        <p:style>
+          <a:lnRef idx="1">
+            <a:schemeClr val="accent1"/>
+          </a:lnRef>
+          <a:fillRef idx="3">
+            <a:schemeClr val="accent1"/>
+          </a:fillRef>
+          <a:effectRef idx="2">
+            <a:schemeClr val="accent1"/>
+          </a:effectRef>
+          <a:fontRef idx="minor">
+            <a:schemeClr val="lt1"/>
+          </a:fontRef>
+        </p:style>
+        <p:txBody>
+          <a:bodyPr rtlCol="0" anchor="ctr" wrap="square" lIns="54864" rIns="54864" tIns="18288" bIns="18288"/>
+          <a:lstStyle/>
+          <a:p>
+            <a:pPr algn="ctr"/>
+            <a:r>
+              <a:rPr sz="1300" b="1">
+                <a:solidFill>
+                  <a:srgbClr val="1F2937"/>
+                </a:solidFill>
+                <a:latin typeface="Inter"/>
+              </a:rPr>
+              <a:t>Responder</a:t>
+            </a:r>
+          </a:p>
+          <a:p>
+            <a:pPr algn="ctr"/>
+            <a:r>
+              <a:rPr sz="950" b="0">
+                <a:solidFill>
+                  <a:srgbClr val="5B6474"/>
+                </a:solidFill>
+                <a:latin typeface="Inter"/>
+              </a:rPr>
+              <a:t>accepts or rejects</a:t>
+            </a:r>
+          </a:p>
+        </p:txBody>
+      </p:sp>
+      <p:sp>
+        <p:nvSpPr>
+          <p:cNvPr id="8" name="Node: Rank fixes"/>
+          <p:cNvSpPr/>
+          <p:nvPr/>
+        </p:nvSpPr>
+        <p:spPr>
+          <a:xfrm>
+            <a:off x="9921240" y="1783080"/>
+            <a:ext cx="1920240" cy="658368"/>
           </a:xfrm>
           <a:prstGeom prst="roundRect">
             <a:avLst>
@@ -5597,7 +7698,7 @@
                 </a:solidFill>
                 <a:latin typeface="Inter"/>
               </a:rPr>
-              <a:t>Event planner</a:t>
+              <a:t>Rank fixes</a:t>
             </a:r>
           </a:p>
           <a:p>
@@ -5609,21 +7710,228 @@
                 </a:solidFill>
                 <a:latin typeface="Inter"/>
               </a:rPr>
-              <a:t>AMD Token Factory</a:t>
-            </a:r>
-          </a:p>
-        </p:txBody>
-      </p:sp>
-      <p:sp>
-        <p:nvSpPr>
-          <p:cNvPr id="7" name="Node: Fallback planner"/>
+              <a:t>Compass on AMD</a:t>
+            </a:r>
+          </a:p>
+        </p:txBody>
+      </p:sp>
+      <p:sp>
+        <p:nvSpPr>
+          <p:cNvPr id="9" name="Node: Rank overtime"/>
           <p:cNvSpPr/>
           <p:nvPr/>
         </p:nvSpPr>
         <p:spPr>
           <a:xfrm>
-            <a:off x="2834640" y="2697480"/>
-            <a:ext cx="1874519" cy="658368"/>
+            <a:off x="411480" y="3200400"/>
+            <a:ext cx="1920240" cy="658368"/>
+          </a:xfrm>
+          <a:prstGeom prst="roundRect">
+            <a:avLst>
+              <a:gd name="adj" fmla="val 18000"/>
+            </a:avLst>
+          </a:prstGeom>
+          <a:solidFill>
+            <a:srgbClr val="0F8B8D"/>
+          </a:solidFill>
+          <a:ln w="19050">
+            <a:solidFill>
+              <a:srgbClr val="0F8B8D"/>
+            </a:solidFill>
+          </a:ln>
+          <a:effectLst/>
+        </p:spPr>
+        <p:style>
+          <a:lnRef idx="1">
+            <a:schemeClr val="accent1"/>
+          </a:lnRef>
+          <a:fillRef idx="3">
+            <a:schemeClr val="accent1"/>
+          </a:fillRef>
+          <a:effectRef idx="2">
+            <a:schemeClr val="accent1"/>
+          </a:effectRef>
+          <a:fontRef idx="minor">
+            <a:schemeClr val="lt1"/>
+          </a:fontRef>
+        </p:style>
+        <p:txBody>
+          <a:bodyPr rtlCol="0" anchor="ctr" wrap="square" lIns="54864" rIns="54864" tIns="18288" bIns="18288"/>
+          <a:lstStyle/>
+          <a:p>
+            <a:pPr algn="ctr"/>
+            <a:r>
+              <a:rPr sz="1300" b="1">
+                <a:solidFill>
+                  <a:srgbClr val="FFFFFF"/>
+                </a:solidFill>
+                <a:latin typeface="Inter"/>
+              </a:rPr>
+              <a:t>Rank overtime</a:t>
+            </a:r>
+          </a:p>
+          <a:p>
+            <a:pPr algn="ctr"/>
+            <a:r>
+              <a:rPr sz="950" b="0">
+                <a:solidFill>
+                  <a:srgbClr val="E6FFFF"/>
+                </a:solidFill>
+                <a:latin typeface="Inter"/>
+              </a:rPr>
+              <a:t>Compass, legal options only</a:t>
+            </a:r>
+          </a:p>
+        </p:txBody>
+      </p:sp>
+      <p:sp>
+        <p:nvSpPr>
+          <p:cNvPr id="10" name="Node: Central command"/>
+          <p:cNvSpPr/>
+          <p:nvPr/>
+        </p:nvSpPr>
+        <p:spPr>
+          <a:xfrm>
+            <a:off x="2788920" y="3200400"/>
+            <a:ext cx="1920240" cy="658368"/>
+          </a:xfrm>
+          <a:prstGeom prst="roundRect">
+            <a:avLst>
+              <a:gd name="adj" fmla="val 18000"/>
+            </a:avLst>
+          </a:prstGeom>
+          <a:solidFill>
+            <a:srgbClr val="FFFFFF"/>
+          </a:solidFill>
+          <a:ln w="19050">
+            <a:solidFill>
+              <a:srgbClr val="D98A1C"/>
+            </a:solidFill>
+          </a:ln>
+          <a:effectLst/>
+        </p:spPr>
+        <p:style>
+          <a:lnRef idx="1">
+            <a:schemeClr val="accent1"/>
+          </a:lnRef>
+          <a:fillRef idx="3">
+            <a:schemeClr val="accent1"/>
+          </a:fillRef>
+          <a:effectRef idx="2">
+            <a:schemeClr val="accent1"/>
+          </a:effectRef>
+          <a:fontRef idx="minor">
+            <a:schemeClr val="lt1"/>
+          </a:fontRef>
+        </p:style>
+        <p:txBody>
+          <a:bodyPr rtlCol="0" anchor="ctr" wrap="square" lIns="54864" rIns="54864" tIns="18288" bIns="18288"/>
+          <a:lstStyle/>
+          <a:p>
+            <a:pPr algn="ctr"/>
+            <a:r>
+              <a:rPr sz="1300" b="1">
+                <a:solidFill>
+                  <a:srgbClr val="1F2937"/>
+                </a:solidFill>
+                <a:latin typeface="Inter"/>
+              </a:rPr>
+              <a:t>Central command</a:t>
+            </a:r>
+          </a:p>
+          <a:p>
+            <a:pPr algn="ctr"/>
+            <a:r>
+              <a:rPr sz="950" b="0">
+                <a:solidFill>
+                  <a:srgbClr val="5B6474"/>
+                </a:solidFill>
+                <a:latin typeface="Inter"/>
+              </a:rPr>
+              <a:t>approves or rejects</a:t>
+            </a:r>
+          </a:p>
+        </p:txBody>
+      </p:sp>
+      <p:sp>
+        <p:nvSpPr>
+          <p:cNvPr id="11" name="Node: Central command"/>
+          <p:cNvSpPr/>
+          <p:nvPr/>
+        </p:nvSpPr>
+        <p:spPr>
+          <a:xfrm>
+            <a:off x="7543800" y="3200400"/>
+            <a:ext cx="1920240" cy="658368"/>
+          </a:xfrm>
+          <a:prstGeom prst="roundRect">
+            <a:avLst>
+              <a:gd name="adj" fmla="val 18000"/>
+            </a:avLst>
+          </a:prstGeom>
+          <a:solidFill>
+            <a:srgbClr val="FFFFFF"/>
+          </a:solidFill>
+          <a:ln w="19050">
+            <a:solidFill>
+              <a:srgbClr val="D98A1C"/>
+            </a:solidFill>
+          </a:ln>
+          <a:effectLst/>
+        </p:spPr>
+        <p:style>
+          <a:lnRef idx="1">
+            <a:schemeClr val="accent1"/>
+          </a:lnRef>
+          <a:fillRef idx="3">
+            <a:schemeClr val="accent1"/>
+          </a:fillRef>
+          <a:effectRef idx="2">
+            <a:schemeClr val="accent1"/>
+          </a:effectRef>
+          <a:fontRef idx="minor">
+            <a:schemeClr val="lt1"/>
+          </a:fontRef>
+        </p:style>
+        <p:txBody>
+          <a:bodyPr rtlCol="0" anchor="ctr" wrap="square" lIns="54864" rIns="54864" tIns="18288" bIns="18288"/>
+          <a:lstStyle/>
+          <a:p>
+            <a:pPr algn="ctr"/>
+            <a:r>
+              <a:rPr sz="1300" b="1">
+                <a:solidFill>
+                  <a:srgbClr val="1F2937"/>
+                </a:solidFill>
+                <a:latin typeface="Inter"/>
+              </a:rPr>
+              <a:t>Central command</a:t>
+            </a:r>
+          </a:p>
+          <a:p>
+            <a:pPr algn="ctr"/>
+            <a:r>
+              <a:rPr sz="950" b="0">
+                <a:solidFill>
+                  <a:srgbClr val="5B6474"/>
+                </a:solidFill>
+                <a:latin typeface="Inter"/>
+              </a:rPr>
+              <a:t>override, transfer, support</a:t>
+            </a:r>
+          </a:p>
+        </p:txBody>
+      </p:sp>
+      <p:sp>
+        <p:nvSpPr>
+          <p:cNvPr id="12" name="Node: Repair attempt"/>
+          <p:cNvSpPr/>
+          <p:nvPr/>
+        </p:nvSpPr>
+        <p:spPr>
+          <a:xfrm>
+            <a:off x="9921240" y="3200400"/>
+            <a:ext cx="1920240" cy="658368"/>
           </a:xfrm>
           <a:prstGeom prst="roundRect">
             <a:avLst>
@@ -5666,7 +7974,7 @@
                 </a:solidFill>
                 <a:latin typeface="Inter"/>
               </a:rPr>
-              <a:t>Fallback planner</a:t>
+              <a:t>Repair attempt</a:t>
             </a:r>
           </a:p>
           <a:p>
@@ -5678,21 +7986,21 @@
                 </a:solidFill>
                 <a:latin typeface="Inter"/>
               </a:rPr>
-              <a:t>deterministic, API-free</a:t>
-            </a:r>
-          </a:p>
-        </p:txBody>
-      </p:sp>
-      <p:sp>
-        <p:nvSpPr>
-          <p:cNvPr id="8" name="Node: Validator"/>
+              <a:t>outcome from hidden truth</a:t>
+            </a:r>
+          </a:p>
+        </p:txBody>
+      </p:sp>
+      <p:sp>
+        <p:nvSpPr>
+          <p:cNvPr id="13" name="Node: Backlog review"/>
           <p:cNvSpPr/>
           <p:nvPr/>
         </p:nvSpPr>
         <p:spPr>
           <a:xfrm>
-            <a:off x="5257800" y="2148840"/>
-            <a:ext cx="1874519" cy="658368"/>
+            <a:off x="411480" y="4617720"/>
+            <a:ext cx="1920240" cy="658368"/>
           </a:xfrm>
           <a:prstGeom prst="roundRect">
             <a:avLst>
@@ -5735,7 +8043,7 @@
                 </a:solidFill>
                 <a:latin typeface="Inter"/>
               </a:rPr>
-              <a:t>Validator</a:t>
+              <a:t>Backlog review</a:t>
             </a:r>
           </a:p>
           <a:p>
@@ -5747,21 +8055,21 @@
                 </a:solidFill>
                 <a:latin typeface="Inter"/>
               </a:rPr>
-              <a:t>schema + facts</a:t>
-            </a:r>
-          </a:p>
-        </p:txBody>
-      </p:sp>
-      <p:sp>
-        <p:nvSpPr>
-          <p:cNvPr id="9" name="Node: Canonical state"/>
+              <a:t>before each handover</a:t>
+            </a:r>
+          </a:p>
+        </p:txBody>
+      </p:sp>
+      <p:sp>
+        <p:nvSpPr>
+          <p:cNvPr id="14" name="Node: Observed history"/>
           <p:cNvSpPr/>
           <p:nvPr/>
         </p:nvSpPr>
         <p:spPr>
           <a:xfrm>
-            <a:off x="5029200" y="3337560"/>
-            <a:ext cx="2331720" cy="868680"/>
+            <a:off x="7543800" y="4617720"/>
+            <a:ext cx="1920240" cy="658368"/>
           </a:xfrm>
           <a:prstGeom prst="roundRect">
             <a:avLst>
@@ -5804,7 +8112,7 @@
                 </a:solidFill>
                 <a:latin typeface="Inter"/>
               </a:rPr>
-              <a:t>Canonical state</a:t>
+              <a:t>Observed history</a:t>
             </a:r>
           </a:p>
           <a:p>
@@ -5816,90 +8124,21 @@
                 </a:solidFill>
                 <a:latin typeface="Inter"/>
               </a:rPr>
-              <a:t>persistent store, audit trail</a:t>
-            </a:r>
-          </a:p>
-        </p:txBody>
-      </p:sp>
-      <p:sp>
-        <p:nvSpPr>
-          <p:cNvPr id="10" name="Node: Central command"/>
+              <a:t>evidence for every ranking</a:t>
+            </a:r>
+          </a:p>
+        </p:txBody>
+      </p:sp>
+      <p:sp>
+        <p:nvSpPr>
+          <p:cNvPr id="15" name="Node: Wall screens"/>
           <p:cNvSpPr/>
           <p:nvPr/>
         </p:nvSpPr>
         <p:spPr>
           <a:xfrm>
-            <a:off x="8229600" y="2148840"/>
-            <a:ext cx="2331720" cy="658368"/>
-          </a:xfrm>
-          <a:prstGeom prst="roundRect">
-            <a:avLst>
-              <a:gd name="adj" fmla="val 18000"/>
-            </a:avLst>
-          </a:prstGeom>
-          <a:solidFill>
-            <a:srgbClr val="FFFFFF"/>
-          </a:solidFill>
-          <a:ln w="19050">
-            <a:solidFill>
-              <a:srgbClr val="D98A1C"/>
-            </a:solidFill>
-          </a:ln>
-          <a:effectLst/>
-        </p:spPr>
-        <p:style>
-          <a:lnRef idx="1">
-            <a:schemeClr val="accent1"/>
-          </a:lnRef>
-          <a:fillRef idx="3">
-            <a:schemeClr val="accent1"/>
-          </a:fillRef>
-          <a:effectRef idx="2">
-            <a:schemeClr val="accent1"/>
-          </a:effectRef>
-          <a:fontRef idx="minor">
-            <a:schemeClr val="lt1"/>
-          </a:fontRef>
-        </p:style>
-        <p:txBody>
-          <a:bodyPr rtlCol="0" anchor="ctr" wrap="square" lIns="54864" rIns="54864" tIns="18288" bIns="18288"/>
-          <a:lstStyle/>
-          <a:p>
-            <a:pPr algn="ctr"/>
-            <a:r>
-              <a:rPr sz="1300" b="1">
-                <a:solidFill>
-                  <a:srgbClr val="1F2937"/>
-                </a:solidFill>
-                <a:latin typeface="Inter"/>
-              </a:rPr>
-              <a:t>Central command</a:t>
-            </a:r>
-          </a:p>
-          <a:p>
-            <a:pPr algn="ctr"/>
-            <a:r>
-              <a:rPr sz="950" b="0">
-                <a:solidFill>
-                  <a:srgbClr val="5B6474"/>
-                </a:solidFill>
-                <a:latin typeface="Inter"/>
-              </a:rPr>
-              <a:t>override pending dispatch</a:t>
-            </a:r>
-          </a:p>
-        </p:txBody>
-      </p:sp>
-      <p:sp>
-        <p:nvSpPr>
-          <p:cNvPr id="11" name="Node: Live Floor &amp; Analytics"/>
-          <p:cNvSpPr/>
-          <p:nvPr/>
-        </p:nvSpPr>
-        <p:spPr>
-          <a:xfrm>
-            <a:off x="8229600" y="3465576"/>
-            <a:ext cx="2331720" cy="658368"/>
+            <a:off x="7543800" y="5852160"/>
+            <a:ext cx="1920240" cy="658368"/>
           </a:xfrm>
           <a:prstGeom prst="roundRect">
             <a:avLst>
@@ -5942,7 +8181,7 @@
                 </a:solidFill>
                 <a:latin typeface="Inter"/>
               </a:rPr>
-              <a:t>Live Floor &amp; Analytics</a:t>
+              <a:t>Wall screens</a:t>
             </a:r>
           </a:p>
           <a:p>
@@ -5954,438 +8193,24 @@
                 </a:solidFill>
                 <a:latin typeface="Inter"/>
               </a:rPr>
-              <a:t>UI, fixed snapshots</a:t>
-            </a:r>
-          </a:p>
-        </p:txBody>
-      </p:sp>
-      <p:sp>
-        <p:nvSpPr>
-          <p:cNvPr id="12" name="Node: Resolution engine"/>
-          <p:cNvSpPr/>
-          <p:nvPr/>
-        </p:nvSpPr>
-        <p:spPr>
-          <a:xfrm>
-            <a:off x="8229600" y="4754880"/>
-            <a:ext cx="2331720" cy="658368"/>
-          </a:xfrm>
-          <a:prstGeom prst="roundRect">
-            <a:avLst>
-              <a:gd name="adj" fmla="val 18000"/>
-            </a:avLst>
-          </a:prstGeom>
-          <a:solidFill>
-            <a:srgbClr val="FFFFFF"/>
-          </a:solidFill>
-          <a:ln w="19050">
-            <a:solidFill>
-              <a:srgbClr val="16213E"/>
-            </a:solidFill>
-          </a:ln>
-          <a:effectLst/>
-        </p:spPr>
-        <p:style>
-          <a:lnRef idx="1">
-            <a:schemeClr val="accent1"/>
-          </a:lnRef>
-          <a:fillRef idx="3">
-            <a:schemeClr val="accent1"/>
-          </a:fillRef>
-          <a:effectRef idx="2">
-            <a:schemeClr val="accent1"/>
-          </a:effectRef>
-          <a:fontRef idx="minor">
-            <a:schemeClr val="lt1"/>
-          </a:fontRef>
-        </p:style>
-        <p:txBody>
-          <a:bodyPr rtlCol="0" anchor="ctr" wrap="square" lIns="54864" rIns="54864" tIns="18288" bIns="18288"/>
-          <a:lstStyle/>
-          <a:p>
-            <a:pPr algn="ctr"/>
-            <a:r>
-              <a:rPr sz="1300" b="1">
-                <a:solidFill>
-                  <a:srgbClr val="16213E"/>
-                </a:solidFill>
-                <a:latin typeface="Inter"/>
-              </a:rPr>
-              <a:t>Resolution engine</a:t>
-            </a:r>
-          </a:p>
-          <a:p>
-            <a:pPr algn="ctr"/>
-            <a:r>
-              <a:rPr sz="950" b="0">
-                <a:solidFill>
-                  <a:srgbClr val="5B6474"/>
-                </a:solidFill>
-                <a:latin typeface="Inter"/>
-              </a:rPr>
-              <a:t>hidden skill → outcome</a:t>
-            </a:r>
-          </a:p>
-        </p:txBody>
-      </p:sp>
-      <p:sp>
-        <p:nvSpPr>
-          <p:cNvPr id="13" name="Node: Context engine"/>
-          <p:cNvSpPr/>
-          <p:nvPr/>
-        </p:nvSpPr>
-        <p:spPr>
-          <a:xfrm>
-            <a:off x="5257800" y="4754880"/>
-            <a:ext cx="1874519" cy="658368"/>
-          </a:xfrm>
-          <a:prstGeom prst="roundRect">
-            <a:avLst>
-              <a:gd name="adj" fmla="val 18000"/>
-            </a:avLst>
-          </a:prstGeom>
-          <a:solidFill>
-            <a:srgbClr val="FFFFFF"/>
-          </a:solidFill>
-          <a:ln w="19050">
-            <a:solidFill>
-              <a:srgbClr val="16213E"/>
-            </a:solidFill>
-          </a:ln>
-          <a:effectLst/>
-        </p:spPr>
-        <p:style>
-          <a:lnRef idx="1">
-            <a:schemeClr val="accent1"/>
-          </a:lnRef>
-          <a:fillRef idx="3">
-            <a:schemeClr val="accent1"/>
-          </a:fillRef>
-          <a:effectRef idx="2">
-            <a:schemeClr val="accent1"/>
-          </a:effectRef>
-          <a:fontRef idx="minor">
-            <a:schemeClr val="lt1"/>
-          </a:fontRef>
-        </p:style>
-        <p:txBody>
-          <a:bodyPr rtlCol="0" anchor="ctr" wrap="square" lIns="54864" rIns="54864" tIns="18288" bIns="18288"/>
-          <a:lstStyle/>
-          <a:p>
-            <a:pPr algn="ctr"/>
-            <a:r>
-              <a:rPr sz="1300" b="1">
-                <a:solidFill>
-                  <a:srgbClr val="16213E"/>
-                </a:solidFill>
-                <a:latin typeface="Inter"/>
-              </a:rPr>
-              <a:t>Context engine</a:t>
-            </a:r>
-          </a:p>
-          <a:p>
-            <a:pPr algn="ctr"/>
-            <a:r>
-              <a:rPr sz="950" b="0">
-                <a:solidFill>
-                  <a:srgbClr val="5B6474"/>
-                </a:solidFill>
-                <a:latin typeface="Inter"/>
-              </a:rPr>
-              <a:t>eligibility, travel, history</a:t>
-            </a:r>
-          </a:p>
-        </p:txBody>
-      </p:sp>
-      <p:sp>
-        <p:nvSpPr>
-          <p:cNvPr id="14" name="Node: Compass"/>
-          <p:cNvSpPr/>
-          <p:nvPr/>
-        </p:nvSpPr>
-        <p:spPr>
-          <a:xfrm>
-            <a:off x="2834640" y="4434840"/>
-            <a:ext cx="1874519" cy="658368"/>
-          </a:xfrm>
-          <a:prstGeom prst="roundRect">
-            <a:avLst>
-              <a:gd name="adj" fmla="val 18000"/>
-            </a:avLst>
-          </a:prstGeom>
-          <a:solidFill>
-            <a:srgbClr val="0F8B8D"/>
-          </a:solidFill>
-          <a:ln w="19050">
-            <a:solidFill>
-              <a:srgbClr val="0F8B8D"/>
-            </a:solidFill>
-          </a:ln>
-          <a:effectLst/>
-        </p:spPr>
-        <p:style>
-          <a:lnRef idx="1">
-            <a:schemeClr val="accent1"/>
-          </a:lnRef>
-          <a:fillRef idx="3">
-            <a:schemeClr val="accent1"/>
-          </a:fillRef>
-          <a:effectRef idx="2">
-            <a:schemeClr val="accent1"/>
-          </a:effectRef>
-          <a:fontRef idx="minor">
-            <a:schemeClr val="lt1"/>
-          </a:fontRef>
-        </p:style>
-        <p:txBody>
-          <a:bodyPr rtlCol="0" anchor="ctr" wrap="square" lIns="54864" rIns="54864" tIns="18288" bIns="18288"/>
-          <a:lstStyle/>
-          <a:p>
-            <a:pPr algn="ctr"/>
-            <a:r>
-              <a:rPr sz="1300" b="1">
-                <a:solidFill>
-                  <a:srgbClr val="FFFFFF"/>
-                </a:solidFill>
-                <a:latin typeface="Inter"/>
-              </a:rPr>
-              <a:t>Compass</a:t>
-            </a:r>
-          </a:p>
-          <a:p>
-            <a:pPr algn="ctr"/>
-            <a:r>
-              <a:rPr sz="950" b="0">
-                <a:solidFill>
-                  <a:srgbClr val="E6FFFF"/>
-                </a:solidFill>
-                <a:latin typeface="Inter"/>
-              </a:rPr>
-              <a:t>AMD Token Factory: ranks</a:t>
-            </a:r>
-          </a:p>
-        </p:txBody>
-      </p:sp>
-      <p:sp>
-        <p:nvSpPr>
-          <p:cNvPr id="15" name="Node: Baselines"/>
-          <p:cNvSpPr/>
-          <p:nvPr/>
-        </p:nvSpPr>
-        <p:spPr>
-          <a:xfrm>
-            <a:off x="2834640" y="5486400"/>
-            <a:ext cx="1874519" cy="658368"/>
-          </a:xfrm>
-          <a:prstGeom prst="roundRect">
-            <a:avLst>
-              <a:gd name="adj" fmla="val 18000"/>
-            </a:avLst>
-          </a:prstGeom>
-          <a:solidFill>
-            <a:srgbClr val="FFFFFF"/>
-          </a:solidFill>
-          <a:ln w="19050">
-            <a:solidFill>
-              <a:srgbClr val="16213E"/>
-            </a:solidFill>
-          </a:ln>
-          <a:effectLst/>
-        </p:spPr>
-        <p:style>
-          <a:lnRef idx="1">
-            <a:schemeClr val="accent1"/>
-          </a:lnRef>
-          <a:fillRef idx="3">
-            <a:schemeClr val="accent1"/>
-          </a:fillRef>
-          <a:effectRef idx="2">
-            <a:schemeClr val="accent1"/>
-          </a:effectRef>
-          <a:fontRef idx="minor">
-            <a:schemeClr val="lt1"/>
-          </a:fontRef>
-        </p:style>
-        <p:txBody>
-          <a:bodyPr rtlCol="0" anchor="ctr" wrap="square" lIns="54864" rIns="54864" tIns="18288" bIns="18288"/>
-          <a:lstStyle/>
-          <a:p>
-            <a:pPr algn="ctr"/>
-            <a:r>
-              <a:rPr sz="1300" b="1">
-                <a:solidFill>
-                  <a:srgbClr val="16213E"/>
-                </a:solidFill>
-                <a:latin typeface="Inter"/>
-              </a:rPr>
-              <a:t>Baselines</a:t>
-            </a:r>
-          </a:p>
-          <a:p>
-            <a:pPr algn="ctr"/>
-            <a:r>
-              <a:rPr sz="950" b="0">
-                <a:solidFill>
-                  <a:srgbClr val="5B6474"/>
-                </a:solidFill>
-                <a:latin typeface="Inter"/>
-              </a:rPr>
-              <a:t>nearest + naive score</a:t>
-            </a:r>
-          </a:p>
-        </p:txBody>
-      </p:sp>
-      <p:sp>
-        <p:nvSpPr>
-          <p:cNvPr id="16" name="Node: Dispatch"/>
-          <p:cNvSpPr/>
-          <p:nvPr/>
-        </p:nvSpPr>
-        <p:spPr>
-          <a:xfrm>
-            <a:off x="411480" y="4937760"/>
-            <a:ext cx="1874519" cy="658368"/>
-          </a:xfrm>
-          <a:prstGeom prst="roundRect">
-            <a:avLst>
-              <a:gd name="adj" fmla="val 18000"/>
-            </a:avLst>
-          </a:prstGeom>
-          <a:solidFill>
-            <a:srgbClr val="FFFFFF"/>
-          </a:solidFill>
-          <a:ln w="19050">
-            <a:solidFill>
-              <a:srgbClr val="16213E"/>
-            </a:solidFill>
-          </a:ln>
-          <a:effectLst/>
-        </p:spPr>
-        <p:style>
-          <a:lnRef idx="1">
-            <a:schemeClr val="accent1"/>
-          </a:lnRef>
-          <a:fillRef idx="3">
-            <a:schemeClr val="accent1"/>
-          </a:fillRef>
-          <a:effectRef idx="2">
-            <a:schemeClr val="accent1"/>
-          </a:effectRef>
-          <a:fontRef idx="minor">
-            <a:schemeClr val="lt1"/>
-          </a:fontRef>
-        </p:style>
-        <p:txBody>
-          <a:bodyPr rtlCol="0" anchor="ctr" wrap="square" lIns="54864" rIns="54864" tIns="18288" bIns="18288"/>
-          <a:lstStyle/>
-          <a:p>
-            <a:pPr algn="ctr"/>
-            <a:r>
-              <a:rPr sz="1300" b="1">
-                <a:solidFill>
-                  <a:srgbClr val="16213E"/>
-                </a:solidFill>
-                <a:latin typeface="Inter"/>
-              </a:rPr>
-              <a:t>Dispatch</a:t>
-            </a:r>
-          </a:p>
-          <a:p>
-            <a:pPr algn="ctr"/>
-            <a:r>
-              <a:rPr sz="950" b="0">
-                <a:solidFill>
-                  <a:srgbClr val="5B6474"/>
-                </a:solidFill>
-                <a:latin typeface="Inter"/>
-              </a:rPr>
-              <a:t>ranked offer queue</a:t>
-            </a:r>
-          </a:p>
-        </p:txBody>
-      </p:sp>
-      <p:sp>
-        <p:nvSpPr>
-          <p:cNvPr id="17" name="Node: Responders"/>
-          <p:cNvSpPr/>
-          <p:nvPr/>
-        </p:nvSpPr>
-        <p:spPr>
-          <a:xfrm>
-            <a:off x="411480" y="3840480"/>
-            <a:ext cx="1874519" cy="658368"/>
-          </a:xfrm>
-          <a:prstGeom prst="roundRect">
-            <a:avLst>
-              <a:gd name="adj" fmla="val 18000"/>
-            </a:avLst>
-          </a:prstGeom>
-          <a:solidFill>
-            <a:srgbClr val="FFFFFF"/>
-          </a:solidFill>
-          <a:ln w="19050">
-            <a:solidFill>
-              <a:srgbClr val="D98A1C"/>
-            </a:solidFill>
-          </a:ln>
-          <a:effectLst/>
-        </p:spPr>
-        <p:style>
-          <a:lnRef idx="1">
-            <a:schemeClr val="accent1"/>
-          </a:lnRef>
-          <a:fillRef idx="3">
-            <a:schemeClr val="accent1"/>
-          </a:fillRef>
-          <a:effectRef idx="2">
-            <a:schemeClr val="accent1"/>
-          </a:effectRef>
-          <a:fontRef idx="minor">
-            <a:schemeClr val="lt1"/>
-          </a:fontRef>
-        </p:style>
-        <p:txBody>
-          <a:bodyPr rtlCol="0" anchor="ctr" wrap="square" lIns="54864" rIns="54864" tIns="18288" bIns="18288"/>
-          <a:lstStyle/>
-          <a:p>
-            <a:pPr algn="ctr"/>
-            <a:r>
-              <a:rPr sz="1300" b="1">
-                <a:solidFill>
-                  <a:srgbClr val="1F2937"/>
-                </a:solidFill>
-                <a:latin typeface="Inter"/>
-              </a:rPr>
-              <a:t>Responders</a:t>
-            </a:r>
-          </a:p>
-          <a:p>
-            <a:pPr algn="ctr"/>
-            <a:r>
-              <a:rPr sz="950" b="0">
-                <a:solidFill>
-                  <a:srgbClr val="5B6474"/>
-                </a:solidFill>
-                <a:latin typeface="Inter"/>
-              </a:rPr>
-              <a:t>accept or reject</a:t>
+              <a:t>floor, issues, feed, Pareto</a:t>
             </a:r>
           </a:p>
         </p:txBody>
       </p:sp>
       <p:cxnSp>
         <p:nvCxnSpPr>
-          <p:cNvPr id="18" name="Arrow: Simulation clock to Scheduler"/>
+          <p:cNvPr id="16" name="Arrow: Issue raised to Rank responders"/>
           <p:cNvCxnSpPr>
-            <a:stCxn id="4" idx="2"/>
-            <a:endCxn id="5" idx="0"/>
+            <a:stCxn id="4" idx="3"/>
+            <a:endCxn id="5" idx="1"/>
           </p:cNvCxnSpPr>
           <p:nvPr/>
         </p:nvCxnSpPr>
         <p:spPr>
-          <a:xfrm flipH="1">
-            <a:off x="1348739" y="2258568"/>
-            <a:ext cx="0" cy="438912"/>
+          <a:xfrm flipV="1">
+            <a:off x="2331720" y="2112264"/>
+            <a:ext cx="457200" cy="0"/>
           </a:xfrm>
           <a:prstGeom prst="line">
             <a:avLst/>
@@ -6414,7 +8239,7 @@
       </p:cxnSp>
       <p:cxnSp>
         <p:nvCxnSpPr>
-          <p:cNvPr id="19" name="Arrow: Scheduler to Event planner"/>
+          <p:cNvPr id="17" name="Arrow: Rank responders to Offer sent"/>
           <p:cNvCxnSpPr>
             <a:stCxn id="5" idx="3"/>
             <a:endCxn id="6" idx="1"/>
@@ -6423,8 +8248,8 @@
         </p:nvCxnSpPr>
         <p:spPr>
           <a:xfrm flipV="1">
-            <a:off x="2285999" y="1929384"/>
-            <a:ext cx="548641" cy="1097280"/>
+            <a:off x="4709160" y="2112264"/>
+            <a:ext cx="457200" cy="0"/>
           </a:xfrm>
           <a:prstGeom prst="line">
             <a:avLst/>
@@ -6453,17 +8278,17 @@
       </p:cxnSp>
       <p:cxnSp>
         <p:nvCxnSpPr>
-          <p:cNvPr id="20" name="Arrow: Scheduler to Fallback planner"/>
+          <p:cNvPr id="18" name="Arrow: Offer sent to Responder"/>
           <p:cNvCxnSpPr>
-            <a:stCxn id="5" idx="3"/>
+            <a:stCxn id="6" idx="3"/>
             <a:endCxn id="7" idx="1"/>
           </p:cNvCxnSpPr>
           <p:nvPr/>
         </p:nvCxnSpPr>
         <p:spPr>
           <a:xfrm flipV="1">
-            <a:off x="2285999" y="3026664"/>
-            <a:ext cx="548641" cy="0"/>
+            <a:off x="7086600" y="2112264"/>
+            <a:ext cx="457200" cy="0"/>
           </a:xfrm>
           <a:prstGeom prst="line">
             <a:avLst/>
@@ -6492,17 +8317,17 @@
       </p:cxnSp>
       <p:cxnSp>
         <p:nvCxnSpPr>
-          <p:cNvPr id="21" name="Arrow: Event planner to Validator"/>
+          <p:cNvPr id="19" name="Arrow: Responder to Rank fixes"/>
           <p:cNvCxnSpPr>
-            <a:stCxn id="6" idx="3"/>
+            <a:stCxn id="7" idx="3"/>
             <a:endCxn id="8" idx="1"/>
           </p:cNvCxnSpPr>
           <p:nvPr/>
         </p:nvCxnSpPr>
         <p:spPr>
-          <a:xfrm>
-            <a:off x="4709159" y="1929384"/>
-            <a:ext cx="548641" cy="548640"/>
+          <a:xfrm flipV="1">
+            <a:off x="9464040" y="2112264"/>
+            <a:ext cx="457200" cy="0"/>
           </a:xfrm>
           <a:prstGeom prst="line">
             <a:avLst/>
@@ -6531,17 +8356,17 @@
       </p:cxnSp>
       <p:cxnSp>
         <p:nvCxnSpPr>
-          <p:cNvPr id="22" name="Arrow: Fallback planner to Validator"/>
+          <p:cNvPr id="20" name="Arrow: Rank fixes to Repair attempt"/>
           <p:cNvCxnSpPr>
-            <a:stCxn id="7" idx="3"/>
-            <a:endCxn id="8" idx="1"/>
+            <a:stCxn id="8" idx="2"/>
+            <a:endCxn id="12" idx="0"/>
           </p:cNvCxnSpPr>
           <p:nvPr/>
         </p:nvCxnSpPr>
         <p:spPr>
-          <a:xfrm flipV="1">
-            <a:off x="4709159" y="2478024"/>
-            <a:ext cx="548641" cy="548640"/>
+          <a:xfrm flipH="1">
+            <a:off x="10881360" y="2441448"/>
+            <a:ext cx="0" cy="758952"/>
           </a:xfrm>
           <a:prstGeom prst="line">
             <a:avLst/>
@@ -6570,17 +8395,17 @@
       </p:cxnSp>
       <p:cxnSp>
         <p:nvCxnSpPr>
-          <p:cNvPr id="23" name="Arrow: Validator to Canonical state"/>
+          <p:cNvPr id="21" name="Arrow: Repair attempt to Observed history"/>
           <p:cNvCxnSpPr>
-            <a:stCxn id="8" idx="2"/>
-            <a:endCxn id="9" idx="0"/>
+            <a:stCxn id="12" idx="1"/>
+            <a:endCxn id="14" idx="3"/>
           </p:cNvCxnSpPr>
           <p:nvPr/>
         </p:nvCxnSpPr>
         <p:spPr>
-          <a:xfrm>
-            <a:off x="6195059" y="2807208"/>
-            <a:ext cx="1" cy="530352"/>
+          <a:xfrm flipH="1">
+            <a:off x="9464040" y="3529584"/>
+            <a:ext cx="457200" cy="1417320"/>
           </a:xfrm>
           <a:prstGeom prst="line">
             <a:avLst/>
@@ -6609,17 +8434,17 @@
       </p:cxnSp>
       <p:cxnSp>
         <p:nvCxnSpPr>
-          <p:cNvPr id="24" name="Arrow: Central command to Canonical state"/>
+          <p:cNvPr id="22" name="Arrow: Observed history to Rank responders"/>
           <p:cNvCxnSpPr>
-            <a:stCxn id="10" idx="1"/>
-            <a:endCxn id="9" idx="3"/>
+            <a:stCxn id="14" idx="1"/>
+            <a:endCxn id="5" idx="3"/>
           </p:cNvCxnSpPr>
           <p:nvPr/>
         </p:nvCxnSpPr>
         <p:spPr>
-          <a:xfrm flipH="1">
-            <a:off x="7360920" y="2478024"/>
-            <a:ext cx="868680" cy="1293876"/>
+          <a:xfrm flipH="1" flipV="1">
+            <a:off x="4709160" y="2112264"/>
+            <a:ext cx="2834640" cy="2834640"/>
           </a:xfrm>
           <a:prstGeom prst="line">
             <a:avLst/>
@@ -6648,17 +8473,17 @@
       </p:cxnSp>
       <p:cxnSp>
         <p:nvCxnSpPr>
-          <p:cNvPr id="25" name="Arrow: Canonical state to Live Floor &amp; Analytics"/>
+          <p:cNvPr id="23" name="Arrow: Central command to Offer sent"/>
           <p:cNvCxnSpPr>
-            <a:stCxn id="9" idx="3"/>
-            <a:endCxn id="11" idx="1"/>
+            <a:stCxn id="11" idx="1"/>
+            <a:endCxn id="6" idx="3"/>
           </p:cNvCxnSpPr>
           <p:nvPr/>
         </p:nvCxnSpPr>
         <p:spPr>
-          <a:xfrm>
-            <a:off x="7360920" y="3771900"/>
-            <a:ext cx="868680" cy="22860"/>
+          <a:xfrm flipH="1" flipV="1">
+            <a:off x="7086600" y="2112264"/>
+            <a:ext cx="457200" cy="1417320"/>
           </a:xfrm>
           <a:prstGeom prst="line">
             <a:avLst/>
@@ -6687,17 +8512,17 @@
       </p:cxnSp>
       <p:cxnSp>
         <p:nvCxnSpPr>
-          <p:cNvPr id="26" name="Arrow: Resolution engine to Canonical state"/>
+          <p:cNvPr id="24" name="Arrow: Observed history to Wall screens"/>
           <p:cNvCxnSpPr>
-            <a:stCxn id="12" idx="1"/>
-            <a:endCxn id="9" idx="3"/>
+            <a:stCxn id="14" idx="2"/>
+            <a:endCxn id="15" idx="0"/>
           </p:cNvCxnSpPr>
           <p:nvPr/>
         </p:nvCxnSpPr>
         <p:spPr>
-          <a:xfrm flipH="1" flipV="1">
-            <a:off x="7360920" y="3771900"/>
-            <a:ext cx="868680" cy="1312164"/>
+          <a:xfrm flipH="1">
+            <a:off x="8503920" y="5276088"/>
+            <a:ext cx="0" cy="576072"/>
           </a:xfrm>
           <a:prstGeom prst="line">
             <a:avLst/>
@@ -6726,17 +8551,17 @@
       </p:cxnSp>
       <p:cxnSp>
         <p:nvCxnSpPr>
-          <p:cNvPr id="27" name="Arrow: Canonical state to Context engine"/>
+          <p:cNvPr id="25" name="Arrow: Observed history to Backlog review"/>
           <p:cNvCxnSpPr>
-            <a:stCxn id="9" idx="2"/>
-            <a:endCxn id="13" idx="0"/>
+            <a:stCxn id="14" idx="1"/>
+            <a:endCxn id="13" idx="3"/>
           </p:cNvCxnSpPr>
           <p:nvPr/>
         </p:nvCxnSpPr>
         <p:spPr>
-          <a:xfrm flipH="1">
-            <a:off x="6195059" y="4206240"/>
-            <a:ext cx="1" cy="548640"/>
+          <a:xfrm flipH="1" flipV="1">
+            <a:off x="2331720" y="4946904"/>
+            <a:ext cx="5212080" cy="0"/>
           </a:xfrm>
           <a:prstGeom prst="line">
             <a:avLst/>
@@ -6765,17 +8590,17 @@
       </p:cxnSp>
       <p:cxnSp>
         <p:nvCxnSpPr>
-          <p:cNvPr id="28" name="Arrow: Context engine to Compass"/>
+          <p:cNvPr id="26" name="Arrow: Backlog review to Rank overtime"/>
           <p:cNvCxnSpPr>
-            <a:stCxn id="13" idx="1"/>
-            <a:endCxn id="14" idx="3"/>
+            <a:stCxn id="13" idx="0"/>
+            <a:endCxn id="9" idx="2"/>
           </p:cNvCxnSpPr>
           <p:nvPr/>
         </p:nvCxnSpPr>
         <p:spPr>
           <a:xfrm flipH="1" flipV="1">
-            <a:off x="4709159" y="4764024"/>
-            <a:ext cx="548641" cy="320040"/>
+            <a:off x="1371600" y="3858768"/>
+            <a:ext cx="0" cy="758952"/>
           </a:xfrm>
           <a:prstGeom prst="line">
             <a:avLst/>
@@ -6804,17 +8629,17 @@
       </p:cxnSp>
       <p:cxnSp>
         <p:nvCxnSpPr>
-          <p:cNvPr id="29" name="Arrow: Context engine to Baselines"/>
+          <p:cNvPr id="27" name="Arrow: Rank overtime to Central command"/>
           <p:cNvCxnSpPr>
-            <a:stCxn id="13" idx="1"/>
-            <a:endCxn id="15" idx="3"/>
+            <a:stCxn id="9" idx="3"/>
+            <a:endCxn id="10" idx="1"/>
           </p:cNvCxnSpPr>
           <p:nvPr/>
         </p:nvCxnSpPr>
         <p:spPr>
-          <a:xfrm flipH="1">
-            <a:off x="4709159" y="5084064"/>
-            <a:ext cx="548641" cy="731520"/>
+          <a:xfrm flipV="1">
+            <a:off x="2331720" y="3529584"/>
+            <a:ext cx="457200" cy="0"/>
           </a:xfrm>
           <a:prstGeom prst="line">
             <a:avLst/>
@@ -6843,17 +8668,17 @@
       </p:cxnSp>
       <p:cxnSp>
         <p:nvCxnSpPr>
-          <p:cNvPr id="30" name="Arrow: Compass to Dispatch"/>
+          <p:cNvPr id="28" name="Arrow: Central command to Rank responders"/>
           <p:cNvCxnSpPr>
-            <a:stCxn id="14" idx="1"/>
-            <a:endCxn id="16" idx="3"/>
+            <a:stCxn id="10" idx="0"/>
+            <a:endCxn id="5" idx="2"/>
           </p:cNvCxnSpPr>
           <p:nvPr/>
         </p:nvCxnSpPr>
         <p:spPr>
-          <a:xfrm flipH="1">
-            <a:off x="2285999" y="4764024"/>
-            <a:ext cx="548641" cy="502920"/>
+          <a:xfrm flipH="1" flipV="1">
+            <a:off x="3749040" y="2441448"/>
+            <a:ext cx="0" cy="758952"/>
           </a:xfrm>
           <a:prstGeom prst="line">
             <a:avLst/>
@@ -6880,132 +8705,15 @@
           </a:fontRef>
         </p:style>
       </p:cxnSp>
-      <p:cxnSp>
-        <p:nvCxnSpPr>
-          <p:cNvPr id="31" name="Arrow: Baselines to Dispatch"/>
-          <p:cNvCxnSpPr>
-            <a:stCxn id="15" idx="1"/>
-            <a:endCxn id="16" idx="3"/>
-          </p:cNvCxnSpPr>
-          <p:nvPr/>
-        </p:nvCxnSpPr>
-        <p:spPr>
-          <a:xfrm flipH="1" flipV="1">
-            <a:off x="2285999" y="5266944"/>
-            <a:ext cx="548641" cy="548640"/>
-          </a:xfrm>
-          <a:prstGeom prst="line">
-            <a:avLst/>
-          </a:prstGeom>
-          <a:ln w="19050">
-            <a:solidFill>
-              <a:srgbClr val="5B6474"/>
-            </a:solidFill>
-            <a:tailEnd type="triangle" w="med" len="med"/>
-          </a:ln>
-        </p:spPr>
-        <p:style>
-          <a:lnRef idx="2">
-            <a:schemeClr val="accent1"/>
-          </a:lnRef>
-          <a:fillRef idx="0">
-            <a:schemeClr val="accent1"/>
-          </a:fillRef>
-          <a:effectRef idx="1">
-            <a:schemeClr val="accent1"/>
-          </a:effectRef>
-          <a:fontRef idx="minor">
-            <a:schemeClr val="tx1"/>
-          </a:fontRef>
-        </p:style>
-      </p:cxnSp>
-      <p:cxnSp>
-        <p:nvCxnSpPr>
-          <p:cNvPr id="32" name="Arrow: Dispatch to Responders"/>
-          <p:cNvCxnSpPr>
-            <a:stCxn id="16" idx="0"/>
-            <a:endCxn id="17" idx="2"/>
-          </p:cNvCxnSpPr>
-          <p:nvPr/>
-        </p:nvCxnSpPr>
-        <p:spPr>
-          <a:xfrm flipH="1" flipV="1">
-            <a:off x="1348739" y="4498848"/>
-            <a:ext cx="0" cy="438912"/>
-          </a:xfrm>
-          <a:prstGeom prst="line">
-            <a:avLst/>
-          </a:prstGeom>
-          <a:ln w="19050">
-            <a:solidFill>
-              <a:srgbClr val="5B6474"/>
-            </a:solidFill>
-            <a:tailEnd type="triangle" w="med" len="med"/>
-          </a:ln>
-        </p:spPr>
-        <p:style>
-          <a:lnRef idx="2">
-            <a:schemeClr val="accent1"/>
-          </a:lnRef>
-          <a:fillRef idx="0">
-            <a:schemeClr val="accent1"/>
-          </a:fillRef>
-          <a:effectRef idx="1">
-            <a:schemeClr val="accent1"/>
-          </a:effectRef>
-          <a:fontRef idx="minor">
-            <a:schemeClr val="tx1"/>
-          </a:fontRef>
-        </p:style>
-      </p:cxnSp>
-      <p:cxnSp>
-        <p:nvCxnSpPr>
-          <p:cNvPr id="33" name="Arrow: Responders to Canonical state"/>
-          <p:cNvCxnSpPr>
-            <a:stCxn id="17" idx="3"/>
-            <a:endCxn id="9" idx="1"/>
-          </p:cNvCxnSpPr>
-          <p:nvPr/>
-        </p:nvCxnSpPr>
-        <p:spPr>
-          <a:xfrm flipV="1">
-            <a:off x="2285999" y="3771900"/>
-            <a:ext cx="2743201" cy="397764"/>
-          </a:xfrm>
-          <a:prstGeom prst="line">
-            <a:avLst/>
-          </a:prstGeom>
-          <a:ln w="19050">
-            <a:solidFill>
-              <a:srgbClr val="5B6474"/>
-            </a:solidFill>
-            <a:tailEnd type="triangle" w="med" len="med"/>
-          </a:ln>
-        </p:spPr>
-        <p:style>
-          <a:lnRef idx="2">
-            <a:schemeClr val="accent1"/>
-          </a:lnRef>
-          <a:fillRef idx="0">
-            <a:schemeClr val="accent1"/>
-          </a:fillRef>
-          <a:effectRef idx="1">
-            <a:schemeClr val="accent1"/>
-          </a:effectRef>
-          <a:fontRef idx="minor">
-            <a:schemeClr val="tx1"/>
-          </a:fontRef>
-        </p:style>
-      </p:cxnSp>
-      <p:sp>
-        <p:nvSpPr>
-          <p:cNvPr id="34" name="Rounded Rectangle 33"/>
+      <p:sp>
+        <p:nvSpPr>
+          <p:cNvPr id="29" name="Rounded Rectangle 28"/>
           <p:cNvSpPr/>
           <p:nvPr/>
         </p:nvSpPr>
         <p:spPr>
           <a:xfrm>
-            <a:off x="8229600" y="5760720"/>
+            <a:off x="9921240" y="4754880"/>
             <a:ext cx="292608" cy="182880"/>
           </a:xfrm>
           <a:prstGeom prst="roundRect">
@@ -7045,13 +8753,13 @@
       </p:sp>
       <p:sp>
         <p:nvSpPr>
-          <p:cNvPr id="35" name="TextBox 34"/>
+          <p:cNvPr id="30" name="TextBox 29"/>
           <p:cNvSpPr txBox="1"/>
           <p:nvPr/>
         </p:nvSpPr>
         <p:spPr>
           <a:xfrm>
-            <a:off x="8613648" y="5733288"/>
+            <a:off x="10305288" y="4727448"/>
             <a:ext cx="2286000" cy="256032"/>
           </a:xfrm>
           <a:prstGeom prst="rect">
@@ -7080,13 +8788,13 @@
       </p:sp>
       <p:sp>
         <p:nvSpPr>
-          <p:cNvPr id="36" name="Rounded Rectangle 35"/>
+          <p:cNvPr id="31" name="Rounded Rectangle 30"/>
           <p:cNvSpPr/>
           <p:nvPr/>
         </p:nvSpPr>
         <p:spPr>
           <a:xfrm>
-            <a:off x="8229600" y="6035040"/>
+            <a:off x="9921240" y="5029200"/>
             <a:ext cx="292608" cy="182880"/>
           </a:xfrm>
           <a:prstGeom prst="roundRect">
@@ -7126,13 +8834,13 @@
       </p:sp>
       <p:sp>
         <p:nvSpPr>
-          <p:cNvPr id="37" name="TextBox 36"/>
+          <p:cNvPr id="32" name="TextBox 31"/>
           <p:cNvSpPr txBox="1"/>
           <p:nvPr/>
         </p:nvSpPr>
         <p:spPr>
           <a:xfrm>
-            <a:off x="8613648" y="6007607"/>
+            <a:off x="10305288" y="5001768"/>
             <a:ext cx="2286000" cy="256032"/>
           </a:xfrm>
           <a:prstGeom prst="rect">
@@ -7161,13 +8869,13 @@
       </p:sp>
       <p:sp>
         <p:nvSpPr>
-          <p:cNvPr id="38" name="Rounded Rectangle 37"/>
+          <p:cNvPr id="33" name="Rounded Rectangle 32"/>
           <p:cNvSpPr/>
           <p:nvPr/>
         </p:nvSpPr>
         <p:spPr>
           <a:xfrm>
-            <a:off x="8229600" y="6309359"/>
+            <a:off x="9921240" y="5303520"/>
             <a:ext cx="292608" cy="182880"/>
           </a:xfrm>
           <a:prstGeom prst="roundRect">
@@ -7207,13 +8915,13 @@
       </p:sp>
       <p:sp>
         <p:nvSpPr>
-          <p:cNvPr id="39" name="TextBox 38"/>
+          <p:cNvPr id="34" name="TextBox 33"/>
           <p:cNvSpPr txBox="1"/>
           <p:nvPr/>
         </p:nvSpPr>
         <p:spPr>
           <a:xfrm>
-            <a:off x="8613648" y="6281927"/>
+            <a:off x="10305288" y="5276088"/>
             <a:ext cx="2286000" cy="256032"/>
           </a:xfrm>
           <a:prstGeom prst="rect">
@@ -7242,7 +8950,7 @@
       </p:sp>
       <p:sp>
         <p:nvSpPr>
-          <p:cNvPr id="40" name="TextBox 39"/>
+          <p:cNvPr id="35" name="TextBox 34"/>
           <p:cNvSpPr txBox="1"/>
           <p:nvPr/>
         </p:nvSpPr>
@@ -7331,7 +9039,7 @@
                 </a:solidFill>
                 <a:latin typeface="Inter"/>
               </a:rPr>
-              <a:t>Honest by design</a:t>
+              <a:t>Code owns the facts. Models only rank.</a:t>
             </a:r>
           </a:p>
         </p:txBody>
@@ -7344,8 +9052,8 @@
         </p:nvSpPr>
         <p:spPr>
           <a:xfrm>
-            <a:off x="548640" y="1463040"/>
-            <a:ext cx="11064240" cy="4754880"/>
+            <a:off x="548640" y="1051560"/>
+            <a:ext cx="11064240" cy="457200"/>
           </a:xfrm>
           <a:prstGeom prst="rect">
             <a:avLst/>
@@ -7353,158 +9061,1860 @@
           <a:noFill/>
         </p:spPr>
         <p:txBody>
-          <a:bodyPr wrap="square">
+          <a:bodyPr wrap="square" lIns="0" rIns="0" tIns="0" bIns="0">
             <a:spAutoFit/>
           </a:bodyPr>
           <a:lstStyle/>
           <a:p>
-            <a:pPr>
-              <a:spcAft>
-                <a:spcPts val="1680"/>
-              </a:spcAft>
-            </a:pPr>
-            <a:r>
-              <a:rPr sz="2100" b="1">
-                <a:solidFill>
-                  <a:srgbClr val="0F8B8D"/>
-                </a:solidFill>
-                <a:latin typeface="Inter"/>
-              </a:rPr>
-              <a:t>▸  </a:t>
-            </a:r>
-            <a:r>
-              <a:rPr sz="2100" b="0">
+            <a:pPr algn="l"/>
+            <a:r>
+              <a:rPr sz="1600" b="0">
+                <a:solidFill>
+                  <a:srgbClr val="5B6474"/>
+                </a:solidFill>
+                <a:latin typeface="Inter"/>
+              </a:rPr>
+              <a:t>Application code owns time, facts, eligibility, baselines and every mutation; models only propose.</a:t>
+            </a:r>
+          </a:p>
+        </p:txBody>
+      </p:sp>
+      <p:sp>
+        <p:nvSpPr>
+          <p:cNvPr id="4" name="Node: Simulation clock"/>
+          <p:cNvSpPr/>
+          <p:nvPr/>
+        </p:nvSpPr>
+        <p:spPr>
+          <a:xfrm>
+            <a:off x="411480" y="1600200"/>
+            <a:ext cx="1874519" cy="658368"/>
+          </a:xfrm>
+          <a:prstGeom prst="roundRect">
+            <a:avLst>
+              <a:gd name="adj" fmla="val 18000"/>
+            </a:avLst>
+          </a:prstGeom>
+          <a:solidFill>
+            <a:srgbClr val="FFFFFF"/>
+          </a:solidFill>
+          <a:ln w="19050">
+            <a:solidFill>
+              <a:srgbClr val="16213E"/>
+            </a:solidFill>
+          </a:ln>
+          <a:effectLst/>
+        </p:spPr>
+        <p:style>
+          <a:lnRef idx="1">
+            <a:schemeClr val="accent1"/>
+          </a:lnRef>
+          <a:fillRef idx="3">
+            <a:schemeClr val="accent1"/>
+          </a:fillRef>
+          <a:effectRef idx="2">
+            <a:schemeClr val="accent1"/>
+          </a:effectRef>
+          <a:fontRef idx="minor">
+            <a:schemeClr val="lt1"/>
+          </a:fontRef>
+        </p:style>
+        <p:txBody>
+          <a:bodyPr rtlCol="0" anchor="ctr" wrap="square" lIns="54864" rIns="54864" tIns="18288" bIns="18288"/>
+          <a:lstStyle/>
+          <a:p>
+            <a:pPr algn="ctr"/>
+            <a:r>
+              <a:rPr sz="1300" b="1">
+                <a:solidFill>
+                  <a:srgbClr val="16213E"/>
+                </a:solidFill>
+                <a:latin typeface="Inter"/>
+              </a:rPr>
+              <a:t>Simulation clock</a:t>
+            </a:r>
+          </a:p>
+          <a:p>
+            <a:pPr algn="ctr"/>
+            <a:r>
+              <a:rPr sz="950" b="0">
+                <a:solidFill>
+                  <a:srgbClr val="5B6474"/>
+                </a:solidFill>
+                <a:latin typeface="Inter"/>
+              </a:rPr>
+              <a:t>persistent, pausable</a:t>
+            </a:r>
+          </a:p>
+        </p:txBody>
+      </p:sp>
+      <p:sp>
+        <p:nvSpPr>
+          <p:cNvPr id="5" name="Node: Scheduler"/>
+          <p:cNvSpPr/>
+          <p:nvPr/>
+        </p:nvSpPr>
+        <p:spPr>
+          <a:xfrm>
+            <a:off x="411480" y="2697480"/>
+            <a:ext cx="1874519" cy="658368"/>
+          </a:xfrm>
+          <a:prstGeom prst="roundRect">
+            <a:avLst>
+              <a:gd name="adj" fmla="val 18000"/>
+            </a:avLst>
+          </a:prstGeom>
+          <a:solidFill>
+            <a:srgbClr val="FFFFFF"/>
+          </a:solidFill>
+          <a:ln w="19050">
+            <a:solidFill>
+              <a:srgbClr val="16213E"/>
+            </a:solidFill>
+          </a:ln>
+          <a:effectLst/>
+        </p:spPr>
+        <p:style>
+          <a:lnRef idx="1">
+            <a:schemeClr val="accent1"/>
+          </a:lnRef>
+          <a:fillRef idx="3">
+            <a:schemeClr val="accent1"/>
+          </a:fillRef>
+          <a:effectRef idx="2">
+            <a:schemeClr val="accent1"/>
+          </a:effectRef>
+          <a:fontRef idx="minor">
+            <a:schemeClr val="lt1"/>
+          </a:fontRef>
+        </p:style>
+        <p:txBody>
+          <a:bodyPr rtlCol="0" anchor="ctr" wrap="square" lIns="54864" rIns="54864" tIns="18288" bIns="18288"/>
+          <a:lstStyle/>
+          <a:p>
+            <a:pPr algn="ctr"/>
+            <a:r>
+              <a:rPr sz="1300" b="1">
+                <a:solidFill>
+                  <a:srgbClr val="16213E"/>
+                </a:solidFill>
+                <a:latin typeface="Inter"/>
+              </a:rPr>
+              <a:t>Scheduler</a:t>
+            </a:r>
+          </a:p>
+          <a:p>
+            <a:pPr algn="ctr"/>
+            <a:r>
+              <a:rPr sz="950" b="0">
+                <a:solidFill>
+                  <a:srgbClr val="5B6474"/>
+                </a:solidFill>
+                <a:latin typeface="Inter"/>
+              </a:rPr>
+              <a:t>one-shot, restart-safe</a:t>
+            </a:r>
+          </a:p>
+        </p:txBody>
+      </p:sp>
+      <p:sp>
+        <p:nvSpPr>
+          <p:cNvPr id="6" name="Node: Event planner"/>
+          <p:cNvSpPr/>
+          <p:nvPr/>
+        </p:nvSpPr>
+        <p:spPr>
+          <a:xfrm>
+            <a:off x="2834640" y="1600200"/>
+            <a:ext cx="1874519" cy="658368"/>
+          </a:xfrm>
+          <a:prstGeom prst="roundRect">
+            <a:avLst>
+              <a:gd name="adj" fmla="val 18000"/>
+            </a:avLst>
+          </a:prstGeom>
+          <a:solidFill>
+            <a:srgbClr val="0F8B8D"/>
+          </a:solidFill>
+          <a:ln w="19050">
+            <a:solidFill>
+              <a:srgbClr val="0F8B8D"/>
+            </a:solidFill>
+          </a:ln>
+          <a:effectLst/>
+        </p:spPr>
+        <p:style>
+          <a:lnRef idx="1">
+            <a:schemeClr val="accent1"/>
+          </a:lnRef>
+          <a:fillRef idx="3">
+            <a:schemeClr val="accent1"/>
+          </a:fillRef>
+          <a:effectRef idx="2">
+            <a:schemeClr val="accent1"/>
+          </a:effectRef>
+          <a:fontRef idx="minor">
+            <a:schemeClr val="lt1"/>
+          </a:fontRef>
+        </p:style>
+        <p:txBody>
+          <a:bodyPr rtlCol="0" anchor="ctr" wrap="square" lIns="54864" rIns="54864" tIns="18288" bIns="18288"/>
+          <a:lstStyle/>
+          <a:p>
+            <a:pPr algn="ctr"/>
+            <a:r>
+              <a:rPr sz="1300" b="1">
+                <a:solidFill>
+                  <a:srgbClr val="FFFFFF"/>
+                </a:solidFill>
+                <a:latin typeface="Inter"/>
+              </a:rPr>
+              <a:t>Event planner</a:t>
+            </a:r>
+          </a:p>
+          <a:p>
+            <a:pPr algn="ctr"/>
+            <a:r>
+              <a:rPr sz="950" b="0">
+                <a:solidFill>
+                  <a:srgbClr val="E6FFFF"/>
+                </a:solidFill>
+                <a:latin typeface="Inter"/>
+              </a:rPr>
+              <a:t>AMD Token Factory</a:t>
+            </a:r>
+          </a:p>
+        </p:txBody>
+      </p:sp>
+      <p:sp>
+        <p:nvSpPr>
+          <p:cNvPr id="7" name="Node: Fallback planner"/>
+          <p:cNvSpPr/>
+          <p:nvPr/>
+        </p:nvSpPr>
+        <p:spPr>
+          <a:xfrm>
+            <a:off x="2834640" y="2697480"/>
+            <a:ext cx="1874519" cy="658368"/>
+          </a:xfrm>
+          <a:prstGeom prst="roundRect">
+            <a:avLst>
+              <a:gd name="adj" fmla="val 18000"/>
+            </a:avLst>
+          </a:prstGeom>
+          <a:solidFill>
+            <a:srgbClr val="FFFFFF"/>
+          </a:solidFill>
+          <a:ln w="19050">
+            <a:solidFill>
+              <a:srgbClr val="16213E"/>
+            </a:solidFill>
+          </a:ln>
+          <a:effectLst/>
+        </p:spPr>
+        <p:style>
+          <a:lnRef idx="1">
+            <a:schemeClr val="accent1"/>
+          </a:lnRef>
+          <a:fillRef idx="3">
+            <a:schemeClr val="accent1"/>
+          </a:fillRef>
+          <a:effectRef idx="2">
+            <a:schemeClr val="accent1"/>
+          </a:effectRef>
+          <a:fontRef idx="minor">
+            <a:schemeClr val="lt1"/>
+          </a:fontRef>
+        </p:style>
+        <p:txBody>
+          <a:bodyPr rtlCol="0" anchor="ctr" wrap="square" lIns="54864" rIns="54864" tIns="18288" bIns="18288"/>
+          <a:lstStyle/>
+          <a:p>
+            <a:pPr algn="ctr"/>
+            <a:r>
+              <a:rPr sz="1300" b="1">
+                <a:solidFill>
+                  <a:srgbClr val="16213E"/>
+                </a:solidFill>
+                <a:latin typeface="Inter"/>
+              </a:rPr>
+              <a:t>Fallback planner</a:t>
+            </a:r>
+          </a:p>
+          <a:p>
+            <a:pPr algn="ctr"/>
+            <a:r>
+              <a:rPr sz="950" b="0">
+                <a:solidFill>
+                  <a:srgbClr val="5B6474"/>
+                </a:solidFill>
+                <a:latin typeface="Inter"/>
+              </a:rPr>
+              <a:t>deterministic, API-free</a:t>
+            </a:r>
+          </a:p>
+        </p:txBody>
+      </p:sp>
+      <p:sp>
+        <p:nvSpPr>
+          <p:cNvPr id="8" name="Node: Validator"/>
+          <p:cNvSpPr/>
+          <p:nvPr/>
+        </p:nvSpPr>
+        <p:spPr>
+          <a:xfrm>
+            <a:off x="5257800" y="2148840"/>
+            <a:ext cx="1874519" cy="658368"/>
+          </a:xfrm>
+          <a:prstGeom prst="roundRect">
+            <a:avLst>
+              <a:gd name="adj" fmla="val 18000"/>
+            </a:avLst>
+          </a:prstGeom>
+          <a:solidFill>
+            <a:srgbClr val="FFFFFF"/>
+          </a:solidFill>
+          <a:ln w="19050">
+            <a:solidFill>
+              <a:srgbClr val="16213E"/>
+            </a:solidFill>
+          </a:ln>
+          <a:effectLst/>
+        </p:spPr>
+        <p:style>
+          <a:lnRef idx="1">
+            <a:schemeClr val="accent1"/>
+          </a:lnRef>
+          <a:fillRef idx="3">
+            <a:schemeClr val="accent1"/>
+          </a:fillRef>
+          <a:effectRef idx="2">
+            <a:schemeClr val="accent1"/>
+          </a:effectRef>
+          <a:fontRef idx="minor">
+            <a:schemeClr val="lt1"/>
+          </a:fontRef>
+        </p:style>
+        <p:txBody>
+          <a:bodyPr rtlCol="0" anchor="ctr" wrap="square" lIns="54864" rIns="54864" tIns="18288" bIns="18288"/>
+          <a:lstStyle/>
+          <a:p>
+            <a:pPr algn="ctr"/>
+            <a:r>
+              <a:rPr sz="1300" b="1">
+                <a:solidFill>
+                  <a:srgbClr val="16213E"/>
+                </a:solidFill>
+                <a:latin typeface="Inter"/>
+              </a:rPr>
+              <a:t>Validator</a:t>
+            </a:r>
+          </a:p>
+          <a:p>
+            <a:pPr algn="ctr"/>
+            <a:r>
+              <a:rPr sz="950" b="0">
+                <a:solidFill>
+                  <a:srgbClr val="5B6474"/>
+                </a:solidFill>
+                <a:latin typeface="Inter"/>
+              </a:rPr>
+              <a:t>schema + facts</a:t>
+            </a:r>
+          </a:p>
+        </p:txBody>
+      </p:sp>
+      <p:sp>
+        <p:nvSpPr>
+          <p:cNvPr id="9" name="Node: Canonical state"/>
+          <p:cNvSpPr/>
+          <p:nvPr/>
+        </p:nvSpPr>
+        <p:spPr>
+          <a:xfrm>
+            <a:off x="5029200" y="3337560"/>
+            <a:ext cx="2331720" cy="868680"/>
+          </a:xfrm>
+          <a:prstGeom prst="roundRect">
+            <a:avLst>
+              <a:gd name="adj" fmla="val 18000"/>
+            </a:avLst>
+          </a:prstGeom>
+          <a:solidFill>
+            <a:srgbClr val="16213E"/>
+          </a:solidFill>
+          <a:ln w="19050">
+            <a:solidFill>
+              <a:srgbClr val="16213E"/>
+            </a:solidFill>
+          </a:ln>
+          <a:effectLst/>
+        </p:spPr>
+        <p:style>
+          <a:lnRef idx="1">
+            <a:schemeClr val="accent1"/>
+          </a:lnRef>
+          <a:fillRef idx="3">
+            <a:schemeClr val="accent1"/>
+          </a:fillRef>
+          <a:effectRef idx="2">
+            <a:schemeClr val="accent1"/>
+          </a:effectRef>
+          <a:fontRef idx="minor">
+            <a:schemeClr val="lt1"/>
+          </a:fontRef>
+        </p:style>
+        <p:txBody>
+          <a:bodyPr rtlCol="0" anchor="ctr" wrap="square" lIns="54864" rIns="54864" tIns="18288" bIns="18288"/>
+          <a:lstStyle/>
+          <a:p>
+            <a:pPr algn="ctr"/>
+            <a:r>
+              <a:rPr sz="1300" b="1">
+                <a:solidFill>
+                  <a:srgbClr val="FFFFFF"/>
+                </a:solidFill>
+                <a:latin typeface="Inter"/>
+              </a:rPr>
+              <a:t>Canonical state</a:t>
+            </a:r>
+          </a:p>
+          <a:p>
+            <a:pPr algn="ctr"/>
+            <a:r>
+              <a:rPr sz="950" b="0">
+                <a:solidFill>
+                  <a:srgbClr val="C9D3EA"/>
+                </a:solidFill>
+                <a:latin typeface="Inter"/>
+              </a:rPr>
+              <a:t>persistent store, audit trail</a:t>
+            </a:r>
+          </a:p>
+        </p:txBody>
+      </p:sp>
+      <p:sp>
+        <p:nvSpPr>
+          <p:cNvPr id="10" name="Node: Central command"/>
+          <p:cNvSpPr/>
+          <p:nvPr/>
+        </p:nvSpPr>
+        <p:spPr>
+          <a:xfrm>
+            <a:off x="8229600" y="2148840"/>
+            <a:ext cx="2331720" cy="658368"/>
+          </a:xfrm>
+          <a:prstGeom prst="roundRect">
+            <a:avLst>
+              <a:gd name="adj" fmla="val 18000"/>
+            </a:avLst>
+          </a:prstGeom>
+          <a:solidFill>
+            <a:srgbClr val="FFFFFF"/>
+          </a:solidFill>
+          <a:ln w="19050">
+            <a:solidFill>
+              <a:srgbClr val="D98A1C"/>
+            </a:solidFill>
+          </a:ln>
+          <a:effectLst/>
+        </p:spPr>
+        <p:style>
+          <a:lnRef idx="1">
+            <a:schemeClr val="accent1"/>
+          </a:lnRef>
+          <a:fillRef idx="3">
+            <a:schemeClr val="accent1"/>
+          </a:fillRef>
+          <a:effectRef idx="2">
+            <a:schemeClr val="accent1"/>
+          </a:effectRef>
+          <a:fontRef idx="minor">
+            <a:schemeClr val="lt1"/>
+          </a:fontRef>
+        </p:style>
+        <p:txBody>
+          <a:bodyPr rtlCol="0" anchor="ctr" wrap="square" lIns="54864" rIns="54864" tIns="18288" bIns="18288"/>
+          <a:lstStyle/>
+          <a:p>
+            <a:pPr algn="ctr"/>
+            <a:r>
+              <a:rPr sz="1300" b="1">
                 <a:solidFill>
                   <a:srgbClr val="1F2937"/>
                 </a:solidFill>
                 <a:latin typeface="Inter"/>
               </a:rPr>
-              <a:t>Each responder's </a:t>
-            </a:r>
-            <a:r>
-              <a:rPr sz="2100" b="1">
+              <a:t>Central command</a:t>
+            </a:r>
+          </a:p>
+          <a:p>
+            <a:pPr algn="ctr"/>
+            <a:r>
+              <a:rPr sz="950" b="0">
+                <a:solidFill>
+                  <a:srgbClr val="5B6474"/>
+                </a:solidFill>
+                <a:latin typeface="Inter"/>
+              </a:rPr>
+              <a:t>override pending dispatch</a:t>
+            </a:r>
+          </a:p>
+        </p:txBody>
+      </p:sp>
+      <p:sp>
+        <p:nvSpPr>
+          <p:cNvPr id="11" name="Node: Live Floor &amp; Analytics"/>
+          <p:cNvSpPr/>
+          <p:nvPr/>
+        </p:nvSpPr>
+        <p:spPr>
+          <a:xfrm>
+            <a:off x="8229600" y="3465576"/>
+            <a:ext cx="2331720" cy="658368"/>
+          </a:xfrm>
+          <a:prstGeom prst="roundRect">
+            <a:avLst>
+              <a:gd name="adj" fmla="val 18000"/>
+            </a:avLst>
+          </a:prstGeom>
+          <a:solidFill>
+            <a:srgbClr val="FFFFFF"/>
+          </a:solidFill>
+          <a:ln w="19050">
+            <a:solidFill>
+              <a:srgbClr val="16213E"/>
+            </a:solidFill>
+          </a:ln>
+          <a:effectLst/>
+        </p:spPr>
+        <p:style>
+          <a:lnRef idx="1">
+            <a:schemeClr val="accent1"/>
+          </a:lnRef>
+          <a:fillRef idx="3">
+            <a:schemeClr val="accent1"/>
+          </a:fillRef>
+          <a:effectRef idx="2">
+            <a:schemeClr val="accent1"/>
+          </a:effectRef>
+          <a:fontRef idx="minor">
+            <a:schemeClr val="lt1"/>
+          </a:fontRef>
+        </p:style>
+        <p:txBody>
+          <a:bodyPr rtlCol="0" anchor="ctr" wrap="square" lIns="54864" rIns="54864" tIns="18288" bIns="18288"/>
+          <a:lstStyle/>
+          <a:p>
+            <a:pPr algn="ctr"/>
+            <a:r>
+              <a:rPr sz="1300" b="1">
                 <a:solidFill>
                   <a:srgbClr val="16213E"/>
                 </a:solidFill>
                 <a:latin typeface="Inter"/>
               </a:rPr>
-              <a:t>true skill is hidden</a:t>
-            </a:r>
-            <a:r>
-              <a:rPr sz="2100" b="0">
+              <a:t>Live Floor &amp; Analytics</a:t>
+            </a:r>
+          </a:p>
+          <a:p>
+            <a:pPr algn="ctr"/>
+            <a:r>
+              <a:rPr sz="950" b="0">
+                <a:solidFill>
+                  <a:srgbClr val="5B6474"/>
+                </a:solidFill>
+                <a:latin typeface="Inter"/>
+              </a:rPr>
+              <a:t>UI, fixed snapshots</a:t>
+            </a:r>
+          </a:p>
+        </p:txBody>
+      </p:sp>
+      <p:sp>
+        <p:nvSpPr>
+          <p:cNvPr id="12" name="Node: Resolution engine"/>
+          <p:cNvSpPr/>
+          <p:nvPr/>
+        </p:nvSpPr>
+        <p:spPr>
+          <a:xfrm>
+            <a:off x="8229600" y="4754880"/>
+            <a:ext cx="2331720" cy="658368"/>
+          </a:xfrm>
+          <a:prstGeom prst="roundRect">
+            <a:avLst>
+              <a:gd name="adj" fmla="val 18000"/>
+            </a:avLst>
+          </a:prstGeom>
+          <a:solidFill>
+            <a:srgbClr val="FFFFFF"/>
+          </a:solidFill>
+          <a:ln w="19050">
+            <a:solidFill>
+              <a:srgbClr val="16213E"/>
+            </a:solidFill>
+          </a:ln>
+          <a:effectLst/>
+        </p:spPr>
+        <p:style>
+          <a:lnRef idx="1">
+            <a:schemeClr val="accent1"/>
+          </a:lnRef>
+          <a:fillRef idx="3">
+            <a:schemeClr val="accent1"/>
+          </a:fillRef>
+          <a:effectRef idx="2">
+            <a:schemeClr val="accent1"/>
+          </a:effectRef>
+          <a:fontRef idx="minor">
+            <a:schemeClr val="lt1"/>
+          </a:fontRef>
+        </p:style>
+        <p:txBody>
+          <a:bodyPr rtlCol="0" anchor="ctr" wrap="square" lIns="54864" rIns="54864" tIns="18288" bIns="18288"/>
+          <a:lstStyle/>
+          <a:p>
+            <a:pPr algn="ctr"/>
+            <a:r>
+              <a:rPr sz="1300" b="1">
+                <a:solidFill>
+                  <a:srgbClr val="16213E"/>
+                </a:solidFill>
+                <a:latin typeface="Inter"/>
+              </a:rPr>
+              <a:t>Resolution engine</a:t>
+            </a:r>
+          </a:p>
+          <a:p>
+            <a:pPr algn="ctr"/>
+            <a:r>
+              <a:rPr sz="950" b="0">
+                <a:solidFill>
+                  <a:srgbClr val="5B6474"/>
+                </a:solidFill>
+                <a:latin typeface="Inter"/>
+              </a:rPr>
+              <a:t>hidden skill → outcome</a:t>
+            </a:r>
+          </a:p>
+        </p:txBody>
+      </p:sp>
+      <p:sp>
+        <p:nvSpPr>
+          <p:cNvPr id="13" name="Node: Context engine"/>
+          <p:cNvSpPr/>
+          <p:nvPr/>
+        </p:nvSpPr>
+        <p:spPr>
+          <a:xfrm>
+            <a:off x="5257800" y="4754880"/>
+            <a:ext cx="1874519" cy="658368"/>
+          </a:xfrm>
+          <a:prstGeom prst="roundRect">
+            <a:avLst>
+              <a:gd name="adj" fmla="val 18000"/>
+            </a:avLst>
+          </a:prstGeom>
+          <a:solidFill>
+            <a:srgbClr val="FFFFFF"/>
+          </a:solidFill>
+          <a:ln w="19050">
+            <a:solidFill>
+              <a:srgbClr val="16213E"/>
+            </a:solidFill>
+          </a:ln>
+          <a:effectLst/>
+        </p:spPr>
+        <p:style>
+          <a:lnRef idx="1">
+            <a:schemeClr val="accent1"/>
+          </a:lnRef>
+          <a:fillRef idx="3">
+            <a:schemeClr val="accent1"/>
+          </a:fillRef>
+          <a:effectRef idx="2">
+            <a:schemeClr val="accent1"/>
+          </a:effectRef>
+          <a:fontRef idx="minor">
+            <a:schemeClr val="lt1"/>
+          </a:fontRef>
+        </p:style>
+        <p:txBody>
+          <a:bodyPr rtlCol="0" anchor="ctr" wrap="square" lIns="54864" rIns="54864" tIns="18288" bIns="18288"/>
+          <a:lstStyle/>
+          <a:p>
+            <a:pPr algn="ctr"/>
+            <a:r>
+              <a:rPr sz="1300" b="1">
+                <a:solidFill>
+                  <a:srgbClr val="16213E"/>
+                </a:solidFill>
+                <a:latin typeface="Inter"/>
+              </a:rPr>
+              <a:t>Context engine</a:t>
+            </a:r>
+          </a:p>
+          <a:p>
+            <a:pPr algn="ctr"/>
+            <a:r>
+              <a:rPr sz="950" b="0">
+                <a:solidFill>
+                  <a:srgbClr val="5B6474"/>
+                </a:solidFill>
+                <a:latin typeface="Inter"/>
+              </a:rPr>
+              <a:t>eligibility, travel, history</a:t>
+            </a:r>
+          </a:p>
+        </p:txBody>
+      </p:sp>
+      <p:sp>
+        <p:nvSpPr>
+          <p:cNvPr id="14" name="Node: Compass"/>
+          <p:cNvSpPr/>
+          <p:nvPr/>
+        </p:nvSpPr>
+        <p:spPr>
+          <a:xfrm>
+            <a:off x="2834640" y="4434840"/>
+            <a:ext cx="1874519" cy="658368"/>
+          </a:xfrm>
+          <a:prstGeom prst="roundRect">
+            <a:avLst>
+              <a:gd name="adj" fmla="val 18000"/>
+            </a:avLst>
+          </a:prstGeom>
+          <a:solidFill>
+            <a:srgbClr val="0F8B8D"/>
+          </a:solidFill>
+          <a:ln w="19050">
+            <a:solidFill>
+              <a:srgbClr val="0F8B8D"/>
+            </a:solidFill>
+          </a:ln>
+          <a:effectLst/>
+        </p:spPr>
+        <p:style>
+          <a:lnRef idx="1">
+            <a:schemeClr val="accent1"/>
+          </a:lnRef>
+          <a:fillRef idx="3">
+            <a:schemeClr val="accent1"/>
+          </a:fillRef>
+          <a:effectRef idx="2">
+            <a:schemeClr val="accent1"/>
+          </a:effectRef>
+          <a:fontRef idx="minor">
+            <a:schemeClr val="lt1"/>
+          </a:fontRef>
+        </p:style>
+        <p:txBody>
+          <a:bodyPr rtlCol="0" anchor="ctr" wrap="square" lIns="54864" rIns="54864" tIns="18288" bIns="18288"/>
+          <a:lstStyle/>
+          <a:p>
+            <a:pPr algn="ctr"/>
+            <a:r>
+              <a:rPr sz="1300" b="1">
+                <a:solidFill>
+                  <a:srgbClr val="FFFFFF"/>
+                </a:solidFill>
+                <a:latin typeface="Inter"/>
+              </a:rPr>
+              <a:t>Compass</a:t>
+            </a:r>
+          </a:p>
+          <a:p>
+            <a:pPr algn="ctr"/>
+            <a:r>
+              <a:rPr sz="950" b="0">
+                <a:solidFill>
+                  <a:srgbClr val="E6FFFF"/>
+                </a:solidFill>
+                <a:latin typeface="Inter"/>
+              </a:rPr>
+              <a:t>ranks responders, fixes</a:t>
+            </a:r>
+          </a:p>
+        </p:txBody>
+      </p:sp>
+      <p:sp>
+        <p:nvSpPr>
+          <p:cNvPr id="15" name="Node: Baselines"/>
+          <p:cNvSpPr/>
+          <p:nvPr/>
+        </p:nvSpPr>
+        <p:spPr>
+          <a:xfrm>
+            <a:off x="2834640" y="5486400"/>
+            <a:ext cx="1874519" cy="658368"/>
+          </a:xfrm>
+          <a:prstGeom prst="roundRect">
+            <a:avLst>
+              <a:gd name="adj" fmla="val 18000"/>
+            </a:avLst>
+          </a:prstGeom>
+          <a:solidFill>
+            <a:srgbClr val="FFFFFF"/>
+          </a:solidFill>
+          <a:ln w="19050">
+            <a:solidFill>
+              <a:srgbClr val="16213E"/>
+            </a:solidFill>
+          </a:ln>
+          <a:effectLst/>
+        </p:spPr>
+        <p:style>
+          <a:lnRef idx="1">
+            <a:schemeClr val="accent1"/>
+          </a:lnRef>
+          <a:fillRef idx="3">
+            <a:schemeClr val="accent1"/>
+          </a:fillRef>
+          <a:effectRef idx="2">
+            <a:schemeClr val="accent1"/>
+          </a:effectRef>
+          <a:fontRef idx="minor">
+            <a:schemeClr val="lt1"/>
+          </a:fontRef>
+        </p:style>
+        <p:txBody>
+          <a:bodyPr rtlCol="0" anchor="ctr" wrap="square" lIns="54864" rIns="54864" tIns="18288" bIns="18288"/>
+          <a:lstStyle/>
+          <a:p>
+            <a:pPr algn="ctr"/>
+            <a:r>
+              <a:rPr sz="1300" b="1">
+                <a:solidFill>
+                  <a:srgbClr val="16213E"/>
+                </a:solidFill>
+                <a:latin typeface="Inter"/>
+              </a:rPr>
+              <a:t>Baselines</a:t>
+            </a:r>
+          </a:p>
+          <a:p>
+            <a:pPr algn="ctr"/>
+            <a:r>
+              <a:rPr sz="950" b="0">
+                <a:solidFill>
+                  <a:srgbClr val="5B6474"/>
+                </a:solidFill>
+                <a:latin typeface="Inter"/>
+              </a:rPr>
+              <a:t>nearest + naive score</a:t>
+            </a:r>
+          </a:p>
+        </p:txBody>
+      </p:sp>
+      <p:sp>
+        <p:nvSpPr>
+          <p:cNvPr id="16" name="Node: Dispatch"/>
+          <p:cNvSpPr/>
+          <p:nvPr/>
+        </p:nvSpPr>
+        <p:spPr>
+          <a:xfrm>
+            <a:off x="411480" y="4937760"/>
+            <a:ext cx="1874519" cy="658368"/>
+          </a:xfrm>
+          <a:prstGeom prst="roundRect">
+            <a:avLst>
+              <a:gd name="adj" fmla="val 18000"/>
+            </a:avLst>
+          </a:prstGeom>
+          <a:solidFill>
+            <a:srgbClr val="FFFFFF"/>
+          </a:solidFill>
+          <a:ln w="19050">
+            <a:solidFill>
+              <a:srgbClr val="16213E"/>
+            </a:solidFill>
+          </a:ln>
+          <a:effectLst/>
+        </p:spPr>
+        <p:style>
+          <a:lnRef idx="1">
+            <a:schemeClr val="accent1"/>
+          </a:lnRef>
+          <a:fillRef idx="3">
+            <a:schemeClr val="accent1"/>
+          </a:fillRef>
+          <a:effectRef idx="2">
+            <a:schemeClr val="accent1"/>
+          </a:effectRef>
+          <a:fontRef idx="minor">
+            <a:schemeClr val="lt1"/>
+          </a:fontRef>
+        </p:style>
+        <p:txBody>
+          <a:bodyPr rtlCol="0" anchor="ctr" wrap="square" lIns="54864" rIns="54864" tIns="18288" bIns="18288"/>
+          <a:lstStyle/>
+          <a:p>
+            <a:pPr algn="ctr"/>
+            <a:r>
+              <a:rPr sz="1300" b="1">
+                <a:solidFill>
+                  <a:srgbClr val="16213E"/>
+                </a:solidFill>
+                <a:latin typeface="Inter"/>
+              </a:rPr>
+              <a:t>Dispatch</a:t>
+            </a:r>
+          </a:p>
+          <a:p>
+            <a:pPr algn="ctr"/>
+            <a:r>
+              <a:rPr sz="950" b="0">
+                <a:solidFill>
+                  <a:srgbClr val="5B6474"/>
+                </a:solidFill>
+                <a:latin typeface="Inter"/>
+              </a:rPr>
+              <a:t>ranked offer queue</a:t>
+            </a:r>
+          </a:p>
+        </p:txBody>
+      </p:sp>
+      <p:sp>
+        <p:nvSpPr>
+          <p:cNvPr id="17" name="Node: Responders"/>
+          <p:cNvSpPr/>
+          <p:nvPr/>
+        </p:nvSpPr>
+        <p:spPr>
+          <a:xfrm>
+            <a:off x="411480" y="3840480"/>
+            <a:ext cx="1874519" cy="658368"/>
+          </a:xfrm>
+          <a:prstGeom prst="roundRect">
+            <a:avLst>
+              <a:gd name="adj" fmla="val 18000"/>
+            </a:avLst>
+          </a:prstGeom>
+          <a:solidFill>
+            <a:srgbClr val="FFFFFF"/>
+          </a:solidFill>
+          <a:ln w="19050">
+            <a:solidFill>
+              <a:srgbClr val="D98A1C"/>
+            </a:solidFill>
+          </a:ln>
+          <a:effectLst/>
+        </p:spPr>
+        <p:style>
+          <a:lnRef idx="1">
+            <a:schemeClr val="accent1"/>
+          </a:lnRef>
+          <a:fillRef idx="3">
+            <a:schemeClr val="accent1"/>
+          </a:fillRef>
+          <a:effectRef idx="2">
+            <a:schemeClr val="accent1"/>
+          </a:effectRef>
+          <a:fontRef idx="minor">
+            <a:schemeClr val="lt1"/>
+          </a:fontRef>
+        </p:style>
+        <p:txBody>
+          <a:bodyPr rtlCol="0" anchor="ctr" wrap="square" lIns="54864" rIns="54864" tIns="18288" bIns="18288"/>
+          <a:lstStyle/>
+          <a:p>
+            <a:pPr algn="ctr"/>
+            <a:r>
+              <a:rPr sz="1300" b="1">
                 <a:solidFill>
                   <a:srgbClr val="1F2937"/>
                 </a:solidFill>
                 <a:latin typeface="Inter"/>
               </a:rPr>
-              <a:t> simulation truth: no model, UI or analytics sees it.</a:t>
-            </a:r>
-          </a:p>
-          <a:p>
-            <a:pPr>
-              <a:spcAft>
-                <a:spcPts val="1680"/>
-              </a:spcAft>
-            </a:pPr>
-            <a:r>
-              <a:rPr sz="2100" b="1">
-                <a:solidFill>
-                  <a:srgbClr val="0F8B8D"/>
-                </a:solidFill>
-                <a:latin typeface="Inter"/>
-              </a:rPr>
-              <a:t>▸  </a:t>
-            </a:r>
-            <a:r>
-              <a:rPr sz="2100" b="0">
-                <a:solidFill>
-                  <a:srgbClr val="1F2937"/>
-                </a:solidFill>
-                <a:latin typeface="Inter"/>
-              </a:rPr>
-              <a:t>Outcomes are simulated from that hidden skill, independently of what the model claims.</a:t>
-            </a:r>
-          </a:p>
-          <a:p>
-            <a:pPr>
-              <a:spcAft>
-                <a:spcPts val="1680"/>
-              </a:spcAft>
-            </a:pPr>
-            <a:r>
-              <a:rPr sz="2100" b="1">
-                <a:solidFill>
-                  <a:srgbClr val="0F8B8D"/>
-                </a:solidFill>
-                <a:latin typeface="Inter"/>
-              </a:rPr>
-              <a:t>▸  </a:t>
-            </a:r>
-            <a:r>
-              <a:rPr sz="2100" b="0">
-                <a:solidFill>
-                  <a:srgbClr val="1F2937"/>
-                </a:solidFill>
-                <a:latin typeface="Inter"/>
-              </a:rPr>
-              <a:t>Two transparent baselines (nearest, naive score) run alongside; disagreements are flagged.</a:t>
-            </a:r>
-          </a:p>
-          <a:p>
-            <a:pPr>
-              <a:spcAft>
-                <a:spcPts val="1680"/>
-              </a:spcAft>
-            </a:pPr>
-            <a:r>
-              <a:rPr sz="2100" b="1">
-                <a:solidFill>
-                  <a:srgbClr val="0F8B8D"/>
-                </a:solidFill>
-                <a:latin typeface="Inter"/>
-              </a:rPr>
-              <a:t>▸  </a:t>
-            </a:r>
-            <a:r>
-              <a:rPr sz="2100" b="0">
-                <a:solidFill>
-                  <a:srgbClr val="1F2937"/>
-                </a:solidFill>
-                <a:latin typeface="Inter"/>
-              </a:rPr>
-              <a:t>Analytics show denominators, suppress thin samples and are not an employee leaderboard.</a:t>
-            </a:r>
-          </a:p>
-          <a:p>
-            <a:pPr>
-              <a:spcAft>
-                <a:spcPts val="1680"/>
-              </a:spcAft>
-            </a:pPr>
-            <a:r>
-              <a:rPr sz="2100" b="1">
-                <a:solidFill>
-                  <a:srgbClr val="0F8B8D"/>
-                </a:solidFill>
-                <a:latin typeface="Inter"/>
-              </a:rPr>
-              <a:t>▸  </a:t>
-            </a:r>
-            <a:r>
-              <a:rPr sz="2100" b="0">
-                <a:solidFill>
-                  <a:srgbClr val="1F2937"/>
-                </a:solidFill>
-                <a:latin typeface="Inter"/>
-              </a:rPr>
-              <a:t>Excluded from ranking: pay, seniority, demographics, fatigue, HR data.</a:t>
-            </a:r>
-          </a:p>
-        </p:txBody>
-      </p:sp>
-      <p:sp>
-        <p:nvSpPr>
-          <p:cNvPr id="4" name="TextBox 3"/>
+              <a:t>Responders</a:t>
+            </a:r>
+          </a:p>
+          <a:p>
+            <a:pPr algn="ctr"/>
+            <a:r>
+              <a:rPr sz="950" b="0">
+                <a:solidFill>
+                  <a:srgbClr val="5B6474"/>
+                </a:solidFill>
+                <a:latin typeface="Inter"/>
+              </a:rPr>
+              <a:t>accept or reject</a:t>
+            </a:r>
+          </a:p>
+        </p:txBody>
+      </p:sp>
+      <p:cxnSp>
+        <p:nvCxnSpPr>
+          <p:cNvPr id="18" name="Arrow: Simulation clock to Scheduler"/>
+          <p:cNvCxnSpPr>
+            <a:stCxn id="4" idx="2"/>
+            <a:endCxn id="5" idx="0"/>
+          </p:cNvCxnSpPr>
+          <p:nvPr/>
+        </p:nvCxnSpPr>
+        <p:spPr>
+          <a:xfrm flipH="1">
+            <a:off x="1348739" y="2258568"/>
+            <a:ext cx="0" cy="438912"/>
+          </a:xfrm>
+          <a:prstGeom prst="line">
+            <a:avLst/>
+          </a:prstGeom>
+          <a:ln w="19050">
+            <a:solidFill>
+              <a:srgbClr val="5B6474"/>
+            </a:solidFill>
+            <a:tailEnd type="triangle" w="med" len="med"/>
+          </a:ln>
+        </p:spPr>
+        <p:style>
+          <a:lnRef idx="2">
+            <a:schemeClr val="accent1"/>
+          </a:lnRef>
+          <a:fillRef idx="0">
+            <a:schemeClr val="accent1"/>
+          </a:fillRef>
+          <a:effectRef idx="1">
+            <a:schemeClr val="accent1"/>
+          </a:effectRef>
+          <a:fontRef idx="minor">
+            <a:schemeClr val="tx1"/>
+          </a:fontRef>
+        </p:style>
+      </p:cxnSp>
+      <p:cxnSp>
+        <p:nvCxnSpPr>
+          <p:cNvPr id="19" name="Arrow: Scheduler to Event planner"/>
+          <p:cNvCxnSpPr>
+            <a:stCxn id="5" idx="3"/>
+            <a:endCxn id="6" idx="1"/>
+          </p:cNvCxnSpPr>
+          <p:nvPr/>
+        </p:nvCxnSpPr>
+        <p:spPr>
+          <a:xfrm flipV="1">
+            <a:off x="2285999" y="1929384"/>
+            <a:ext cx="548641" cy="1097280"/>
+          </a:xfrm>
+          <a:prstGeom prst="line">
+            <a:avLst/>
+          </a:prstGeom>
+          <a:ln w="19050">
+            <a:solidFill>
+              <a:srgbClr val="5B6474"/>
+            </a:solidFill>
+            <a:tailEnd type="triangle" w="med" len="med"/>
+          </a:ln>
+        </p:spPr>
+        <p:style>
+          <a:lnRef idx="2">
+            <a:schemeClr val="accent1"/>
+          </a:lnRef>
+          <a:fillRef idx="0">
+            <a:schemeClr val="accent1"/>
+          </a:fillRef>
+          <a:effectRef idx="1">
+            <a:schemeClr val="accent1"/>
+          </a:effectRef>
+          <a:fontRef idx="minor">
+            <a:schemeClr val="tx1"/>
+          </a:fontRef>
+        </p:style>
+      </p:cxnSp>
+      <p:cxnSp>
+        <p:nvCxnSpPr>
+          <p:cNvPr id="20" name="Arrow: Scheduler to Fallback planner"/>
+          <p:cNvCxnSpPr>
+            <a:stCxn id="5" idx="3"/>
+            <a:endCxn id="7" idx="1"/>
+          </p:cNvCxnSpPr>
+          <p:nvPr/>
+        </p:nvCxnSpPr>
+        <p:spPr>
+          <a:xfrm flipV="1">
+            <a:off x="2285999" y="3026664"/>
+            <a:ext cx="548641" cy="0"/>
+          </a:xfrm>
+          <a:prstGeom prst="line">
+            <a:avLst/>
+          </a:prstGeom>
+          <a:ln w="19050">
+            <a:solidFill>
+              <a:srgbClr val="5B6474"/>
+            </a:solidFill>
+            <a:tailEnd type="triangle" w="med" len="med"/>
+          </a:ln>
+        </p:spPr>
+        <p:style>
+          <a:lnRef idx="2">
+            <a:schemeClr val="accent1"/>
+          </a:lnRef>
+          <a:fillRef idx="0">
+            <a:schemeClr val="accent1"/>
+          </a:fillRef>
+          <a:effectRef idx="1">
+            <a:schemeClr val="accent1"/>
+          </a:effectRef>
+          <a:fontRef idx="minor">
+            <a:schemeClr val="tx1"/>
+          </a:fontRef>
+        </p:style>
+      </p:cxnSp>
+      <p:cxnSp>
+        <p:nvCxnSpPr>
+          <p:cNvPr id="21" name="Arrow: Event planner to Validator"/>
+          <p:cNvCxnSpPr>
+            <a:stCxn id="6" idx="3"/>
+            <a:endCxn id="8" idx="1"/>
+          </p:cNvCxnSpPr>
+          <p:nvPr/>
+        </p:nvCxnSpPr>
+        <p:spPr>
+          <a:xfrm>
+            <a:off x="4709159" y="1929384"/>
+            <a:ext cx="548641" cy="548640"/>
+          </a:xfrm>
+          <a:prstGeom prst="line">
+            <a:avLst/>
+          </a:prstGeom>
+          <a:ln w="19050">
+            <a:solidFill>
+              <a:srgbClr val="5B6474"/>
+            </a:solidFill>
+            <a:tailEnd type="triangle" w="med" len="med"/>
+          </a:ln>
+        </p:spPr>
+        <p:style>
+          <a:lnRef idx="2">
+            <a:schemeClr val="accent1"/>
+          </a:lnRef>
+          <a:fillRef idx="0">
+            <a:schemeClr val="accent1"/>
+          </a:fillRef>
+          <a:effectRef idx="1">
+            <a:schemeClr val="accent1"/>
+          </a:effectRef>
+          <a:fontRef idx="minor">
+            <a:schemeClr val="tx1"/>
+          </a:fontRef>
+        </p:style>
+      </p:cxnSp>
+      <p:cxnSp>
+        <p:nvCxnSpPr>
+          <p:cNvPr id="22" name="Arrow: Fallback planner to Validator"/>
+          <p:cNvCxnSpPr>
+            <a:stCxn id="7" idx="3"/>
+            <a:endCxn id="8" idx="1"/>
+          </p:cNvCxnSpPr>
+          <p:nvPr/>
+        </p:nvCxnSpPr>
+        <p:spPr>
+          <a:xfrm flipV="1">
+            <a:off x="4709159" y="2478024"/>
+            <a:ext cx="548641" cy="548640"/>
+          </a:xfrm>
+          <a:prstGeom prst="line">
+            <a:avLst/>
+          </a:prstGeom>
+          <a:ln w="19050">
+            <a:solidFill>
+              <a:srgbClr val="5B6474"/>
+            </a:solidFill>
+            <a:tailEnd type="triangle" w="med" len="med"/>
+          </a:ln>
+        </p:spPr>
+        <p:style>
+          <a:lnRef idx="2">
+            <a:schemeClr val="accent1"/>
+          </a:lnRef>
+          <a:fillRef idx="0">
+            <a:schemeClr val="accent1"/>
+          </a:fillRef>
+          <a:effectRef idx="1">
+            <a:schemeClr val="accent1"/>
+          </a:effectRef>
+          <a:fontRef idx="minor">
+            <a:schemeClr val="tx1"/>
+          </a:fontRef>
+        </p:style>
+      </p:cxnSp>
+      <p:cxnSp>
+        <p:nvCxnSpPr>
+          <p:cNvPr id="23" name="Arrow: Validator to Canonical state"/>
+          <p:cNvCxnSpPr>
+            <a:stCxn id="8" idx="2"/>
+            <a:endCxn id="9" idx="0"/>
+          </p:cNvCxnSpPr>
+          <p:nvPr/>
+        </p:nvCxnSpPr>
+        <p:spPr>
+          <a:xfrm>
+            <a:off x="6195059" y="2807208"/>
+            <a:ext cx="1" cy="530352"/>
+          </a:xfrm>
+          <a:prstGeom prst="line">
+            <a:avLst/>
+          </a:prstGeom>
+          <a:ln w="19050">
+            <a:solidFill>
+              <a:srgbClr val="5B6474"/>
+            </a:solidFill>
+            <a:tailEnd type="triangle" w="med" len="med"/>
+          </a:ln>
+        </p:spPr>
+        <p:style>
+          <a:lnRef idx="2">
+            <a:schemeClr val="accent1"/>
+          </a:lnRef>
+          <a:fillRef idx="0">
+            <a:schemeClr val="accent1"/>
+          </a:fillRef>
+          <a:effectRef idx="1">
+            <a:schemeClr val="accent1"/>
+          </a:effectRef>
+          <a:fontRef idx="minor">
+            <a:schemeClr val="tx1"/>
+          </a:fontRef>
+        </p:style>
+      </p:cxnSp>
+      <p:cxnSp>
+        <p:nvCxnSpPr>
+          <p:cNvPr id="24" name="Arrow: Central command to Canonical state"/>
+          <p:cNvCxnSpPr>
+            <a:stCxn id="10" idx="1"/>
+            <a:endCxn id="9" idx="3"/>
+          </p:cNvCxnSpPr>
+          <p:nvPr/>
+        </p:nvCxnSpPr>
+        <p:spPr>
+          <a:xfrm flipH="1">
+            <a:off x="7360920" y="2478024"/>
+            <a:ext cx="868680" cy="1293876"/>
+          </a:xfrm>
+          <a:prstGeom prst="line">
+            <a:avLst/>
+          </a:prstGeom>
+          <a:ln w="19050">
+            <a:solidFill>
+              <a:srgbClr val="5B6474"/>
+            </a:solidFill>
+            <a:tailEnd type="triangle" w="med" len="med"/>
+          </a:ln>
+        </p:spPr>
+        <p:style>
+          <a:lnRef idx="2">
+            <a:schemeClr val="accent1"/>
+          </a:lnRef>
+          <a:fillRef idx="0">
+            <a:schemeClr val="accent1"/>
+          </a:fillRef>
+          <a:effectRef idx="1">
+            <a:schemeClr val="accent1"/>
+          </a:effectRef>
+          <a:fontRef idx="minor">
+            <a:schemeClr val="tx1"/>
+          </a:fontRef>
+        </p:style>
+      </p:cxnSp>
+      <p:cxnSp>
+        <p:nvCxnSpPr>
+          <p:cNvPr id="25" name="Arrow: Canonical state to Live Floor &amp; Analytics"/>
+          <p:cNvCxnSpPr>
+            <a:stCxn id="9" idx="3"/>
+            <a:endCxn id="11" idx="1"/>
+          </p:cNvCxnSpPr>
+          <p:nvPr/>
+        </p:nvCxnSpPr>
+        <p:spPr>
+          <a:xfrm>
+            <a:off x="7360920" y="3771900"/>
+            <a:ext cx="868680" cy="22860"/>
+          </a:xfrm>
+          <a:prstGeom prst="line">
+            <a:avLst/>
+          </a:prstGeom>
+          <a:ln w="19050">
+            <a:solidFill>
+              <a:srgbClr val="5B6474"/>
+            </a:solidFill>
+            <a:tailEnd type="triangle" w="med" len="med"/>
+          </a:ln>
+        </p:spPr>
+        <p:style>
+          <a:lnRef idx="2">
+            <a:schemeClr val="accent1"/>
+          </a:lnRef>
+          <a:fillRef idx="0">
+            <a:schemeClr val="accent1"/>
+          </a:fillRef>
+          <a:effectRef idx="1">
+            <a:schemeClr val="accent1"/>
+          </a:effectRef>
+          <a:fontRef idx="minor">
+            <a:schemeClr val="tx1"/>
+          </a:fontRef>
+        </p:style>
+      </p:cxnSp>
+      <p:cxnSp>
+        <p:nvCxnSpPr>
+          <p:cNvPr id="26" name="Arrow: Resolution engine to Canonical state"/>
+          <p:cNvCxnSpPr>
+            <a:stCxn id="12" idx="1"/>
+            <a:endCxn id="9" idx="3"/>
+          </p:cNvCxnSpPr>
+          <p:nvPr/>
+        </p:nvCxnSpPr>
+        <p:spPr>
+          <a:xfrm flipH="1" flipV="1">
+            <a:off x="7360920" y="3771900"/>
+            <a:ext cx="868680" cy="1312164"/>
+          </a:xfrm>
+          <a:prstGeom prst="line">
+            <a:avLst/>
+          </a:prstGeom>
+          <a:ln w="19050">
+            <a:solidFill>
+              <a:srgbClr val="5B6474"/>
+            </a:solidFill>
+            <a:tailEnd type="triangle" w="med" len="med"/>
+          </a:ln>
+        </p:spPr>
+        <p:style>
+          <a:lnRef idx="2">
+            <a:schemeClr val="accent1"/>
+          </a:lnRef>
+          <a:fillRef idx="0">
+            <a:schemeClr val="accent1"/>
+          </a:fillRef>
+          <a:effectRef idx="1">
+            <a:schemeClr val="accent1"/>
+          </a:effectRef>
+          <a:fontRef idx="minor">
+            <a:schemeClr val="tx1"/>
+          </a:fontRef>
+        </p:style>
+      </p:cxnSp>
+      <p:cxnSp>
+        <p:nvCxnSpPr>
+          <p:cNvPr id="27" name="Arrow: Canonical state to Context engine"/>
+          <p:cNvCxnSpPr>
+            <a:stCxn id="9" idx="2"/>
+            <a:endCxn id="13" idx="0"/>
+          </p:cNvCxnSpPr>
+          <p:nvPr/>
+        </p:nvCxnSpPr>
+        <p:spPr>
+          <a:xfrm flipH="1">
+            <a:off x="6195059" y="4206240"/>
+            <a:ext cx="1" cy="548640"/>
+          </a:xfrm>
+          <a:prstGeom prst="line">
+            <a:avLst/>
+          </a:prstGeom>
+          <a:ln w="19050">
+            <a:solidFill>
+              <a:srgbClr val="5B6474"/>
+            </a:solidFill>
+            <a:tailEnd type="triangle" w="med" len="med"/>
+          </a:ln>
+        </p:spPr>
+        <p:style>
+          <a:lnRef idx="2">
+            <a:schemeClr val="accent1"/>
+          </a:lnRef>
+          <a:fillRef idx="0">
+            <a:schemeClr val="accent1"/>
+          </a:fillRef>
+          <a:effectRef idx="1">
+            <a:schemeClr val="accent1"/>
+          </a:effectRef>
+          <a:fontRef idx="minor">
+            <a:schemeClr val="tx1"/>
+          </a:fontRef>
+        </p:style>
+      </p:cxnSp>
+      <p:cxnSp>
+        <p:nvCxnSpPr>
+          <p:cNvPr id="28" name="Arrow: Context engine to Compass"/>
+          <p:cNvCxnSpPr>
+            <a:stCxn id="13" idx="1"/>
+            <a:endCxn id="14" idx="3"/>
+          </p:cNvCxnSpPr>
+          <p:nvPr/>
+        </p:nvCxnSpPr>
+        <p:spPr>
+          <a:xfrm flipH="1" flipV="1">
+            <a:off x="4709159" y="4764024"/>
+            <a:ext cx="548641" cy="320040"/>
+          </a:xfrm>
+          <a:prstGeom prst="line">
+            <a:avLst/>
+          </a:prstGeom>
+          <a:ln w="19050">
+            <a:solidFill>
+              <a:srgbClr val="5B6474"/>
+            </a:solidFill>
+            <a:tailEnd type="triangle" w="med" len="med"/>
+          </a:ln>
+        </p:spPr>
+        <p:style>
+          <a:lnRef idx="2">
+            <a:schemeClr val="accent1"/>
+          </a:lnRef>
+          <a:fillRef idx="0">
+            <a:schemeClr val="accent1"/>
+          </a:fillRef>
+          <a:effectRef idx="1">
+            <a:schemeClr val="accent1"/>
+          </a:effectRef>
+          <a:fontRef idx="minor">
+            <a:schemeClr val="tx1"/>
+          </a:fontRef>
+        </p:style>
+      </p:cxnSp>
+      <p:cxnSp>
+        <p:nvCxnSpPr>
+          <p:cNvPr id="29" name="Arrow: Context engine to Baselines"/>
+          <p:cNvCxnSpPr>
+            <a:stCxn id="13" idx="1"/>
+            <a:endCxn id="15" idx="3"/>
+          </p:cNvCxnSpPr>
+          <p:nvPr/>
+        </p:nvCxnSpPr>
+        <p:spPr>
+          <a:xfrm flipH="1">
+            <a:off x="4709159" y="5084064"/>
+            <a:ext cx="548641" cy="731520"/>
+          </a:xfrm>
+          <a:prstGeom prst="line">
+            <a:avLst/>
+          </a:prstGeom>
+          <a:ln w="19050">
+            <a:solidFill>
+              <a:srgbClr val="5B6474"/>
+            </a:solidFill>
+            <a:tailEnd type="triangle" w="med" len="med"/>
+          </a:ln>
+        </p:spPr>
+        <p:style>
+          <a:lnRef idx="2">
+            <a:schemeClr val="accent1"/>
+          </a:lnRef>
+          <a:fillRef idx="0">
+            <a:schemeClr val="accent1"/>
+          </a:fillRef>
+          <a:effectRef idx="1">
+            <a:schemeClr val="accent1"/>
+          </a:effectRef>
+          <a:fontRef idx="minor">
+            <a:schemeClr val="tx1"/>
+          </a:fontRef>
+        </p:style>
+      </p:cxnSp>
+      <p:cxnSp>
+        <p:nvCxnSpPr>
+          <p:cNvPr id="30" name="Arrow: Compass to Dispatch"/>
+          <p:cNvCxnSpPr>
+            <a:stCxn id="14" idx="1"/>
+            <a:endCxn id="16" idx="3"/>
+          </p:cNvCxnSpPr>
+          <p:nvPr/>
+        </p:nvCxnSpPr>
+        <p:spPr>
+          <a:xfrm flipH="1">
+            <a:off x="2285999" y="4764024"/>
+            <a:ext cx="548641" cy="502920"/>
+          </a:xfrm>
+          <a:prstGeom prst="line">
+            <a:avLst/>
+          </a:prstGeom>
+          <a:ln w="19050">
+            <a:solidFill>
+              <a:srgbClr val="5B6474"/>
+            </a:solidFill>
+            <a:tailEnd type="triangle" w="med" len="med"/>
+          </a:ln>
+        </p:spPr>
+        <p:style>
+          <a:lnRef idx="2">
+            <a:schemeClr val="accent1"/>
+          </a:lnRef>
+          <a:fillRef idx="0">
+            <a:schemeClr val="accent1"/>
+          </a:fillRef>
+          <a:effectRef idx="1">
+            <a:schemeClr val="accent1"/>
+          </a:effectRef>
+          <a:fontRef idx="minor">
+            <a:schemeClr val="tx1"/>
+          </a:fontRef>
+        </p:style>
+      </p:cxnSp>
+      <p:cxnSp>
+        <p:nvCxnSpPr>
+          <p:cNvPr id="31" name="Arrow: Baselines to Dispatch"/>
+          <p:cNvCxnSpPr>
+            <a:stCxn id="15" idx="1"/>
+            <a:endCxn id="16" idx="3"/>
+          </p:cNvCxnSpPr>
+          <p:nvPr/>
+        </p:nvCxnSpPr>
+        <p:spPr>
+          <a:xfrm flipH="1" flipV="1">
+            <a:off x="2285999" y="5266944"/>
+            <a:ext cx="548641" cy="548640"/>
+          </a:xfrm>
+          <a:prstGeom prst="line">
+            <a:avLst/>
+          </a:prstGeom>
+          <a:ln w="19050">
+            <a:solidFill>
+              <a:srgbClr val="5B6474"/>
+            </a:solidFill>
+            <a:tailEnd type="triangle" w="med" len="med"/>
+          </a:ln>
+        </p:spPr>
+        <p:style>
+          <a:lnRef idx="2">
+            <a:schemeClr val="accent1"/>
+          </a:lnRef>
+          <a:fillRef idx="0">
+            <a:schemeClr val="accent1"/>
+          </a:fillRef>
+          <a:effectRef idx="1">
+            <a:schemeClr val="accent1"/>
+          </a:effectRef>
+          <a:fontRef idx="minor">
+            <a:schemeClr val="tx1"/>
+          </a:fontRef>
+        </p:style>
+      </p:cxnSp>
+      <p:cxnSp>
+        <p:nvCxnSpPr>
+          <p:cNvPr id="32" name="Arrow: Dispatch to Responders"/>
+          <p:cNvCxnSpPr>
+            <a:stCxn id="16" idx="0"/>
+            <a:endCxn id="17" idx="2"/>
+          </p:cNvCxnSpPr>
+          <p:nvPr/>
+        </p:nvCxnSpPr>
+        <p:spPr>
+          <a:xfrm flipH="1" flipV="1">
+            <a:off x="1348739" y="4498848"/>
+            <a:ext cx="0" cy="438912"/>
+          </a:xfrm>
+          <a:prstGeom prst="line">
+            <a:avLst/>
+          </a:prstGeom>
+          <a:ln w="19050">
+            <a:solidFill>
+              <a:srgbClr val="5B6474"/>
+            </a:solidFill>
+            <a:tailEnd type="triangle" w="med" len="med"/>
+          </a:ln>
+        </p:spPr>
+        <p:style>
+          <a:lnRef idx="2">
+            <a:schemeClr val="accent1"/>
+          </a:lnRef>
+          <a:fillRef idx="0">
+            <a:schemeClr val="accent1"/>
+          </a:fillRef>
+          <a:effectRef idx="1">
+            <a:schemeClr val="accent1"/>
+          </a:effectRef>
+          <a:fontRef idx="minor">
+            <a:schemeClr val="tx1"/>
+          </a:fontRef>
+        </p:style>
+      </p:cxnSp>
+      <p:cxnSp>
+        <p:nvCxnSpPr>
+          <p:cNvPr id="33" name="Arrow: Responders to Canonical state"/>
+          <p:cNvCxnSpPr>
+            <a:stCxn id="17" idx="3"/>
+            <a:endCxn id="9" idx="1"/>
+          </p:cNvCxnSpPr>
+          <p:nvPr/>
+        </p:nvCxnSpPr>
+        <p:spPr>
+          <a:xfrm flipV="1">
+            <a:off x="2285999" y="3771900"/>
+            <a:ext cx="2743201" cy="397764"/>
+          </a:xfrm>
+          <a:prstGeom prst="line">
+            <a:avLst/>
+          </a:prstGeom>
+          <a:ln w="19050">
+            <a:solidFill>
+              <a:srgbClr val="5B6474"/>
+            </a:solidFill>
+            <a:tailEnd type="triangle" w="med" len="med"/>
+          </a:ln>
+        </p:spPr>
+        <p:style>
+          <a:lnRef idx="2">
+            <a:schemeClr val="accent1"/>
+          </a:lnRef>
+          <a:fillRef idx="0">
+            <a:schemeClr val="accent1"/>
+          </a:fillRef>
+          <a:effectRef idx="1">
+            <a:schemeClr val="accent1"/>
+          </a:effectRef>
+          <a:fontRef idx="minor">
+            <a:schemeClr val="tx1"/>
+          </a:fontRef>
+        </p:style>
+      </p:cxnSp>
+      <p:sp>
+        <p:nvSpPr>
+          <p:cNvPr id="34" name="Rounded Rectangle 33"/>
+          <p:cNvSpPr/>
+          <p:nvPr/>
+        </p:nvSpPr>
+        <p:spPr>
+          <a:xfrm>
+            <a:off x="8229600" y="5760720"/>
+            <a:ext cx="292608" cy="182880"/>
+          </a:xfrm>
+          <a:prstGeom prst="roundRect">
+            <a:avLst/>
+          </a:prstGeom>
+          <a:solidFill>
+            <a:srgbClr val="FFFFFF"/>
+          </a:solidFill>
+          <a:ln>
+            <a:solidFill>
+              <a:srgbClr val="16213E"/>
+            </a:solidFill>
+          </a:ln>
+          <a:effectLst/>
+        </p:spPr>
+        <p:style>
+          <a:lnRef idx="1">
+            <a:schemeClr val="accent1"/>
+          </a:lnRef>
+          <a:fillRef idx="3">
+            <a:schemeClr val="accent1"/>
+          </a:fillRef>
+          <a:effectRef idx="2">
+            <a:schemeClr val="accent1"/>
+          </a:effectRef>
+          <a:fontRef idx="minor">
+            <a:schemeClr val="lt1"/>
+          </a:fontRef>
+        </p:style>
+        <p:txBody>
+          <a:bodyPr rtlCol="0" anchor="ctr"/>
+          <a:lstStyle/>
+          <a:p>
+            <a:pPr algn="ctr"/>
+          </a:p>
+        </p:txBody>
+      </p:sp>
+      <p:sp>
+        <p:nvSpPr>
+          <p:cNvPr id="35" name="TextBox 34"/>
+          <p:cNvSpPr txBox="1"/>
+          <p:nvPr/>
+        </p:nvSpPr>
+        <p:spPr>
+          <a:xfrm>
+            <a:off x="8613648" y="5733288"/>
+            <a:ext cx="2286000" cy="256032"/>
+          </a:xfrm>
+          <a:prstGeom prst="rect">
+            <a:avLst/>
+          </a:prstGeom>
+          <a:noFill/>
+        </p:spPr>
+        <p:txBody>
+          <a:bodyPr wrap="square" lIns="0" rIns="0" tIns="0" bIns="0">
+            <a:spAutoFit/>
+          </a:bodyPr>
+          <a:lstStyle/>
+          <a:p>
+            <a:pPr algn="l"/>
+            <a:r>
+              <a:rPr sz="1100" b="0">
+                <a:solidFill>
+                  <a:srgbClr val="5B6474"/>
+                </a:solidFill>
+                <a:latin typeface="Inter"/>
+              </a:rPr>
+              <a:t>Application code</a:t>
+            </a:r>
+          </a:p>
+        </p:txBody>
+      </p:sp>
+      <p:sp>
+        <p:nvSpPr>
+          <p:cNvPr id="36" name="Rounded Rectangle 35"/>
+          <p:cNvSpPr/>
+          <p:nvPr/>
+        </p:nvSpPr>
+        <p:spPr>
+          <a:xfrm>
+            <a:off x="8229600" y="6035040"/>
+            <a:ext cx="292608" cy="182880"/>
+          </a:xfrm>
+          <a:prstGeom prst="roundRect">
+            <a:avLst/>
+          </a:prstGeom>
+          <a:solidFill>
+            <a:srgbClr val="0F8B8D"/>
+          </a:solidFill>
+          <a:ln>
+            <a:solidFill>
+              <a:srgbClr val="0F8B8D"/>
+            </a:solidFill>
+          </a:ln>
+          <a:effectLst/>
+        </p:spPr>
+        <p:style>
+          <a:lnRef idx="1">
+            <a:schemeClr val="accent1"/>
+          </a:lnRef>
+          <a:fillRef idx="3">
+            <a:schemeClr val="accent1"/>
+          </a:fillRef>
+          <a:effectRef idx="2">
+            <a:schemeClr val="accent1"/>
+          </a:effectRef>
+          <a:fontRef idx="minor">
+            <a:schemeClr val="lt1"/>
+          </a:fontRef>
+        </p:style>
+        <p:txBody>
+          <a:bodyPr rtlCol="0" anchor="ctr"/>
+          <a:lstStyle/>
+          <a:p>
+            <a:pPr algn="ctr"/>
+          </a:p>
+        </p:txBody>
+      </p:sp>
+      <p:sp>
+        <p:nvSpPr>
+          <p:cNvPr id="37" name="TextBox 36"/>
+          <p:cNvSpPr txBox="1"/>
+          <p:nvPr/>
+        </p:nvSpPr>
+        <p:spPr>
+          <a:xfrm>
+            <a:off x="8613648" y="6007607"/>
+            <a:ext cx="2286000" cy="256032"/>
+          </a:xfrm>
+          <a:prstGeom prst="rect">
+            <a:avLst/>
+          </a:prstGeom>
+          <a:noFill/>
+        </p:spPr>
+        <p:txBody>
+          <a:bodyPr wrap="square" lIns="0" rIns="0" tIns="0" bIns="0">
+            <a:spAutoFit/>
+          </a:bodyPr>
+          <a:lstStyle/>
+          <a:p>
+            <a:pPr algn="l"/>
+            <a:r>
+              <a:rPr sz="1100" b="0">
+                <a:solidFill>
+                  <a:srgbClr val="5B6474"/>
+                </a:solidFill>
+                <a:latin typeface="Inter"/>
+              </a:rPr>
+              <a:t>AMD model</a:t>
+            </a:r>
+          </a:p>
+        </p:txBody>
+      </p:sp>
+      <p:sp>
+        <p:nvSpPr>
+          <p:cNvPr id="38" name="Rounded Rectangle 37"/>
+          <p:cNvSpPr/>
+          <p:nvPr/>
+        </p:nvSpPr>
+        <p:spPr>
+          <a:xfrm>
+            <a:off x="8229600" y="6309359"/>
+            <a:ext cx="292608" cy="182880"/>
+          </a:xfrm>
+          <a:prstGeom prst="roundRect">
+            <a:avLst/>
+          </a:prstGeom>
+          <a:solidFill>
+            <a:srgbClr val="FFFFFF"/>
+          </a:solidFill>
+          <a:ln>
+            <a:solidFill>
+              <a:srgbClr val="D98A1C"/>
+            </a:solidFill>
+          </a:ln>
+          <a:effectLst/>
+        </p:spPr>
+        <p:style>
+          <a:lnRef idx="1">
+            <a:schemeClr val="accent1"/>
+          </a:lnRef>
+          <a:fillRef idx="3">
+            <a:schemeClr val="accent1"/>
+          </a:fillRef>
+          <a:effectRef idx="2">
+            <a:schemeClr val="accent1"/>
+          </a:effectRef>
+          <a:fontRef idx="minor">
+            <a:schemeClr val="lt1"/>
+          </a:fontRef>
+        </p:style>
+        <p:txBody>
+          <a:bodyPr rtlCol="0" anchor="ctr"/>
+          <a:lstStyle/>
+          <a:p>
+            <a:pPr algn="ctr"/>
+          </a:p>
+        </p:txBody>
+      </p:sp>
+      <p:sp>
+        <p:nvSpPr>
+          <p:cNvPr id="39" name="TextBox 38"/>
+          <p:cNvSpPr txBox="1"/>
+          <p:nvPr/>
+        </p:nvSpPr>
+        <p:spPr>
+          <a:xfrm>
+            <a:off x="8613648" y="6281927"/>
+            <a:ext cx="2286000" cy="256032"/>
+          </a:xfrm>
+          <a:prstGeom prst="rect">
+            <a:avLst/>
+          </a:prstGeom>
+          <a:noFill/>
+        </p:spPr>
+        <p:txBody>
+          <a:bodyPr wrap="square" lIns="0" rIns="0" tIns="0" bIns="0">
+            <a:spAutoFit/>
+          </a:bodyPr>
+          <a:lstStyle/>
+          <a:p>
+            <a:pPr algn="l"/>
+            <a:r>
+              <a:rPr sz="1100" b="0">
+                <a:solidFill>
+                  <a:srgbClr val="5B6474"/>
+                </a:solidFill>
+                <a:latin typeface="Inter"/>
+              </a:rPr>
+              <a:t>People</a:t>
+            </a:r>
+          </a:p>
+        </p:txBody>
+      </p:sp>
+      <p:sp>
+        <p:nvSpPr>
+          <p:cNvPr id="40" name="TextBox 39"/>
           <p:cNvSpPr txBox="1"/>
           <p:nvPr/>
         </p:nvSpPr>
@@ -7593,7 +11003,7 @@
                 </a:solidFill>
                 <a:latin typeface="Inter"/>
               </a:rPr>
-              <a:t>Built on AMD Token Factory</a:t>
+              <a:t>Honest by design</a:t>
             </a:r>
           </a:p>
         </p:txBody>
@@ -7607,7 +11017,7 @@
         <p:spPr>
           <a:xfrm>
             <a:off x="548640" y="1463040"/>
-            <a:ext cx="6766560" cy="4754880"/>
+            <a:ext cx="11064240" cy="4754880"/>
           </a:xfrm>
           <a:prstGeom prst="rect">
             <a:avLst/>
@@ -7622,11 +11032,11 @@
           <a:p>
             <a:pPr>
               <a:spcAft>
-                <a:spcPts val="1440"/>
+                <a:spcPts val="1600"/>
               </a:spcAft>
             </a:pPr>
             <a:r>
-              <a:rPr sz="1800" b="1">
+              <a:rPr sz="2000" b="1">
                 <a:solidFill>
                   <a:srgbClr val="0F8B8D"/>
                 </a:solidFill>
@@ -7635,23 +11045,59 @@
               <a:t>▸  </a:t>
             </a:r>
             <a:r>
-              <a:rPr sz="1800" b="0">
+              <a:rPr sz="2000" b="0">
                 <a:solidFill>
                   <a:srgbClr val="1F2937"/>
                 </a:solidFill>
                 <a:latin typeface="Inter"/>
               </a:rPr>
-              <a:t>OpenAI-compatible API, JSON output; our validators are the contract.</a:t>
+              <a:t>Each responder's </a:t>
+            </a:r>
+            <a:r>
+              <a:rPr sz="2000" b="1">
+                <a:solidFill>
+                  <a:srgbClr val="16213E"/>
+                </a:solidFill>
+                <a:latin typeface="Inter"/>
+              </a:rPr>
+              <a:t>true skill</a:t>
+            </a:r>
+            <a:r>
+              <a:rPr sz="2000" b="0">
+                <a:solidFill>
+                  <a:srgbClr val="1F2937"/>
+                </a:solidFill>
+                <a:latin typeface="Inter"/>
+              </a:rPr>
+              <a:t> and each fault's </a:t>
+            </a:r>
+            <a:r>
+              <a:rPr sz="2000" b="1">
+                <a:solidFill>
+                  <a:srgbClr val="16213E"/>
+                </a:solidFill>
+                <a:latin typeface="Inter"/>
+              </a:rPr>
+              <a:t>true cause</a:t>
+            </a:r>
+            <a:r>
+              <a:rPr sz="2000" b="0">
+                <a:solidFill>
+                  <a:srgbClr val="1F2937"/>
+                </a:solidFill>
+                <a:latin typeface="Inter"/>
+              </a:rPr>
+              <a:t> are hidden simulation truth: no model, screen or analytics sees them.</a:t>
             </a:r>
           </a:p>
           <a:p>
             <a:pPr>
               <a:spcAft>
-                <a:spcPts val="1440"/>
+                <a:spcPts val="1600"/>
               </a:spcAft>
             </a:pPr>
             <a:r>
-              <a:rPr sz="1800" b="1">
+              <a:rPr sz="2000" b="1">
                 <a:solidFill>
                   <a:srgbClr val="0F8B8D"/>
                 </a:solidFill>
@@ -7660,41 +11106,23 @@
               <a:t>▸  </a:t>
             </a:r>
             <a:r>
-              <a:rPr sz="1800" b="0">
+              <a:rPr sz="2000" b="0">
                 <a:solidFill>
                   <a:srgbClr val="1F2937"/>
                 </a:solidFill>
                 <a:latin typeface="Inter"/>
               </a:rPr>
-              <a:t>Default model </a:t>
-            </a:r>
-            <a:r>
-              <a:rPr sz="1800" b="1">
-                <a:solidFill>
-                  <a:srgbClr val="16213E"/>
-                </a:solidFill>
-                <a:latin typeface="Inter"/>
-              </a:rPr>
-              <a:t>MiMo-V2.6-Flash</a:t>
-            </a:r>
-            <a:r>
-              <a:rPr sz="1800" b="0">
-                <a:solidFill>
-                  <a:srgbClr val="1F2937"/>
-                </a:solidFill>
-                <a:latin typeface="Inter"/>
-              </a:rPr>
-              <a:t>; ranking and event planner can use different models.</a:t>
+              <a:t>Outcomes are simulated from that hidden truth, independently of what the model claims.</a:t>
             </a:r>
           </a:p>
           <a:p>
             <a:pPr>
               <a:spcAft>
-                <a:spcPts val="1440"/>
+                <a:spcPts val="1600"/>
               </a:spcAft>
             </a:pPr>
             <a:r>
-              <a:rPr sz="1800" b="1">
+              <a:rPr sz="2000" b="1">
                 <a:solidFill>
                   <a:srgbClr val="0F8B8D"/>
                 </a:solidFill>
@@ -7703,23 +11131,23 @@
               <a:t>▸  </a:t>
             </a:r>
             <a:r>
-              <a:rPr sz="1800" b="0">
+              <a:rPr sz="2000" b="0">
                 <a:solidFill>
                   <a:srgbClr val="1F2937"/>
                 </a:solidFill>
                 <a:latin typeface="Inter"/>
               </a:rPr>
-              <a:t>Local budget: 10 requests/min, 2 concurrent; bounded 429 retries; circuit breaker.</a:t>
+              <a:t>Transparent baselines run alongside (nearest, naive score, most common fix); disagreements are recorded.</a:t>
             </a:r>
           </a:p>
           <a:p>
             <a:pPr>
               <a:spcAft>
-                <a:spcPts val="1440"/>
+                <a:spcPts val="1600"/>
               </a:spcAft>
             </a:pPr>
             <a:r>
-              <a:rPr sz="1800" b="1">
+              <a:rPr sz="2000" b="1">
                 <a:solidFill>
                   <a:srgbClr val="0F8B8D"/>
                 </a:solidFill>
@@ -7728,59 +11156,23 @@
               <a:t>▸  </a:t>
             </a:r>
             <a:r>
-              <a:rPr sz="1800" b="0">
+              <a:rPr sz="2000" b="0">
                 <a:solidFill>
                   <a:srgbClr val="1F2937"/>
                 </a:solidFill>
                 <a:latin typeface="Inter"/>
               </a:rPr>
-              <a:t>Recorded MiMo check: </a:t>
-            </a:r>
-            <a:r>
-              <a:rPr sz="1800" b="1">
-                <a:solidFill>
-                  <a:srgbClr val="16213E"/>
-                </a:solidFill>
-                <a:latin typeface="Inter"/>
-              </a:rPr>
-              <a:t>9/10</a:t>
-            </a:r>
-            <a:r>
-              <a:rPr sz="1800" b="0">
-                <a:solidFill>
-                  <a:srgbClr val="1F2937"/>
-                </a:solidFill>
-                <a:latin typeface="Inter"/>
-              </a:rPr>
-              <a:t> valid rankings, </a:t>
-            </a:r>
-            <a:r>
-              <a:rPr sz="1800" b="1">
-                <a:solidFill>
-                  <a:srgbClr val="16213E"/>
-                </a:solidFill>
-                <a:latin typeface="Inter"/>
-              </a:rPr>
-              <a:t>10/10</a:t>
-            </a:r>
-            <a:r>
-              <a:rPr sz="1800" b="0">
-                <a:solidFill>
-                  <a:srgbClr val="1F2937"/>
-                </a:solidFill>
-                <a:latin typeface="Inter"/>
-              </a:rPr>
-              <a:t> valid event plans.</a:t>
+              <a:t>Analytics show denominators, suppress thin samples and are not an employee leaderboard.</a:t>
             </a:r>
           </a:p>
           <a:p>
             <a:pPr>
               <a:spcAft>
-                <a:spcPts val="1440"/>
+                <a:spcPts val="1600"/>
               </a:spcAft>
             </a:pPr>
             <a:r>
-              <a:rPr sz="1800" b="1">
+              <a:rPr sz="2000" b="1">
                 <a:solidFill>
                   <a:srgbClr val="0F8B8D"/>
                 </a:solidFill>
@@ -7789,49 +11181,20 @@
               <a:t>▸  </a:t>
             </a:r>
             <a:r>
-              <a:rPr sz="1800" b="0">
+              <a:rPr sz="2000" b="0">
                 <a:solidFill>
                   <a:srgbClr val="1F2937"/>
                 </a:solidFill>
                 <a:latin typeface="Inter"/>
               </a:rPr>
-              <a:t>Ranking deadline 90 s; model calls never hold the simulation clock.</a:t>
-            </a:r>
-          </a:p>
-        </p:txBody>
-      </p:sp>
-      <p:pic>
-        <p:nvPicPr>
-          <p:cNvPr id="4" name="Picture 3" descr="settings-models.png"/>
-          <p:cNvPicPr>
-            <a:picLocks noChangeAspect="1"/>
-          </p:cNvPicPr>
-          <p:nvPr/>
-        </p:nvPicPr>
-        <p:blipFill>
-          <a:blip r:embed="rId2"/>
-          <a:stretch>
-            <a:fillRect/>
-          </a:stretch>
-        </p:blipFill>
-        <p:spPr>
-          <a:xfrm>
-            <a:off x="7818120" y="1371600"/>
-            <a:ext cx="4248336" cy="4937760"/>
-          </a:xfrm>
-          <a:prstGeom prst="rect">
-            <a:avLst/>
-          </a:prstGeom>
-          <a:ln w="9525">
-            <a:solidFill>
-              <a:srgbClr val="C9CED8"/>
-            </a:solidFill>
-          </a:ln>
-        </p:spPr>
-      </p:pic>
-      <p:sp>
-        <p:nvSpPr>
-          <p:cNvPr id="5" name="TextBox 4"/>
+              <a:t>Excluded from ranking: pay, seniority, demographics, fatigue, HR data.</a:t>
+            </a:r>
+          </a:p>
+        </p:txBody>
+      </p:sp>
+      <p:sp>
+        <p:nvSpPr>
+          <p:cNvPr id="4" name="TextBox 3"/>
           <p:cNvSpPr txBox="1"/>
           <p:nvPr/>
         </p:nvSpPr>
@@ -7920,7 +11283,7 @@
                 </a:solidFill>
                 <a:latin typeface="Inter"/>
               </a:rPr>
-              <a:t>A real MiMo ranking, end to end</a:t>
+              <a:t>The right responder</a:t>
             </a:r>
           </a:p>
         </p:txBody>
@@ -7955,7 +11318,7 @@
                 </a:solidFill>
                 <a:latin typeface="Inter"/>
               </a:rPr>
-              <a:t>ISS-3642, captured live on AMD Token Factory (MiMo-V2.6-Flash)</a:t>
+              <a:t>ISS-3618, Station 48 · captured live on AMD Token Factory (MiMo-V2.6-Flash)</a:t>
             </a:r>
           </a:p>
         </p:txBody>
@@ -7968,8 +11331,8 @@
         </p:nvSpPr>
         <p:spPr>
           <a:xfrm>
-            <a:off x="548640" y="1737360"/>
-            <a:ext cx="4206240" cy="4572000"/>
+            <a:off x="548640" y="1600200"/>
+            <a:ext cx="11064240" cy="2194560"/>
           </a:xfrm>
           <a:prstGeom prst="rect">
             <a:avLst/>
@@ -7984,11 +11347,11 @@
           <a:p>
             <a:pPr>
               <a:spcAft>
-                <a:spcPts val="1360"/>
+                <a:spcPts val="1440"/>
               </a:spcAft>
             </a:pPr>
             <a:r>
-              <a:rPr sz="1700" b="1">
+              <a:rPr sz="1800" b="1">
                 <a:solidFill>
                   <a:srgbClr val="0F8B8D"/>
                 </a:solidFill>
@@ -7997,41 +11360,41 @@
               <a:t>▸  </a:t>
             </a:r>
             <a:r>
-              <a:rPr sz="1700" b="0">
+              <a:rPr sz="1800" b="0">
                 <a:solidFill>
                   <a:srgbClr val="1F2937"/>
                 </a:solidFill>
                 <a:latin typeface="Inter"/>
               </a:rPr>
-              <a:t>Nearest responder: </a:t>
-            </a:r>
-            <a:r>
-              <a:rPr sz="1700" b="1">
+              <a:t>Nearest responder </a:t>
+            </a:r>
+            <a:r>
+              <a:rPr sz="1800" b="1">
                 <a:solidFill>
                   <a:srgbClr val="16213E"/>
                 </a:solidFill>
                 <a:latin typeface="Inter"/>
               </a:rPr>
-              <a:t>Optr375</a:t>
-            </a:r>
-            <a:r>
-              <a:rPr sz="1700" b="0">
+              <a:t>Engr361</a:t>
+            </a:r>
+            <a:r>
+              <a:rPr sz="1800" b="0">
                 <a:solidFill>
                   <a:srgbClr val="1F2937"/>
                 </a:solidFill>
                 <a:latin typeface="Inter"/>
               </a:rPr>
-              <a:t>, 0.8 min away, thin history on this fault.</a:t>
+              <a:t>: half a minute away, 26 similar cases.</a:t>
             </a:r>
           </a:p>
           <a:p>
             <a:pPr>
               <a:spcAft>
-                <a:spcPts val="1360"/>
+                <a:spcPts val="1440"/>
               </a:spcAft>
             </a:pPr>
             <a:r>
-              <a:rPr sz="1700" b="1">
+              <a:rPr sz="1800" b="1">
                 <a:solidFill>
                   <a:srgbClr val="0F8B8D"/>
                 </a:solidFill>
@@ -8040,7 +11403,7 @@
               <a:t>▸  </a:t>
             </a:r>
             <a:r>
-              <a:rPr sz="1700" b="0">
+              <a:rPr sz="1800" b="0">
                 <a:solidFill>
                   <a:srgbClr val="1F2937"/>
                 </a:solidFill>
@@ -8049,7 +11412,7 @@
               <a:t>Compass ranked </a:t>
             </a:r>
             <a:r>
-              <a:rPr sz="1700" b="1">
+              <a:rPr sz="1800" b="1">
                 <a:solidFill>
                   <a:srgbClr val="16213E"/>
                 </a:solidFill>
@@ -8058,23 +11421,23 @@
               <a:t>Engr370</a:t>
             </a:r>
             <a:r>
-              <a:rPr sz="1700" b="0">
+              <a:rPr sz="1800" b="0">
                 <a:solidFill>
                   <a:srgbClr val="1F2937"/>
                 </a:solidFill>
                 <a:latin typeface="Inter"/>
               </a:rPr>
-              <a:t> first: deepest evidence, 92% success, 2 min away.</a:t>
+              <a:t> first: 110 similar cases, 87% observed success, the same half-minute away, and explained why.</a:t>
             </a:r>
           </a:p>
           <a:p>
             <a:pPr>
               <a:spcAft>
-                <a:spcPts val="1360"/>
+                <a:spcPts val="1440"/>
               </a:spcAft>
             </a:pPr>
             <a:r>
-              <a:rPr sz="1700" b="1">
+              <a:rPr sz="1800" b="1">
                 <a:solidFill>
                   <a:srgbClr val="0F8B8D"/>
                 </a:solidFill>
@@ -8083,56 +11446,13 @@
               <a:t>▸  </a:t>
             </a:r>
             <a:r>
-              <a:rPr sz="1700" b="0">
+              <a:rPr sz="1800" b="0">
                 <a:solidFill>
                   <a:srgbClr val="1F2937"/>
                 </a:solidFill>
                 <a:latin typeface="Inter"/>
               </a:rPr>
-              <a:t>Offer accepted; resolved first time in </a:t>
-            </a:r>
-            <a:r>
-              <a:rPr sz="1700" b="1">
-                <a:solidFill>
-                  <a:srgbClr val="16213E"/>
-                </a:solidFill>
-                <a:latin typeface="Inter"/>
-              </a:rPr>
-              <a:t>11.2 min</a:t>
-            </a:r>
-            <a:r>
-              <a:rPr sz="1700" b="0">
-                <a:solidFill>
-                  <a:srgbClr val="1F2937"/>
-                </a:solidFill>
-                <a:latin typeface="Inter"/>
-              </a:rPr>
-              <a:t>.</a:t>
-            </a:r>
-          </a:p>
-          <a:p>
-            <a:pPr>
-              <a:spcAft>
-                <a:spcPts val="1360"/>
-              </a:spcAft>
-            </a:pPr>
-            <a:r>
-              <a:rPr sz="1700" b="1">
-                <a:solidFill>
-                  <a:srgbClr val="0F8B8D"/>
-                </a:solidFill>
-                <a:latin typeface="Inter"/>
-              </a:rPr>
-              <a:t>▸  </a:t>
-            </a:r>
-            <a:r>
-              <a:rPr sz="1700" b="0">
-                <a:solidFill>
-                  <a:srgbClr val="1F2937"/>
-                </a:solidFill>
-                <a:latin typeface="Inter"/>
-              </a:rPr>
-              <a:t>Every step, and the action taken, is in the issue's audit trail.</a:t>
+              <a:t>Offer accepted automatically; central command could have overridden it at any time.</a:t>
             </a:r>
           </a:p>
         </p:txBody>
@@ -8153,8 +11473,8 @@
         </p:blipFill>
         <p:spPr>
           <a:xfrm>
-            <a:off x="4983480" y="1691640"/>
-            <a:ext cx="6812280" cy="3214853"/>
+            <a:off x="548640" y="3977639"/>
+            <a:ext cx="11064240" cy="2415692"/>
           </a:xfrm>
           <a:prstGeom prst="rect">
             <a:avLst/>
@@ -8257,7 +11577,7 @@
                 </a:solidFill>
                 <a:latin typeface="Inter"/>
               </a:rPr>
-              <a:t>A month of operations</a:t>
+              <a:t>The right fix</a:t>
             </a:r>
           </a:p>
         </p:txBody>
@@ -8270,8 +11590,43 @@
         </p:nvSpPr>
         <p:spPr>
           <a:xfrm>
-            <a:off x="548640" y="1463040"/>
-            <a:ext cx="4846320" cy="4754880"/>
+            <a:off x="548640" y="1051560"/>
+            <a:ext cx="11064240" cy="457200"/>
+          </a:xfrm>
+          <a:prstGeom prst="rect">
+            <a:avLst/>
+          </a:prstGeom>
+          <a:noFill/>
+        </p:spPr>
+        <p:txBody>
+          <a:bodyPr wrap="square" lIns="0" rIns="0" tIns="0" bIns="0">
+            <a:spAutoFit/>
+          </a:bodyPr>
+          <a:lstStyle/>
+          <a:p>
+            <a:pPr algn="l"/>
+            <a:r>
+              <a:rPr sz="1600" b="0">
+                <a:solidFill>
+                  <a:srgbClr val="5B6474"/>
+                </a:solidFill>
+                <a:latin typeface="Inter"/>
+              </a:rPr>
+              <a:t>Same record: Compass ranks the troubleshooting procedures for the observed symptom</a:t>
+            </a:r>
+          </a:p>
+        </p:txBody>
+      </p:sp>
+      <p:sp>
+        <p:nvSpPr>
+          <p:cNvPr id="4" name="TextBox 3"/>
+          <p:cNvSpPr txBox="1"/>
+          <p:nvPr/>
+        </p:nvSpPr>
+        <p:spPr>
+          <a:xfrm>
+            <a:off x="548640" y="1600200"/>
+            <a:ext cx="4206240" cy="4572000"/>
           </a:xfrm>
           <a:prstGeom prst="rect">
             <a:avLst/>
@@ -8286,11 +11641,11 @@
           <a:p>
             <a:pPr>
               <a:spcAft>
-                <a:spcPts val="1440"/>
+                <a:spcPts val="1280"/>
               </a:spcAft>
             </a:pPr>
             <a:r>
-              <a:rPr sz="1800" b="1">
+              <a:rPr sz="1600" b="1">
                 <a:solidFill>
                   <a:srgbClr val="0F8B8D"/>
                 </a:solidFill>
@@ -8299,41 +11654,41 @@
               <a:t>▸  </a:t>
             </a:r>
             <a:r>
-              <a:rPr sz="1800" b="0">
+              <a:rPr sz="1600" b="0">
                 <a:solidFill>
                   <a:srgbClr val="1F2937"/>
                 </a:solidFill>
                 <a:latin typeface="Inter"/>
               </a:rPr>
-              <a:t>e8-aura-p1: </a:t>
-            </a:r>
-            <a:r>
-              <a:rPr sz="1800" b="1">
+              <a:t>Code supplies the catalog procedures and their </a:t>
+            </a:r>
+            <a:r>
+              <a:rPr sz="1600" b="1">
                 <a:solidFill>
                   <a:srgbClr val="16213E"/>
                 </a:solidFill>
                 <a:latin typeface="Inter"/>
               </a:rPr>
-              <a:t>3,531 issues</a:t>
-            </a:r>
-            <a:r>
-              <a:rPr sz="1800" b="0">
+              <a:t>observed</a:t>
+            </a:r>
+            <a:r>
+              <a:rPr sz="1600" b="0">
                 <a:solidFill>
                   <a:srgbClr val="1F2937"/>
                 </a:solidFill>
                 <a:latin typeface="Inter"/>
               </a:rPr>
-              <a:t>, 1 September to 6 October (simulated).</a:t>
+              <a:t> success on this symptom, class and station.</a:t>
             </a:r>
           </a:p>
           <a:p>
             <a:pPr>
               <a:spcAft>
-                <a:spcPts val="1440"/>
+                <a:spcPts val="1280"/>
               </a:spcAft>
             </a:pPr>
             <a:r>
-              <a:rPr sz="1800" b="1">
+              <a:rPr sz="1600" b="1">
                 <a:solidFill>
                   <a:srgbClr val="0F8B8D"/>
                 </a:solidFill>
@@ -8342,41 +11697,41 @@
               <a:t>▸  </a:t>
             </a:r>
             <a:r>
-              <a:rPr sz="1800" b="0">
+              <a:rPr sz="1600" b="0">
                 <a:solidFill>
                   <a:srgbClr val="1F2937"/>
                 </a:solidFill>
                 <a:latin typeface="Inter"/>
               </a:rPr>
-              <a:t>September: </a:t>
-            </a:r>
-            <a:r>
-              <a:rPr sz="1800" b="1">
+              <a:t>Compass ranked </a:t>
+            </a:r>
+            <a:r>
+              <a:rPr sz="1600" b="1">
                 <a:solidFill>
                   <a:srgbClr val="16213E"/>
                 </a:solidFill>
                 <a:latin typeface="Inter"/>
               </a:rPr>
-              <a:t>2,978 raised / 2,998 resolved</a:t>
-            </a:r>
-            <a:r>
-              <a:rPr sz="1800" b="0">
+              <a:t>Correct mechanical alignment</a:t>
+            </a:r>
+            <a:r>
+              <a:rPr sz="1600" b="0">
                 <a:solidFill>
                   <a:srgbClr val="1F2937"/>
                 </a:solidFill>
                 <a:latin typeface="Inter"/>
               </a:rPr>
-              <a:t> events.</a:t>
+              <a:t> first; the most common fix is the baseline.</a:t>
             </a:r>
           </a:p>
           <a:p>
             <a:pPr>
               <a:spcAft>
-                <a:spcPts val="1440"/>
+                <a:spcPts val="1280"/>
               </a:spcAft>
             </a:pPr>
             <a:r>
-              <a:rPr sz="1800" b="1">
+              <a:rPr sz="1600" b="1">
                 <a:solidFill>
                   <a:srgbClr val="0F8B8D"/>
                 </a:solidFill>
@@ -8385,23 +11740,41 @@
               <a:t>▸  </a:t>
             </a:r>
             <a:r>
-              <a:rPr sz="1800" b="0">
+              <a:rPr sz="1600" b="0">
                 <a:solidFill>
                   <a:srgbClr val="1F2937"/>
                 </a:solidFill>
                 <a:latin typeface="Inter"/>
               </a:rPr>
-              <a:t>Day, week and month views; Compass-vs-baseline records.</a:t>
+              <a:t>Engr370 applied it: fixed </a:t>
+            </a:r>
+            <a:r>
+              <a:rPr sz="1600" b="1">
+                <a:solidFill>
+                  <a:srgbClr val="16213E"/>
+                </a:solidFill>
+                <a:latin typeface="Inter"/>
+              </a:rPr>
+              <a:t>first time in 7.0 min</a:t>
+            </a:r>
+            <a:r>
+              <a:rPr sz="1600" b="0">
+                <a:solidFill>
+                  <a:srgbClr val="1F2937"/>
+                </a:solidFill>
+                <a:latin typeface="Inter"/>
+              </a:rPr>
+              <a:t>.</a:t>
             </a:r>
           </a:p>
           <a:p>
             <a:pPr>
               <a:spcAft>
-                <a:spcPts val="1440"/>
+                <a:spcPts val="1280"/>
               </a:spcAft>
             </a:pPr>
             <a:r>
-              <a:rPr sz="1800" b="1">
+              <a:rPr sz="1600" b="1">
                 <a:solidFill>
                   <a:srgbClr val="0F8B8D"/>
                 </a:solidFill>
@@ -8410,38 +11783,20 @@
               <a:t>▸  </a:t>
             </a:r>
             <a:r>
-              <a:rPr sz="1800" b="0">
+              <a:rPr sz="1600" b="0">
                 <a:solidFill>
                   <a:srgbClr val="1F2937"/>
                 </a:solidFill>
                 <a:latin typeface="Inter"/>
               </a:rPr>
-              <a:t>Seven-day detail retention: live state served in </a:t>
-            </a:r>
-            <a:r>
-              <a:rPr sz="1800" b="1">
-                <a:solidFill>
-                  <a:srgbClr val="16213E"/>
-                </a:solidFill>
-                <a:latin typeface="Inter"/>
-              </a:rPr>
-              <a:t>56 ms</a:t>
-            </a:r>
-            <a:r>
-              <a:rPr sz="1800" b="0">
-                <a:solidFill>
-                  <a:srgbClr val="1F2937"/>
-                </a:solidFill>
-                <a:latin typeface="Inter"/>
-              </a:rPr>
-              <a:t> in a local check.</a:t>
+              <a:t>A failed attempt reopens the issue and the next procedure is tried.</a:t>
             </a:r>
           </a:p>
         </p:txBody>
       </p:sp>
       <p:pic>
         <p:nvPicPr>
-          <p:cNvPr id="4" name="Picture 3" descr="analytics-month.png"/>
+          <p:cNvPr id="5" name="Picture 4" descr="fix-record.png"/>
           <p:cNvPicPr>
             <a:picLocks noChangeAspect="1"/>
           </p:cNvPicPr>
@@ -8455,8 +11810,8 @@
         </p:blipFill>
         <p:spPr>
           <a:xfrm>
-            <a:off x="5669280" y="1463040"/>
-            <a:ext cx="6080760" cy="3527001"/>
+            <a:off x="4983480" y="1600200"/>
+            <a:ext cx="6812280" cy="2986049"/>
           </a:xfrm>
           <a:prstGeom prst="rect">
             <a:avLst/>
@@ -8470,7 +11825,7 @@
       </p:pic>
       <p:sp>
         <p:nvSpPr>
-          <p:cNvPr id="5" name="TextBox 4"/>
+          <p:cNvPr id="6" name="TextBox 5"/>
           <p:cNvSpPr txBox="1"/>
           <p:nvPr/>
         </p:nvSpPr>
@@ -8559,7 +11914,7 @@
                 </a:solidFill>
                 <a:latin typeface="Inter"/>
               </a:rPr>
-              <a:t>Engineering quality</a:t>
+              <a:t>Overtime, decided by people</a:t>
             </a:r>
           </a:p>
         </p:txBody>
@@ -8572,8 +11927,43 @@
         </p:nvSpPr>
         <p:spPr>
           <a:xfrm>
-            <a:off x="548640" y="1463040"/>
-            <a:ext cx="11064240" cy="4754880"/>
+            <a:off x="548640" y="1051560"/>
+            <a:ext cx="11064240" cy="457200"/>
+          </a:xfrm>
+          <a:prstGeom prst="rect">
+            <a:avLst/>
+          </a:prstGeom>
+          <a:noFill/>
+        </p:spPr>
+        <p:txBody>
+          <a:bodyPr wrap="square" lIns="0" rIns="0" tIns="0" bIns="0">
+            <a:spAutoFit/>
+          </a:bodyPr>
+          <a:lstStyle/>
+          <a:p>
+            <a:pPr algn="l"/>
+            <a:r>
+              <a:rPr sz="1600" b="0">
+                <a:solidFill>
+                  <a:srgbClr val="5B6474"/>
+                </a:solidFill>
+                <a:latin typeface="Inter"/>
+              </a:rPr>
+              <a:t>Backlog review → lawful options → Compass ranking → central command approves or rejects</a:t>
+            </a:r>
+          </a:p>
+        </p:txBody>
+      </p:sp>
+      <p:sp>
+        <p:nvSpPr>
+          <p:cNvPr id="4" name="TextBox 3"/>
+          <p:cNvSpPr txBox="1"/>
+          <p:nvPr/>
+        </p:nvSpPr>
+        <p:spPr>
+          <a:xfrm>
+            <a:off x="548640" y="1600200"/>
+            <a:ext cx="4023360" cy="4754880"/>
           </a:xfrm>
           <a:prstGeom prst="rect">
             <a:avLst/>
@@ -8588,11 +11978,11 @@
           <a:p>
             <a:pPr>
               <a:spcAft>
-                <a:spcPts val="1680"/>
+                <a:spcPts val="1280"/>
               </a:spcAft>
             </a:pPr>
             <a:r>
-              <a:rPr sz="2100" b="1">
+              <a:rPr sz="1600" b="1">
                 <a:solidFill>
                   <a:srgbClr val="0F8B8D"/>
                 </a:solidFill>
@@ -8601,23 +11991,41 @@
               <a:t>▸  </a:t>
             </a:r>
             <a:r>
-              <a:rPr sz="2100" b="0">
+              <a:rPr sz="1600" b="0">
                 <a:solidFill>
                   <a:srgbClr val="1F2937"/>
                 </a:solidFill>
                 <a:latin typeface="Inter"/>
               </a:rPr>
-              <a:t>Live and Offline are one app; Offline makes no API calls and is fully reproducible.</a:t>
+              <a:t>When the backlog outgrows the shift, code lists only </a:t>
+            </a:r>
+            <a:r>
+              <a:rPr sz="1600" b="1">
+                <a:solidFill>
+                  <a:srgbClr val="16213E"/>
+                </a:solidFill>
+                <a:latin typeface="Inter"/>
+              </a:rPr>
+              <a:t>legal</a:t>
+            </a:r>
+            <a:r>
+              <a:rPr sz="1600" b="0">
+                <a:solidFill>
+                  <a:srgbClr val="1F2937"/>
+                </a:solidFill>
+                <a:latin typeface="Inter"/>
+              </a:rPr>
+              <a:t> options: 16 h duty, 12 h rest, staffing cap.</a:t>
             </a:r>
           </a:p>
           <a:p>
             <a:pPr>
               <a:spcAft>
-                <a:spcPts val="1680"/>
+                <a:spcPts val="1280"/>
               </a:spcAft>
             </a:pPr>
             <a:r>
-              <a:rPr sz="2100" b="1">
+              <a:rPr sz="1600" b="1">
                 <a:solidFill>
                   <a:srgbClr val="0F8B8D"/>
                 </a:solidFill>
@@ -8626,50 +12034,23 @@
               <a:t>▸  </a:t>
             </a:r>
             <a:r>
-              <a:rPr sz="2100" b="1">
-                <a:solidFill>
-                  <a:srgbClr val="16213E"/>
-                </a:solidFill>
-                <a:latin typeface="Inter"/>
-              </a:rPr>
-              <a:t>277</a:t>
-            </a:r>
-            <a:r>
-              <a:rPr sz="2100" b="0">
+              <a:rPr sz="1600" b="0">
                 <a:solidFill>
                   <a:srgbClr val="1F2937"/>
                 </a:solidFill>
                 <a:latin typeface="Inter"/>
               </a:rPr>
-              <a:t> hermetic unit and integration tests and </a:t>
-            </a:r>
-            <a:r>
-              <a:rPr sz="2100" b="1">
-                <a:solidFill>
-                  <a:srgbClr val="16213E"/>
-                </a:solidFill>
-                <a:latin typeface="Inter"/>
-              </a:rPr>
-              <a:t>51</a:t>
-            </a:r>
-            <a:r>
-              <a:rPr sz="2100" b="0">
-                <a:solidFill>
-                  <a:srgbClr val="1F2937"/>
-                </a:solidFill>
-                <a:latin typeface="Inter"/>
-              </a:rPr>
-              <a:t> Chromium end-to-end tests.</a:t>
+              <a:t>Compass ranks them by observed coverage of the backlog; the old first-eligible rule is the baseline.</a:t>
             </a:r>
           </a:p>
           <a:p>
             <a:pPr>
               <a:spcAft>
-                <a:spcPts val="1680"/>
+                <a:spcPts val="1280"/>
               </a:spcAft>
             </a:pPr>
             <a:r>
-              <a:rPr sz="2100" b="1">
+              <a:rPr sz="1600" b="1">
                 <a:solidFill>
                   <a:srgbClr val="0F8B8D"/>
                 </a:solidFill>
@@ -8678,23 +12059,41 @@
               <a:t>▸  </a:t>
             </a:r>
             <a:r>
-              <a:rPr sz="2100" b="0">
+              <a:rPr sz="1600" b="0">
                 <a:solidFill>
                   <a:srgbClr val="1F2937"/>
                 </a:solidFill>
                 <a:latin typeface="Inter"/>
               </a:rPr>
-              <a:t>Deterministic seeded simulation; restart-safe scheduler; atomic, crash-safe persistence.</a:t>
+              <a:t>Nothing changes until </a:t>
+            </a:r>
+            <a:r>
+              <a:rPr sz="1600" b="1">
+                <a:solidFill>
+                  <a:srgbClr val="16213E"/>
+                </a:solidFill>
+                <a:latin typeface="Inter"/>
+              </a:rPr>
+              <a:t>central command</a:t>
+            </a:r>
+            <a:r>
+              <a:rPr sz="1600" b="0">
+                <a:solidFill>
+                  <a:srgbClr val="1F2937"/>
+                </a:solidFill>
+                <a:latin typeface="Inter"/>
+              </a:rPr>
+              <a:t> approves; unanswered recommendations expire.</a:t>
             </a:r>
           </a:p>
           <a:p>
             <a:pPr>
               <a:spcAft>
-                <a:spcPts val="1680"/>
+                <a:spcPts val="1280"/>
               </a:spcAft>
             </a:pPr>
             <a:r>
-              <a:rPr sz="2100" b="1">
+              <a:rPr sz="1600" b="1">
                 <a:solidFill>
                   <a:srgbClr val="0F8B8D"/>
                 </a:solidFill>
@@ -8703,20 +12102,49 @@
               <a:t>▸  </a:t>
             </a:r>
             <a:r>
-              <a:rPr sz="2100" b="0">
+              <a:rPr sz="1600" b="0">
                 <a:solidFill>
                   <a:srgbClr val="1F2937"/>
                 </a:solidFill>
                 <a:latin typeface="Inter"/>
               </a:rPr>
-              <a:t>Runs on Node.js 22 or Docker; no external services besides the model API.</a:t>
-            </a:r>
-          </a:p>
-        </p:txBody>
-      </p:sp>
-      <p:sp>
-        <p:nvSpPr>
-          <p:cNvPr id="4" name="TextBox 3"/>
+              <a:t>Every decision, and who made it, is audited.</a:t>
+            </a:r>
+          </a:p>
+        </p:txBody>
+      </p:sp>
+      <p:pic>
+        <p:nvPicPr>
+          <p:cNvPr id="5" name="Picture 4" descr="staffing.png"/>
+          <p:cNvPicPr>
+            <a:picLocks noChangeAspect="1"/>
+          </p:cNvPicPr>
+          <p:nvPr/>
+        </p:nvPicPr>
+        <p:blipFill>
+          <a:blip r:embed="rId2"/>
+          <a:stretch>
+            <a:fillRect/>
+          </a:stretch>
+        </p:blipFill>
+        <p:spPr>
+          <a:xfrm>
+            <a:off x="4846320" y="1600200"/>
+            <a:ext cx="6858000" cy="4252187"/>
+          </a:xfrm>
+          <a:prstGeom prst="rect">
+            <a:avLst/>
+          </a:prstGeom>
+          <a:ln w="9525">
+            <a:solidFill>
+              <a:srgbClr val="C9CED8"/>
+            </a:solidFill>
+          </a:ln>
+        </p:spPr>
+      </p:pic>
+      <p:sp>
+        <p:nvSpPr>
+          <p:cNvPr id="6" name="TextBox 5"/>
           <p:cNvSpPr txBox="1"/>
           <p:nvPr/>
         </p:nvSpPr>

--- a/docs/submission/ResponseCompass-deck.pptx
+++ b/docs/submission/ResponseCompass-deck.pptx
@@ -5322,7 +5322,7 @@
         <p:spPr>
           <a:xfrm>
             <a:off x="5669280" y="1463040"/>
-            <a:ext cx="6080760" cy="3527001"/>
+            <a:ext cx="6080760" cy="4279053"/>
           </a:xfrm>
           <a:prstGeom prst="rect">
             <a:avLst/>
@@ -5438,8 +5438,8 @@
         </p:nvSpPr>
         <p:spPr>
           <a:xfrm>
-            <a:off x="548640" y="1463040"/>
-            <a:ext cx="6766560" cy="4754880"/>
+            <a:off x="548640" y="1371600"/>
+            <a:ext cx="11064240" cy="3291840"/>
           </a:xfrm>
           <a:prstGeom prst="rect">
             <a:avLst/>
@@ -5648,8 +5648,8 @@
         </p:blipFill>
         <p:spPr>
           <a:xfrm>
-            <a:off x="7818120" y="1371600"/>
-            <a:ext cx="4248336" cy="4937760"/>
+            <a:off x="1463040" y="4617720"/>
+            <a:ext cx="7863840" cy="2030535"/>
           </a:xfrm>
           <a:prstGeom prst="rect">
             <a:avLst/>
@@ -5825,7 +5825,7 @@
                 </a:solidFill>
                 <a:latin typeface="Inter"/>
               </a:rPr>
-              <a:t>317</a:t>
+              <a:t>319</a:t>
             </a:r>
             <a:r>
               <a:rPr sz="2100" b="0">
@@ -5843,7 +5843,7 @@
                 </a:solidFill>
                 <a:latin typeface="Inter"/>
               </a:rPr>
-              <a:t>67</a:t>
+              <a:t>71</a:t>
             </a:r>
             <a:r>
               <a:rPr sz="2100" b="0">
@@ -11811,7 +11811,7 @@
         <p:spPr>
           <a:xfrm>
             <a:off x="4983480" y="1600200"/>
-            <a:ext cx="6812280" cy="2986049"/>
+            <a:ext cx="6812280" cy="3093910"/>
           </a:xfrm>
           <a:prstGeom prst="rect">
             <a:avLst/>
@@ -12130,7 +12130,7 @@
         <p:spPr>
           <a:xfrm>
             <a:off x="4846320" y="1600200"/>
-            <a:ext cx="6858000" cy="4252187"/>
+            <a:ext cx="6858000" cy="4314635"/>
           </a:xfrm>
           <a:prstGeom prst="rect">
             <a:avLst/>
